--- a/Car_Buying_Project/Google_Slides_Import/Buying_My_First_Car_Career_Style.pptx
+++ b/Car_Buying_Project/Google_Slides_Import/Buying_My_First_Car_Career_Style.pptx
@@ -1266,7 +1266,7 @@
   <p:cSld>
     <p:spTree>
       <p:nvGrpSpPr>
-        <p:cNvPr id="38" name="Shape 38"/>
+        <p:cNvPr id="47" name="Shape 47"/>
         <p:cNvGrpSpPr/>
         <p:nvPr/>
       </p:nvGrpSpPr>
@@ -1280,7 +1280,7 @@
       </p:grpSpPr>
       <p:sp>
         <p:nvSpPr>
-          <p:cNvPr id="39" name="Google Shape;39;p1:notes"/>
+          <p:cNvPr id="48" name="Google Shape;48;p1:notes"/>
           <p:cNvSpPr/>
           <p:nvPr>
             <p:ph idx="2" type="sldImg"/>
@@ -1319,7 +1319,7 @@
       </p:sp>
       <p:sp>
         <p:nvSpPr>
-          <p:cNvPr id="40" name="Google Shape;40;p1:notes"/>
+          <p:cNvPr id="49" name="Google Shape;49;p1:notes"/>
           <p:cNvSpPr txBox="1"/>
           <p:nvPr>
             <p:ph idx="1" type="body"/>
@@ -1362,7 +1362,7 @@
       </p:sp>
       <p:sp>
         <p:nvSpPr>
-          <p:cNvPr id="41" name="Google Shape;41;p1:notes"/>
+          <p:cNvPr id="50" name="Google Shape;50;p1:notes"/>
           <p:cNvSpPr txBox="1"/>
           <p:nvPr>
             <p:ph idx="12" type="sldNum"/>
@@ -1416,7 +1416,7 @@
   <p:cSld>
     <p:spTree>
       <p:nvGrpSpPr>
-        <p:cNvPr id="59" name="Shape 59"/>
+        <p:cNvPr id="82" name="Shape 82"/>
         <p:cNvGrpSpPr/>
         <p:nvPr/>
       </p:nvGrpSpPr>
@@ -1430,7 +1430,7 @@
       </p:grpSpPr>
       <p:sp>
         <p:nvSpPr>
-          <p:cNvPr id="60" name="Google Shape;60;p2:notes"/>
+          <p:cNvPr id="83" name="Google Shape;83;p2:notes"/>
           <p:cNvSpPr/>
           <p:nvPr>
             <p:ph idx="2" type="sldImg"/>
@@ -1469,7 +1469,7 @@
       </p:sp>
       <p:sp>
         <p:nvSpPr>
-          <p:cNvPr id="61" name="Google Shape;61;p2:notes"/>
+          <p:cNvPr id="84" name="Google Shape;84;p2:notes"/>
           <p:cNvSpPr txBox="1"/>
           <p:nvPr>
             <p:ph idx="1" type="body"/>
@@ -1512,7 +1512,7 @@
       </p:sp>
       <p:sp>
         <p:nvSpPr>
-          <p:cNvPr id="62" name="Google Shape;62;p2:notes"/>
+          <p:cNvPr id="85" name="Google Shape;85;p2:notes"/>
           <p:cNvSpPr txBox="1"/>
           <p:nvPr>
             <p:ph idx="12" type="sldNum"/>
@@ -1566,7 +1566,7 @@
   <p:cSld>
     <p:spTree>
       <p:nvGrpSpPr>
-        <p:cNvPr id="79" name="Shape 79"/>
+        <p:cNvPr id="116" name="Shape 116"/>
         <p:cNvGrpSpPr/>
         <p:nvPr/>
       </p:nvGrpSpPr>
@@ -1580,7 +1580,7 @@
       </p:grpSpPr>
       <p:sp>
         <p:nvSpPr>
-          <p:cNvPr id="80" name="Google Shape;80;p3:notes"/>
+          <p:cNvPr id="117" name="Google Shape;117;p3:notes"/>
           <p:cNvSpPr/>
           <p:nvPr>
             <p:ph idx="2" type="sldImg"/>
@@ -1619,7 +1619,7 @@
       </p:sp>
       <p:sp>
         <p:nvSpPr>
-          <p:cNvPr id="81" name="Google Shape;81;p3:notes"/>
+          <p:cNvPr id="118" name="Google Shape;118;p3:notes"/>
           <p:cNvSpPr txBox="1"/>
           <p:nvPr>
             <p:ph idx="1" type="body"/>
@@ -1662,7 +1662,7 @@
       </p:sp>
       <p:sp>
         <p:nvSpPr>
-          <p:cNvPr id="82" name="Google Shape;82;p3:notes"/>
+          <p:cNvPr id="119" name="Google Shape;119;p3:notes"/>
           <p:cNvSpPr txBox="1"/>
           <p:nvPr>
             <p:ph idx="12" type="sldNum"/>
@@ -1716,7 +1716,7 @@
   <p:cSld>
     <p:spTree>
       <p:nvGrpSpPr>
-        <p:cNvPr id="110" name="Shape 110"/>
+        <p:cNvPr id="173" name="Shape 173"/>
         <p:cNvGrpSpPr/>
         <p:nvPr/>
       </p:nvGrpSpPr>
@@ -1730,7 +1730,7 @@
       </p:grpSpPr>
       <p:sp>
         <p:nvSpPr>
-          <p:cNvPr id="111" name="Google Shape;111;p4:notes"/>
+          <p:cNvPr id="174" name="Google Shape;174;p4:notes"/>
           <p:cNvSpPr/>
           <p:nvPr>
             <p:ph idx="2" type="sldImg"/>
@@ -1769,7 +1769,7 @@
       </p:sp>
       <p:sp>
         <p:nvSpPr>
-          <p:cNvPr id="112" name="Google Shape;112;p4:notes"/>
+          <p:cNvPr id="175" name="Google Shape;175;p4:notes"/>
           <p:cNvSpPr txBox="1"/>
           <p:nvPr>
             <p:ph idx="1" type="body"/>
@@ -1812,7 +1812,7 @@
       </p:sp>
       <p:sp>
         <p:nvSpPr>
-          <p:cNvPr id="113" name="Google Shape;113;p4:notes"/>
+          <p:cNvPr id="176" name="Google Shape;176;p4:notes"/>
           <p:cNvSpPr txBox="1"/>
           <p:nvPr>
             <p:ph idx="12" type="sldNum"/>
@@ -1866,7 +1866,7 @@
   <p:cSld>
     <p:spTree>
       <p:nvGrpSpPr>
-        <p:cNvPr id="130" name="Shape 130"/>
+        <p:cNvPr id="207" name="Shape 207"/>
         <p:cNvGrpSpPr/>
         <p:nvPr/>
       </p:nvGrpSpPr>
@@ -1880,7 +1880,7 @@
       </p:grpSpPr>
       <p:sp>
         <p:nvSpPr>
-          <p:cNvPr id="131" name="Google Shape;131;p5:notes"/>
+          <p:cNvPr id="208" name="Google Shape;208;p5:notes"/>
           <p:cNvSpPr/>
           <p:nvPr>
             <p:ph idx="2" type="sldImg"/>
@@ -1919,7 +1919,7 @@
       </p:sp>
       <p:sp>
         <p:nvSpPr>
-          <p:cNvPr id="132" name="Google Shape;132;p5:notes"/>
+          <p:cNvPr id="209" name="Google Shape;209;p5:notes"/>
           <p:cNvSpPr txBox="1"/>
           <p:nvPr>
             <p:ph idx="1" type="body"/>
@@ -1962,7 +1962,7 @@
       </p:sp>
       <p:sp>
         <p:nvSpPr>
-          <p:cNvPr id="133" name="Google Shape;133;p5:notes"/>
+          <p:cNvPr id="210" name="Google Shape;210;p5:notes"/>
           <p:cNvSpPr txBox="1"/>
           <p:nvPr>
             <p:ph idx="12" type="sldNum"/>
@@ -2016,7 +2016,7 @@
   <p:cSld>
     <p:spTree>
       <p:nvGrpSpPr>
-        <p:cNvPr id="161" name="Shape 161"/>
+        <p:cNvPr id="264" name="Shape 264"/>
         <p:cNvGrpSpPr/>
         <p:nvPr/>
       </p:nvGrpSpPr>
@@ -2030,7 +2030,7 @@
       </p:grpSpPr>
       <p:sp>
         <p:nvSpPr>
-          <p:cNvPr id="162" name="Google Shape;162;p6:notes"/>
+          <p:cNvPr id="265" name="Google Shape;265;p6:notes"/>
           <p:cNvSpPr/>
           <p:nvPr>
             <p:ph idx="2" type="sldImg"/>
@@ -2069,7 +2069,7 @@
       </p:sp>
       <p:sp>
         <p:nvSpPr>
-          <p:cNvPr id="163" name="Google Shape;163;p6:notes"/>
+          <p:cNvPr id="266" name="Google Shape;266;p6:notes"/>
           <p:cNvSpPr txBox="1"/>
           <p:nvPr>
             <p:ph idx="1" type="body"/>
@@ -2112,7 +2112,7 @@
       </p:sp>
       <p:sp>
         <p:nvSpPr>
-          <p:cNvPr id="164" name="Google Shape;164;p6:notes"/>
+          <p:cNvPr id="267" name="Google Shape;267;p6:notes"/>
           <p:cNvSpPr txBox="1"/>
           <p:nvPr>
             <p:ph idx="12" type="sldNum"/>
@@ -5245,7 +5245,7 @@
     <p:bg>
       <p:bgPr>
         <a:solidFill>
-          <a:srgbClr val="FFF9EE"/>
+          <a:srgbClr val="FFFDF7"/>
         </a:solidFill>
       </p:bgPr>
     </p:bg>
@@ -5263,24 +5263,372 @@
           <a:chExt cx="0" cy="0"/>
         </a:xfrm>
       </p:grpSpPr>
+      <p:sp>
+        <p:nvSpPr>
+          <p:cNvPr id="31" name="Google Shape;31;p8"/>
+          <p:cNvSpPr/>
+          <p:nvPr/>
+        </p:nvSpPr>
+        <p:spPr>
+          <a:xfrm rot="2399876">
+            <a:off x="33891" y="-152403"/>
+            <a:ext cx="846661" cy="846661"/>
+          </a:xfrm>
+          <a:prstGeom prst="rect">
+            <a:avLst/>
+          </a:prstGeom>
+          <a:solidFill>
+            <a:srgbClr val="38BDF8"/>
+          </a:solidFill>
+          <a:ln cap="flat" cmpd="sng" w="42325">
+            <a:solidFill>
+              <a:srgbClr val="1C1C1C"/>
+            </a:solidFill>
+            <a:prstDash val="solid"/>
+            <a:round/>
+            <a:headEnd len="sm" w="sm" type="none"/>
+            <a:tailEnd len="sm" w="sm" type="none"/>
+          </a:ln>
+        </p:spPr>
+        <p:txBody>
+          <a:bodyPr anchorCtr="0" anchor="ctr" bIns="91425" lIns="91425" spcFirstLastPara="1" rIns="91425" wrap="square" tIns="91425">
+            <a:noAutofit/>
+          </a:bodyPr>
+          <a:lstStyle/>
+          <a:p>
+            <a:pPr indent="0" lvl="0" marL="0" rtl="0" algn="ctr">
+              <a:spcBef>
+                <a:spcPts val="0"/>
+              </a:spcBef>
+              <a:spcAft>
+                <a:spcPts val="0"/>
+              </a:spcAft>
+              <a:buNone/>
+            </a:pPr>
+            <a:r>
+              <a:t/>
+            </a:r>
+            <a:endParaRPr/>
+          </a:p>
+        </p:txBody>
+      </p:sp>
+      <p:sp>
+        <p:nvSpPr>
+          <p:cNvPr id="32" name="Google Shape;32;p8"/>
+          <p:cNvSpPr/>
+          <p:nvPr/>
+        </p:nvSpPr>
+        <p:spPr>
+          <a:xfrm rot="-1619505">
+            <a:off x="5604918" y="508063"/>
+            <a:ext cx="846733" cy="846733"/>
+          </a:xfrm>
+          <a:prstGeom prst="rect">
+            <a:avLst/>
+          </a:prstGeom>
+          <a:solidFill>
+            <a:srgbClr val="4ADE80"/>
+          </a:solidFill>
+          <a:ln cap="flat" cmpd="sng" w="42325">
+            <a:solidFill>
+              <a:srgbClr val="1C1C1C"/>
+            </a:solidFill>
+            <a:prstDash val="solid"/>
+            <a:round/>
+            <a:headEnd len="sm" w="sm" type="none"/>
+            <a:tailEnd len="sm" w="sm" type="none"/>
+          </a:ln>
+        </p:spPr>
+        <p:txBody>
+          <a:bodyPr anchorCtr="0" anchor="ctr" bIns="91425" lIns="91425" spcFirstLastPara="1" rIns="91425" wrap="square" tIns="91425">
+            <a:noAutofit/>
+          </a:bodyPr>
+          <a:lstStyle/>
+          <a:p>
+            <a:pPr indent="0" lvl="0" marL="0" rtl="0" algn="ctr">
+              <a:spcBef>
+                <a:spcPts val="0"/>
+              </a:spcBef>
+              <a:spcAft>
+                <a:spcPts val="0"/>
+              </a:spcAft>
+              <a:buNone/>
+            </a:pPr>
+            <a:r>
+              <a:t/>
+            </a:r>
+            <a:endParaRPr/>
+          </a:p>
+        </p:txBody>
+      </p:sp>
+      <p:sp>
+        <p:nvSpPr>
+          <p:cNvPr id="33" name="Google Shape;33;p8"/>
+          <p:cNvSpPr/>
+          <p:nvPr/>
+        </p:nvSpPr>
+        <p:spPr>
+          <a:xfrm rot="960070">
+            <a:off x="10210783" y="5808144"/>
+            <a:ext cx="846705" cy="846705"/>
+          </a:xfrm>
+          <a:prstGeom prst="rect">
+            <a:avLst/>
+          </a:prstGeom>
+          <a:solidFill>
+            <a:srgbClr val="4ADE80"/>
+          </a:solidFill>
+          <a:ln cap="flat" cmpd="sng" w="42325">
+            <a:solidFill>
+              <a:srgbClr val="1C1C1C"/>
+            </a:solidFill>
+            <a:prstDash val="solid"/>
+            <a:round/>
+            <a:headEnd len="sm" w="sm" type="none"/>
+            <a:tailEnd len="sm" w="sm" type="none"/>
+          </a:ln>
+        </p:spPr>
+        <p:txBody>
+          <a:bodyPr anchorCtr="0" anchor="ctr" bIns="91425" lIns="91425" spcFirstLastPara="1" rIns="91425" wrap="square" tIns="91425">
+            <a:noAutofit/>
+          </a:bodyPr>
+          <a:lstStyle/>
+          <a:p>
+            <a:pPr indent="0" lvl="0" marL="0" rtl="0" algn="ctr">
+              <a:spcBef>
+                <a:spcPts val="0"/>
+              </a:spcBef>
+              <a:spcAft>
+                <a:spcPts val="0"/>
+              </a:spcAft>
+              <a:buNone/>
+            </a:pPr>
+            <a:r>
+              <a:t/>
+            </a:r>
+            <a:endParaRPr/>
+          </a:p>
+        </p:txBody>
+      </p:sp>
+      <p:sp>
+        <p:nvSpPr>
+          <p:cNvPr id="34" name="Google Shape;34;p8"/>
+          <p:cNvSpPr/>
+          <p:nvPr/>
+        </p:nvSpPr>
+        <p:spPr>
+          <a:xfrm>
+            <a:off x="3352800" y="4876800"/>
+            <a:ext cx="1050000" cy="1050000"/>
+          </a:xfrm>
+          <a:prstGeom prst="ellipse">
+            <a:avLst/>
+          </a:prstGeom>
+          <a:solidFill>
+            <a:srgbClr val="F472B6"/>
+          </a:solidFill>
+          <a:ln cap="flat" cmpd="sng" w="42325">
+            <a:solidFill>
+              <a:srgbClr val="1C1C1C"/>
+            </a:solidFill>
+            <a:prstDash val="solid"/>
+            <a:round/>
+            <a:headEnd len="sm" w="sm" type="none"/>
+            <a:tailEnd len="sm" w="sm" type="none"/>
+          </a:ln>
+        </p:spPr>
+        <p:txBody>
+          <a:bodyPr anchorCtr="0" anchor="ctr" bIns="91425" lIns="91425" spcFirstLastPara="1" rIns="91425" wrap="square" tIns="91425">
+            <a:noAutofit/>
+          </a:bodyPr>
+          <a:lstStyle/>
+          <a:p>
+            <a:pPr indent="0" lvl="0" marL="0" rtl="0" algn="ctr">
+              <a:spcBef>
+                <a:spcPts val="0"/>
+              </a:spcBef>
+              <a:spcAft>
+                <a:spcPts val="0"/>
+              </a:spcAft>
+              <a:buNone/>
+            </a:pPr>
+            <a:r>
+              <a:t/>
+            </a:r>
+            <a:endParaRPr/>
+          </a:p>
+        </p:txBody>
+      </p:sp>
+      <p:sp>
+        <p:nvSpPr>
+          <p:cNvPr id="35" name="Google Shape;35;p8"/>
+          <p:cNvSpPr/>
+          <p:nvPr/>
+        </p:nvSpPr>
+        <p:spPr>
+          <a:xfrm>
+            <a:off x="677333" y="762000"/>
+            <a:ext cx="3894600" cy="507900"/>
+          </a:xfrm>
+          <a:prstGeom prst="roundRect">
+            <a:avLst>
+              <a:gd fmla="val 16667" name="adj"/>
+            </a:avLst>
+          </a:prstGeom>
+          <a:solidFill>
+            <a:srgbClr val="38BDF8"/>
+          </a:solidFill>
+          <a:ln cap="flat" cmpd="sng" w="38950">
+            <a:solidFill>
+              <a:srgbClr val="1C1C1C"/>
+            </a:solidFill>
+            <a:prstDash val="solid"/>
+            <a:round/>
+            <a:headEnd len="sm" w="sm" type="none"/>
+            <a:tailEnd len="sm" w="sm" type="none"/>
+          </a:ln>
+        </p:spPr>
+        <p:txBody>
+          <a:bodyPr anchorCtr="0" anchor="ctr" bIns="91425" lIns="91425" spcFirstLastPara="1" rIns="91425" wrap="square" tIns="91425">
+            <a:noAutofit/>
+          </a:bodyPr>
+          <a:lstStyle/>
+          <a:p>
+            <a:pPr indent="0" lvl="0" marL="0" rtl="0" algn="ctr">
+              <a:spcBef>
+                <a:spcPts val="0"/>
+              </a:spcBef>
+              <a:spcAft>
+                <a:spcPts val="0"/>
+              </a:spcAft>
+              <a:buNone/>
+            </a:pPr>
+            <a:r>
+              <a:t/>
+            </a:r>
+            <a:endParaRPr/>
+          </a:p>
+        </p:txBody>
+      </p:sp>
+      <p:sp>
+        <p:nvSpPr>
+          <p:cNvPr id="36" name="Google Shape;36;p8"/>
+          <p:cNvSpPr/>
+          <p:nvPr/>
+        </p:nvSpPr>
+        <p:spPr>
+          <a:xfrm>
+            <a:off x="677333" y="4656667"/>
+            <a:ext cx="2929500" cy="1016100"/>
+          </a:xfrm>
+          <a:prstGeom prst="roundRect">
+            <a:avLst>
+              <a:gd fmla="val 16667" name="adj"/>
+            </a:avLst>
+          </a:prstGeom>
+          <a:solidFill>
+            <a:srgbClr val="FFFDF7"/>
+          </a:solidFill>
+          <a:ln cap="flat" cmpd="sng" w="38950">
+            <a:solidFill>
+              <a:srgbClr val="1C1C1C"/>
+            </a:solidFill>
+            <a:prstDash val="solid"/>
+            <a:round/>
+            <a:headEnd len="sm" w="sm" type="none"/>
+            <a:tailEnd len="sm" w="sm" type="none"/>
+          </a:ln>
+        </p:spPr>
+        <p:txBody>
+          <a:bodyPr anchorCtr="0" anchor="ctr" bIns="91425" lIns="91425" spcFirstLastPara="1" rIns="91425" wrap="square" tIns="91425">
+            <a:noAutofit/>
+          </a:bodyPr>
+          <a:lstStyle/>
+          <a:p>
+            <a:pPr indent="0" lvl="0" marL="0" rtl="0" algn="ctr">
+              <a:spcBef>
+                <a:spcPts val="0"/>
+              </a:spcBef>
+              <a:spcAft>
+                <a:spcPts val="0"/>
+              </a:spcAft>
+              <a:buNone/>
+            </a:pPr>
+            <a:r>
+              <a:t/>
+            </a:r>
+            <a:endParaRPr/>
+          </a:p>
+        </p:txBody>
+      </p:sp>
+      <p:sp>
+        <p:nvSpPr>
+          <p:cNvPr id="37" name="Google Shape;37;p8"/>
+          <p:cNvSpPr/>
+          <p:nvPr/>
+        </p:nvSpPr>
+        <p:spPr>
+          <a:xfrm>
+            <a:off x="7112000" y="1134533"/>
+            <a:ext cx="4826100" cy="4402800"/>
+          </a:xfrm>
+          <a:prstGeom prst="roundRect">
+            <a:avLst>
+              <a:gd fmla="val 16667" name="adj"/>
+            </a:avLst>
+          </a:prstGeom>
+          <a:solidFill>
+            <a:srgbClr val="F472B6"/>
+          </a:solidFill>
+          <a:ln cap="flat" cmpd="sng" w="38950">
+            <a:solidFill>
+              <a:srgbClr val="1C1C1C"/>
+            </a:solidFill>
+            <a:prstDash val="solid"/>
+            <a:round/>
+            <a:headEnd len="sm" w="sm" type="none"/>
+            <a:tailEnd len="sm" w="sm" type="none"/>
+          </a:ln>
+        </p:spPr>
+        <p:txBody>
+          <a:bodyPr anchorCtr="0" anchor="ctr" bIns="91425" lIns="91425" spcFirstLastPara="1" rIns="91425" wrap="square" tIns="91425">
+            <a:noAutofit/>
+          </a:bodyPr>
+          <a:lstStyle/>
+          <a:p>
+            <a:pPr indent="0" lvl="0" marL="0" rtl="0" algn="ctr">
+              <a:spcBef>
+                <a:spcPts val="0"/>
+              </a:spcBef>
+              <a:spcAft>
+                <a:spcPts val="0"/>
+              </a:spcAft>
+              <a:buNone/>
+            </a:pPr>
+            <a:r>
+              <a:t/>
+            </a:r>
+            <a:endParaRPr/>
+          </a:p>
+        </p:txBody>
+      </p:sp>
       <p:pic>
         <p:nvPicPr>
-          <p:cNvPr id="31" name="Google Shape;31;p8"/>
+          <p:cNvPr id="38" name="Google Shape;38;p8"/>
           <p:cNvPicPr preferRelativeResize="0"/>
           <p:nvPr/>
         </p:nvPicPr>
-        <p:blipFill>
+        <p:blipFill rotWithShape="1">
           <a:blip r:embed="rId3">
             <a:alphaModFix/>
           </a:blip>
-          <a:stretch>
-            <a:fillRect/>
-          </a:stretch>
+          <a:srcRect b="0" l="0" r="0" t="0"/>
+          <a:stretch/>
         </p:blipFill>
         <p:spPr>
           <a:xfrm>
-            <a:off x="0" y="0"/>
-            <a:ext cx="12191998" cy="6857999"/>
+            <a:off x="6976533" y="999067"/>
+            <a:ext cx="4825999" cy="4402666"/>
           </a:xfrm>
           <a:prstGeom prst="rect">
             <a:avLst/>
@@ -5293,7 +5641,107 @@
       </p:pic>
       <p:sp>
         <p:nvSpPr>
-          <p:cNvPr id="32" name="Google Shape;32;p8"/>
+          <p:cNvPr id="39" name="Google Shape;39;p8"/>
+          <p:cNvSpPr/>
+          <p:nvPr/>
+        </p:nvSpPr>
+        <p:spPr>
+          <a:xfrm>
+            <a:off x="6976533" y="999067"/>
+            <a:ext cx="4826100" cy="4402800"/>
+          </a:xfrm>
+          <a:prstGeom prst="roundRect">
+            <a:avLst>
+              <a:gd fmla="val 16667" name="adj"/>
+            </a:avLst>
+          </a:prstGeom>
+          <a:noFill/>
+          <a:ln cap="flat" cmpd="sng" w="38950">
+            <a:solidFill>
+              <a:srgbClr val="1C1C1C"/>
+            </a:solidFill>
+            <a:prstDash val="solid"/>
+            <a:round/>
+            <a:headEnd len="sm" w="sm" type="none"/>
+            <a:tailEnd len="sm" w="sm" type="none"/>
+          </a:ln>
+        </p:spPr>
+        <p:txBody>
+          <a:bodyPr anchorCtr="0" anchor="ctr" bIns="91425" lIns="91425" spcFirstLastPara="1" rIns="91425" wrap="square" tIns="91425">
+            <a:noAutofit/>
+          </a:bodyPr>
+          <a:lstStyle/>
+          <a:p>
+            <a:pPr indent="0" lvl="0" marL="0" rtl="0" algn="ctr">
+              <a:spcBef>
+                <a:spcPts val="0"/>
+              </a:spcBef>
+              <a:spcAft>
+                <a:spcPts val="0"/>
+              </a:spcAft>
+              <a:buNone/>
+            </a:pPr>
+            <a:r>
+              <a:t/>
+            </a:r>
+            <a:endParaRPr/>
+          </a:p>
+        </p:txBody>
+      </p:sp>
+      <p:sp>
+        <p:nvSpPr>
+          <p:cNvPr id="40" name="Google Shape;40;p8"/>
+          <p:cNvSpPr/>
+          <p:nvPr/>
+        </p:nvSpPr>
+        <p:spPr>
+          <a:xfrm>
+            <a:off x="10092267" y="829733"/>
+            <a:ext cx="1456200" cy="389400"/>
+          </a:xfrm>
+          <a:prstGeom prst="roundRect">
+            <a:avLst>
+              <a:gd fmla="val 16667" name="adj"/>
+            </a:avLst>
+          </a:prstGeom>
+          <a:solidFill>
+            <a:srgbClr val="FDE047"/>
+          </a:solidFill>
+          <a:ln cap="flat" cmpd="sng" w="38950">
+            <a:solidFill>
+              <a:srgbClr val="1C1C1C"/>
+            </a:solidFill>
+            <a:prstDash val="solid"/>
+            <a:round/>
+            <a:headEnd len="sm" w="sm" type="none"/>
+            <a:tailEnd len="sm" w="sm" type="none"/>
+          </a:ln>
+        </p:spPr>
+        <p:txBody>
+          <a:bodyPr anchorCtr="0" anchor="ctr" bIns="91425" lIns="91425" spcFirstLastPara="1" rIns="91425" wrap="square" tIns="91425">
+            <a:noAutofit/>
+          </a:bodyPr>
+          <a:lstStyle/>
+          <a:p>
+            <a:pPr indent="0" lvl="0" marL="0" rtl="0" algn="ctr">
+              <a:spcBef>
+                <a:spcPts val="0"/>
+              </a:spcBef>
+              <a:spcAft>
+                <a:spcPts val="0"/>
+              </a:spcAft>
+              <a:buNone/>
+            </a:pPr>
+            <a:r>
+              <a:t/>
+            </a:r>
+            <a:endParaRPr/>
+          </a:p>
+        </p:txBody>
+      </p:sp>
+      <p:sp>
+        <p:nvSpPr>
+          <p:cNvPr id="41" name="Google Shape;41;p8"/>
           <p:cNvSpPr txBox="1"/>
           <p:nvPr/>
         </p:nvSpPr>
@@ -5346,7 +5794,7 @@
       </p:sp>
       <p:sp>
         <p:nvSpPr>
-          <p:cNvPr id="33" name="Google Shape;33;p8"/>
+          <p:cNvPr id="42" name="Google Shape;42;p8"/>
           <p:cNvSpPr txBox="1"/>
           <p:nvPr/>
         </p:nvSpPr>
@@ -5407,7 +5855,7 @@
       </p:sp>
       <p:sp>
         <p:nvSpPr>
-          <p:cNvPr id="34" name="Google Shape;34;p8"/>
+          <p:cNvPr id="43" name="Google Shape;43;p8"/>
           <p:cNvSpPr txBox="1"/>
           <p:nvPr/>
         </p:nvSpPr>
@@ -5468,7 +5916,7 @@
       </p:sp>
       <p:sp>
         <p:nvSpPr>
-          <p:cNvPr id="35" name="Google Shape;35;p8"/>
+          <p:cNvPr id="44" name="Google Shape;44;p8"/>
           <p:cNvSpPr txBox="1"/>
           <p:nvPr/>
         </p:nvSpPr>
@@ -5521,7 +5969,7 @@
       </p:sp>
       <p:sp>
         <p:nvSpPr>
-          <p:cNvPr id="36" name="Google Shape;36;p8"/>
+          <p:cNvPr id="45" name="Google Shape;45;p8"/>
           <p:cNvSpPr txBox="1"/>
           <p:nvPr/>
         </p:nvSpPr>
@@ -5582,7 +6030,7 @@
       </p:sp>
       <p:sp>
         <p:nvSpPr>
-          <p:cNvPr id="37" name="Google Shape;37;p8"/>
+          <p:cNvPr id="46" name="Google Shape;46;p8"/>
           <p:cNvSpPr txBox="1"/>
           <p:nvPr/>
         </p:nvSpPr>
@@ -5647,13 +6095,13 @@
     <p:bg>
       <p:bgPr>
         <a:solidFill>
-          <a:srgbClr val="FFF9EE"/>
+          <a:srgbClr val="FFFDF7"/>
         </a:solidFill>
       </p:bgPr>
     </p:bg>
     <p:spTree>
       <p:nvGrpSpPr>
-        <p:cNvPr id="42" name="Shape 42"/>
+        <p:cNvPr id="51" name="Shape 51"/>
         <p:cNvGrpSpPr/>
         <p:nvPr/>
       </p:nvGrpSpPr>
@@ -5665,24 +6113,686 @@
           <a:chExt cx="0" cy="0"/>
         </a:xfrm>
       </p:grpSpPr>
+      <p:sp>
+        <p:nvSpPr>
+          <p:cNvPr id="52" name="Google Shape;52;p9"/>
+          <p:cNvSpPr/>
+          <p:nvPr/>
+        </p:nvSpPr>
+        <p:spPr>
+          <a:xfrm>
+            <a:off x="508000" y="304800"/>
+            <a:ext cx="7789200" cy="711300"/>
+          </a:xfrm>
+          <a:prstGeom prst="roundRect">
+            <a:avLst>
+              <a:gd fmla="val 16667" name="adj"/>
+            </a:avLst>
+          </a:prstGeom>
+          <a:solidFill>
+            <a:srgbClr val="FDE047"/>
+          </a:solidFill>
+          <a:ln cap="flat" cmpd="sng" w="38950">
+            <a:solidFill>
+              <a:srgbClr val="1C1C1C"/>
+            </a:solidFill>
+            <a:prstDash val="solid"/>
+            <a:round/>
+            <a:headEnd len="sm" w="sm" type="none"/>
+            <a:tailEnd len="sm" w="sm" type="none"/>
+          </a:ln>
+        </p:spPr>
+        <p:txBody>
+          <a:bodyPr anchorCtr="0" anchor="ctr" bIns="91425" lIns="91425" spcFirstLastPara="1" rIns="91425" wrap="square" tIns="91425">
+            <a:noAutofit/>
+          </a:bodyPr>
+          <a:lstStyle/>
+          <a:p>
+            <a:pPr indent="0" lvl="0" marL="0" rtl="0" algn="ctr">
+              <a:spcBef>
+                <a:spcPts val="0"/>
+              </a:spcBef>
+              <a:spcAft>
+                <a:spcPts val="0"/>
+              </a:spcAft>
+              <a:buNone/>
+            </a:pPr>
+            <a:r>
+              <a:t/>
+            </a:r>
+            <a:endParaRPr/>
+          </a:p>
+        </p:txBody>
+      </p:sp>
+      <p:sp>
+        <p:nvSpPr>
+          <p:cNvPr id="53" name="Google Shape;53;p9"/>
+          <p:cNvSpPr/>
+          <p:nvPr/>
+        </p:nvSpPr>
+        <p:spPr>
+          <a:xfrm>
+            <a:off x="9652000" y="304800"/>
+            <a:ext cx="2031900" cy="575700"/>
+          </a:xfrm>
+          <a:prstGeom prst="roundRect">
+            <a:avLst>
+              <a:gd fmla="val 16667" name="adj"/>
+            </a:avLst>
+          </a:prstGeom>
+          <a:solidFill>
+            <a:srgbClr val="F472B6"/>
+          </a:solidFill>
+          <a:ln cap="flat" cmpd="sng" w="38950">
+            <a:solidFill>
+              <a:srgbClr val="1C1C1C"/>
+            </a:solidFill>
+            <a:prstDash val="solid"/>
+            <a:round/>
+            <a:headEnd len="sm" w="sm" type="none"/>
+            <a:tailEnd len="sm" w="sm" type="none"/>
+          </a:ln>
+        </p:spPr>
+        <p:txBody>
+          <a:bodyPr anchorCtr="0" anchor="ctr" bIns="91425" lIns="91425" spcFirstLastPara="1" rIns="91425" wrap="square" tIns="91425">
+            <a:noAutofit/>
+          </a:bodyPr>
+          <a:lstStyle/>
+          <a:p>
+            <a:pPr indent="0" lvl="0" marL="0" rtl="0" algn="ctr">
+              <a:spcBef>
+                <a:spcPts val="0"/>
+              </a:spcBef>
+              <a:spcAft>
+                <a:spcPts val="0"/>
+              </a:spcAft>
+              <a:buNone/>
+            </a:pPr>
+            <a:r>
+              <a:t/>
+            </a:r>
+            <a:endParaRPr/>
+          </a:p>
+        </p:txBody>
+      </p:sp>
+      <p:sp>
+        <p:nvSpPr>
+          <p:cNvPr id="54" name="Google Shape;54;p9"/>
+          <p:cNvSpPr/>
+          <p:nvPr/>
+        </p:nvSpPr>
+        <p:spPr>
+          <a:xfrm>
+            <a:off x="592667" y="1270000"/>
+            <a:ext cx="3573000" cy="2997300"/>
+          </a:xfrm>
+          <a:prstGeom prst="roundRect">
+            <a:avLst>
+              <a:gd fmla="val 16667" name="adj"/>
+            </a:avLst>
+          </a:prstGeom>
+          <a:solidFill>
+            <a:srgbClr val="FDE047"/>
+          </a:solidFill>
+          <a:ln cap="flat" cmpd="sng" w="38950">
+            <a:solidFill>
+              <a:srgbClr val="1C1C1C"/>
+            </a:solidFill>
+            <a:prstDash val="solid"/>
+            <a:round/>
+            <a:headEnd len="sm" w="sm" type="none"/>
+            <a:tailEnd len="sm" w="sm" type="none"/>
+          </a:ln>
+        </p:spPr>
+        <p:txBody>
+          <a:bodyPr anchorCtr="0" anchor="ctr" bIns="91425" lIns="91425" spcFirstLastPara="1" rIns="91425" wrap="square" tIns="91425">
+            <a:noAutofit/>
+          </a:bodyPr>
+          <a:lstStyle/>
+          <a:p>
+            <a:pPr indent="0" lvl="0" marL="0" rtl="0" algn="ctr">
+              <a:spcBef>
+                <a:spcPts val="0"/>
+              </a:spcBef>
+              <a:spcAft>
+                <a:spcPts val="0"/>
+              </a:spcAft>
+              <a:buNone/>
+            </a:pPr>
+            <a:r>
+              <a:t/>
+            </a:r>
+            <a:endParaRPr/>
+          </a:p>
+        </p:txBody>
+      </p:sp>
+      <p:sp>
+        <p:nvSpPr>
+          <p:cNvPr id="55" name="Google Shape;55;p9"/>
+          <p:cNvSpPr/>
+          <p:nvPr/>
+        </p:nvSpPr>
+        <p:spPr>
+          <a:xfrm>
+            <a:off x="4470400" y="1270000"/>
+            <a:ext cx="3488400" cy="1490100"/>
+          </a:xfrm>
+          <a:prstGeom prst="roundRect">
+            <a:avLst>
+              <a:gd fmla="val 16667" name="adj"/>
+            </a:avLst>
+          </a:prstGeom>
+          <a:solidFill>
+            <a:srgbClr val="FFFFFF"/>
+          </a:solidFill>
+          <a:ln cap="flat" cmpd="sng" w="38950">
+            <a:solidFill>
+              <a:srgbClr val="1C1C1C"/>
+            </a:solidFill>
+            <a:prstDash val="solid"/>
+            <a:round/>
+            <a:headEnd len="sm" w="sm" type="none"/>
+            <a:tailEnd len="sm" w="sm" type="none"/>
+          </a:ln>
+        </p:spPr>
+        <p:txBody>
+          <a:bodyPr anchorCtr="0" anchor="ctr" bIns="91425" lIns="91425" spcFirstLastPara="1" rIns="91425" wrap="square" tIns="91425">
+            <a:noAutofit/>
+          </a:bodyPr>
+          <a:lstStyle/>
+          <a:p>
+            <a:pPr indent="0" lvl="0" marL="0" rtl="0" algn="ctr">
+              <a:spcBef>
+                <a:spcPts val="0"/>
+              </a:spcBef>
+              <a:spcAft>
+                <a:spcPts val="0"/>
+              </a:spcAft>
+              <a:buNone/>
+            </a:pPr>
+            <a:r>
+              <a:t/>
+            </a:r>
+            <a:endParaRPr/>
+          </a:p>
+        </p:txBody>
+      </p:sp>
+      <p:sp>
+        <p:nvSpPr>
+          <p:cNvPr id="56" name="Google Shape;56;p9"/>
+          <p:cNvSpPr/>
+          <p:nvPr/>
+        </p:nvSpPr>
+        <p:spPr>
+          <a:xfrm>
+            <a:off x="4622800" y="1439333"/>
+            <a:ext cx="237000" cy="237000"/>
+          </a:xfrm>
+          <a:prstGeom prst="roundRect">
+            <a:avLst>
+              <a:gd fmla="val 16667" name="adj"/>
+            </a:avLst>
+          </a:prstGeom>
+          <a:solidFill>
+            <a:srgbClr val="38BDF8"/>
+          </a:solidFill>
+          <a:ln cap="flat" cmpd="sng" w="25400">
+            <a:solidFill>
+              <a:srgbClr val="1C1C1C"/>
+            </a:solidFill>
+            <a:prstDash val="solid"/>
+            <a:round/>
+            <a:headEnd len="sm" w="sm" type="none"/>
+            <a:tailEnd len="sm" w="sm" type="none"/>
+          </a:ln>
+        </p:spPr>
+        <p:txBody>
+          <a:bodyPr anchorCtr="0" anchor="ctr" bIns="91425" lIns="91425" spcFirstLastPara="1" rIns="91425" wrap="square" tIns="91425">
+            <a:noAutofit/>
+          </a:bodyPr>
+          <a:lstStyle/>
+          <a:p>
+            <a:pPr indent="0" lvl="0" marL="0" rtl="0" algn="ctr">
+              <a:spcBef>
+                <a:spcPts val="0"/>
+              </a:spcBef>
+              <a:spcAft>
+                <a:spcPts val="0"/>
+              </a:spcAft>
+              <a:buNone/>
+            </a:pPr>
+            <a:r>
+              <a:t/>
+            </a:r>
+            <a:endParaRPr/>
+          </a:p>
+        </p:txBody>
+      </p:sp>
+      <p:sp>
+        <p:nvSpPr>
+          <p:cNvPr id="57" name="Google Shape;57;p9"/>
+          <p:cNvSpPr/>
+          <p:nvPr/>
+        </p:nvSpPr>
+        <p:spPr>
+          <a:xfrm>
+            <a:off x="8280400" y="1270000"/>
+            <a:ext cx="3488400" cy="1490100"/>
+          </a:xfrm>
+          <a:prstGeom prst="roundRect">
+            <a:avLst>
+              <a:gd fmla="val 16667" name="adj"/>
+            </a:avLst>
+          </a:prstGeom>
+          <a:solidFill>
+            <a:srgbClr val="FFFFFF"/>
+          </a:solidFill>
+          <a:ln cap="flat" cmpd="sng" w="38950">
+            <a:solidFill>
+              <a:srgbClr val="1C1C1C"/>
+            </a:solidFill>
+            <a:prstDash val="solid"/>
+            <a:round/>
+            <a:headEnd len="sm" w="sm" type="none"/>
+            <a:tailEnd len="sm" w="sm" type="none"/>
+          </a:ln>
+        </p:spPr>
+        <p:txBody>
+          <a:bodyPr anchorCtr="0" anchor="ctr" bIns="91425" lIns="91425" spcFirstLastPara="1" rIns="91425" wrap="square" tIns="91425">
+            <a:noAutofit/>
+          </a:bodyPr>
+          <a:lstStyle/>
+          <a:p>
+            <a:pPr indent="0" lvl="0" marL="0" rtl="0" algn="ctr">
+              <a:spcBef>
+                <a:spcPts val="0"/>
+              </a:spcBef>
+              <a:spcAft>
+                <a:spcPts val="0"/>
+              </a:spcAft>
+              <a:buNone/>
+            </a:pPr>
+            <a:r>
+              <a:t/>
+            </a:r>
+            <a:endParaRPr/>
+          </a:p>
+        </p:txBody>
+      </p:sp>
+      <p:sp>
+        <p:nvSpPr>
+          <p:cNvPr id="58" name="Google Shape;58;p9"/>
+          <p:cNvSpPr/>
+          <p:nvPr/>
+        </p:nvSpPr>
+        <p:spPr>
+          <a:xfrm>
+            <a:off x="8432800" y="1439333"/>
+            <a:ext cx="237000" cy="237000"/>
+          </a:xfrm>
+          <a:prstGeom prst="roundRect">
+            <a:avLst>
+              <a:gd fmla="val 16667" name="adj"/>
+            </a:avLst>
+          </a:prstGeom>
+          <a:solidFill>
+            <a:srgbClr val="FDE047"/>
+          </a:solidFill>
+          <a:ln cap="flat" cmpd="sng" w="25400">
+            <a:solidFill>
+              <a:srgbClr val="1C1C1C"/>
+            </a:solidFill>
+            <a:prstDash val="solid"/>
+            <a:round/>
+            <a:headEnd len="sm" w="sm" type="none"/>
+            <a:tailEnd len="sm" w="sm" type="none"/>
+          </a:ln>
+        </p:spPr>
+        <p:txBody>
+          <a:bodyPr anchorCtr="0" anchor="ctr" bIns="91425" lIns="91425" spcFirstLastPara="1" rIns="91425" wrap="square" tIns="91425">
+            <a:noAutofit/>
+          </a:bodyPr>
+          <a:lstStyle/>
+          <a:p>
+            <a:pPr indent="0" lvl="0" marL="0" rtl="0" algn="ctr">
+              <a:spcBef>
+                <a:spcPts val="0"/>
+              </a:spcBef>
+              <a:spcAft>
+                <a:spcPts val="0"/>
+              </a:spcAft>
+              <a:buNone/>
+            </a:pPr>
+            <a:r>
+              <a:t/>
+            </a:r>
+            <a:endParaRPr/>
+          </a:p>
+        </p:txBody>
+      </p:sp>
+      <p:sp>
+        <p:nvSpPr>
+          <p:cNvPr id="59" name="Google Shape;59;p9"/>
+          <p:cNvSpPr/>
+          <p:nvPr/>
+        </p:nvSpPr>
+        <p:spPr>
+          <a:xfrm>
+            <a:off x="4470400" y="2963333"/>
+            <a:ext cx="3488400" cy="1490100"/>
+          </a:xfrm>
+          <a:prstGeom prst="roundRect">
+            <a:avLst>
+              <a:gd fmla="val 16667" name="adj"/>
+            </a:avLst>
+          </a:prstGeom>
+          <a:solidFill>
+            <a:srgbClr val="FFFFFF"/>
+          </a:solidFill>
+          <a:ln cap="flat" cmpd="sng" w="38950">
+            <a:solidFill>
+              <a:srgbClr val="1C1C1C"/>
+            </a:solidFill>
+            <a:prstDash val="solid"/>
+            <a:round/>
+            <a:headEnd len="sm" w="sm" type="none"/>
+            <a:tailEnd len="sm" w="sm" type="none"/>
+          </a:ln>
+        </p:spPr>
+        <p:txBody>
+          <a:bodyPr anchorCtr="0" anchor="ctr" bIns="91425" lIns="91425" spcFirstLastPara="1" rIns="91425" wrap="square" tIns="91425">
+            <a:noAutofit/>
+          </a:bodyPr>
+          <a:lstStyle/>
+          <a:p>
+            <a:pPr indent="0" lvl="0" marL="0" rtl="0" algn="ctr">
+              <a:spcBef>
+                <a:spcPts val="0"/>
+              </a:spcBef>
+              <a:spcAft>
+                <a:spcPts val="0"/>
+              </a:spcAft>
+              <a:buNone/>
+            </a:pPr>
+            <a:r>
+              <a:t/>
+            </a:r>
+            <a:endParaRPr/>
+          </a:p>
+        </p:txBody>
+      </p:sp>
+      <p:sp>
+        <p:nvSpPr>
+          <p:cNvPr id="60" name="Google Shape;60;p9"/>
+          <p:cNvSpPr/>
+          <p:nvPr/>
+        </p:nvSpPr>
+        <p:spPr>
+          <a:xfrm>
+            <a:off x="4622800" y="3132667"/>
+            <a:ext cx="237000" cy="237000"/>
+          </a:xfrm>
+          <a:prstGeom prst="roundRect">
+            <a:avLst>
+              <a:gd fmla="val 16667" name="adj"/>
+            </a:avLst>
+          </a:prstGeom>
+          <a:solidFill>
+            <a:srgbClr val="4ADE80"/>
+          </a:solidFill>
+          <a:ln cap="flat" cmpd="sng" w="25400">
+            <a:solidFill>
+              <a:srgbClr val="1C1C1C"/>
+            </a:solidFill>
+            <a:prstDash val="solid"/>
+            <a:round/>
+            <a:headEnd len="sm" w="sm" type="none"/>
+            <a:tailEnd len="sm" w="sm" type="none"/>
+          </a:ln>
+        </p:spPr>
+        <p:txBody>
+          <a:bodyPr anchorCtr="0" anchor="ctr" bIns="91425" lIns="91425" spcFirstLastPara="1" rIns="91425" wrap="square" tIns="91425">
+            <a:noAutofit/>
+          </a:bodyPr>
+          <a:lstStyle/>
+          <a:p>
+            <a:pPr indent="0" lvl="0" marL="0" rtl="0" algn="ctr">
+              <a:spcBef>
+                <a:spcPts val="0"/>
+              </a:spcBef>
+              <a:spcAft>
+                <a:spcPts val="0"/>
+              </a:spcAft>
+              <a:buNone/>
+            </a:pPr>
+            <a:r>
+              <a:t/>
+            </a:r>
+            <a:endParaRPr/>
+          </a:p>
+        </p:txBody>
+      </p:sp>
+      <p:sp>
+        <p:nvSpPr>
+          <p:cNvPr id="61" name="Google Shape;61;p9"/>
+          <p:cNvSpPr/>
+          <p:nvPr/>
+        </p:nvSpPr>
+        <p:spPr>
+          <a:xfrm>
+            <a:off x="8280400" y="2963333"/>
+            <a:ext cx="3488400" cy="1490100"/>
+          </a:xfrm>
+          <a:prstGeom prst="roundRect">
+            <a:avLst>
+              <a:gd fmla="val 16667" name="adj"/>
+            </a:avLst>
+          </a:prstGeom>
+          <a:solidFill>
+            <a:srgbClr val="FFFFFF"/>
+          </a:solidFill>
+          <a:ln cap="flat" cmpd="sng" w="38950">
+            <a:solidFill>
+              <a:srgbClr val="1C1C1C"/>
+            </a:solidFill>
+            <a:prstDash val="solid"/>
+            <a:round/>
+            <a:headEnd len="sm" w="sm" type="none"/>
+            <a:tailEnd len="sm" w="sm" type="none"/>
+          </a:ln>
+        </p:spPr>
+        <p:txBody>
+          <a:bodyPr anchorCtr="0" anchor="ctr" bIns="91425" lIns="91425" spcFirstLastPara="1" rIns="91425" wrap="square" tIns="91425">
+            <a:noAutofit/>
+          </a:bodyPr>
+          <a:lstStyle/>
+          <a:p>
+            <a:pPr indent="0" lvl="0" marL="0" rtl="0" algn="ctr">
+              <a:spcBef>
+                <a:spcPts val="0"/>
+              </a:spcBef>
+              <a:spcAft>
+                <a:spcPts val="0"/>
+              </a:spcAft>
+              <a:buNone/>
+            </a:pPr>
+            <a:r>
+              <a:t/>
+            </a:r>
+            <a:endParaRPr/>
+          </a:p>
+        </p:txBody>
+      </p:sp>
+      <p:sp>
+        <p:nvSpPr>
+          <p:cNvPr id="62" name="Google Shape;62;p9"/>
+          <p:cNvSpPr/>
+          <p:nvPr/>
+        </p:nvSpPr>
+        <p:spPr>
+          <a:xfrm>
+            <a:off x="8432800" y="3132667"/>
+            <a:ext cx="237000" cy="237000"/>
+          </a:xfrm>
+          <a:prstGeom prst="roundRect">
+            <a:avLst>
+              <a:gd fmla="val 16667" name="adj"/>
+            </a:avLst>
+          </a:prstGeom>
+          <a:solidFill>
+            <a:srgbClr val="F472B6"/>
+          </a:solidFill>
+          <a:ln cap="flat" cmpd="sng" w="25400">
+            <a:solidFill>
+              <a:srgbClr val="1C1C1C"/>
+            </a:solidFill>
+            <a:prstDash val="solid"/>
+            <a:round/>
+            <a:headEnd len="sm" w="sm" type="none"/>
+            <a:tailEnd len="sm" w="sm" type="none"/>
+          </a:ln>
+        </p:spPr>
+        <p:txBody>
+          <a:bodyPr anchorCtr="0" anchor="ctr" bIns="91425" lIns="91425" spcFirstLastPara="1" rIns="91425" wrap="square" tIns="91425">
+            <a:noAutofit/>
+          </a:bodyPr>
+          <a:lstStyle/>
+          <a:p>
+            <a:pPr indent="0" lvl="0" marL="0" rtl="0" algn="ctr">
+              <a:spcBef>
+                <a:spcPts val="0"/>
+              </a:spcBef>
+              <a:spcAft>
+                <a:spcPts val="0"/>
+              </a:spcAft>
+              <a:buNone/>
+            </a:pPr>
+            <a:r>
+              <a:t/>
+            </a:r>
+            <a:endParaRPr/>
+          </a:p>
+        </p:txBody>
+      </p:sp>
+      <p:sp>
+        <p:nvSpPr>
+          <p:cNvPr id="63" name="Google Shape;63;p9"/>
+          <p:cNvSpPr/>
+          <p:nvPr/>
+        </p:nvSpPr>
+        <p:spPr>
+          <a:xfrm>
+            <a:off x="4470400" y="4656667"/>
+            <a:ext cx="7298400" cy="1490100"/>
+          </a:xfrm>
+          <a:prstGeom prst="roundRect">
+            <a:avLst>
+              <a:gd fmla="val 16667" name="adj"/>
+            </a:avLst>
+          </a:prstGeom>
+          <a:solidFill>
+            <a:srgbClr val="FFFFFF"/>
+          </a:solidFill>
+          <a:ln cap="flat" cmpd="sng" w="38950">
+            <a:solidFill>
+              <a:srgbClr val="1C1C1C"/>
+            </a:solidFill>
+            <a:prstDash val="solid"/>
+            <a:round/>
+            <a:headEnd len="sm" w="sm" type="none"/>
+            <a:tailEnd len="sm" w="sm" type="none"/>
+          </a:ln>
+        </p:spPr>
+        <p:txBody>
+          <a:bodyPr anchorCtr="0" anchor="ctr" bIns="91425" lIns="91425" spcFirstLastPara="1" rIns="91425" wrap="square" tIns="91425">
+            <a:noAutofit/>
+          </a:bodyPr>
+          <a:lstStyle/>
+          <a:p>
+            <a:pPr indent="0" lvl="0" marL="0" rtl="0" algn="ctr">
+              <a:spcBef>
+                <a:spcPts val="0"/>
+              </a:spcBef>
+              <a:spcAft>
+                <a:spcPts val="0"/>
+              </a:spcAft>
+              <a:buNone/>
+            </a:pPr>
+            <a:r>
+              <a:t/>
+            </a:r>
+            <a:endParaRPr/>
+          </a:p>
+        </p:txBody>
+      </p:sp>
+      <p:sp>
+        <p:nvSpPr>
+          <p:cNvPr id="64" name="Google Shape;64;p9"/>
+          <p:cNvSpPr/>
+          <p:nvPr/>
+        </p:nvSpPr>
+        <p:spPr>
+          <a:xfrm>
+            <a:off x="4622800" y="4826000"/>
+            <a:ext cx="237000" cy="237000"/>
+          </a:xfrm>
+          <a:prstGeom prst="roundRect">
+            <a:avLst>
+              <a:gd fmla="val 16667" name="adj"/>
+            </a:avLst>
+          </a:prstGeom>
+          <a:solidFill>
+            <a:srgbClr val="C084FC"/>
+          </a:solidFill>
+          <a:ln cap="flat" cmpd="sng" w="25400">
+            <a:solidFill>
+              <a:srgbClr val="1C1C1C"/>
+            </a:solidFill>
+            <a:prstDash val="solid"/>
+            <a:round/>
+            <a:headEnd len="sm" w="sm" type="none"/>
+            <a:tailEnd len="sm" w="sm" type="none"/>
+          </a:ln>
+        </p:spPr>
+        <p:txBody>
+          <a:bodyPr anchorCtr="0" anchor="ctr" bIns="91425" lIns="91425" spcFirstLastPara="1" rIns="91425" wrap="square" tIns="91425">
+            <a:noAutofit/>
+          </a:bodyPr>
+          <a:lstStyle/>
+          <a:p>
+            <a:pPr indent="0" lvl="0" marL="0" rtl="0" algn="ctr">
+              <a:spcBef>
+                <a:spcPts val="0"/>
+              </a:spcBef>
+              <a:spcAft>
+                <a:spcPts val="0"/>
+              </a:spcAft>
+              <a:buNone/>
+            </a:pPr>
+            <a:r>
+              <a:t/>
+            </a:r>
+            <a:endParaRPr/>
+          </a:p>
+        </p:txBody>
+      </p:sp>
       <p:pic>
         <p:nvPicPr>
-          <p:cNvPr id="43" name="Google Shape;43;p9"/>
+          <p:cNvPr id="65" name="Google Shape;65;p9" title="Target store photo"/>
           <p:cNvPicPr preferRelativeResize="0"/>
           <p:nvPr/>
         </p:nvPicPr>
-        <p:blipFill>
+        <p:blipFill rotWithShape="1">
           <a:blip r:embed="rId3">
             <a:alphaModFix/>
           </a:blip>
-          <a:stretch>
-            <a:fillRect/>
-          </a:stretch>
+          <a:srcRect b="0" l="0" r="0" t="0"/>
+          <a:stretch/>
         </p:blipFill>
         <p:spPr>
           <a:xfrm>
-            <a:off x="0" y="0"/>
-            <a:ext cx="12191998" cy="6857999"/>
+            <a:off x="592667" y="4470400"/>
+            <a:ext cx="3572933" cy="1659466"/>
           </a:xfrm>
           <a:prstGeom prst="rect">
             <a:avLst/>
@@ -5695,7 +6805,56 @@
       </p:pic>
       <p:sp>
         <p:nvSpPr>
-          <p:cNvPr id="44" name="Google Shape;44;p9"/>
+          <p:cNvPr id="66" name="Google Shape;66;p9"/>
+          <p:cNvSpPr/>
+          <p:nvPr/>
+        </p:nvSpPr>
+        <p:spPr>
+          <a:xfrm>
+            <a:off x="592667" y="4470400"/>
+            <a:ext cx="3573000" cy="1659600"/>
+          </a:xfrm>
+          <a:prstGeom prst="roundRect">
+            <a:avLst>
+              <a:gd fmla="val 16667" name="adj"/>
+            </a:avLst>
+          </a:prstGeom>
+          <a:noFill/>
+          <a:ln cap="flat" cmpd="sng" w="38950">
+            <a:solidFill>
+              <a:srgbClr val="1C1C1C"/>
+            </a:solidFill>
+            <a:prstDash val="solid"/>
+            <a:round/>
+            <a:headEnd len="sm" w="sm" type="none"/>
+            <a:tailEnd len="sm" w="sm" type="none"/>
+          </a:ln>
+        </p:spPr>
+        <p:txBody>
+          <a:bodyPr anchorCtr="0" anchor="ctr" bIns="91425" lIns="91425" spcFirstLastPara="1" rIns="91425" wrap="square" tIns="91425">
+            <a:noAutofit/>
+          </a:bodyPr>
+          <a:lstStyle/>
+          <a:p>
+            <a:pPr indent="0" lvl="0" marL="0" rtl="0" algn="ctr">
+              <a:spcBef>
+                <a:spcPts val="0"/>
+              </a:spcBef>
+              <a:spcAft>
+                <a:spcPts val="0"/>
+              </a:spcAft>
+              <a:buNone/>
+            </a:pPr>
+            <a:r>
+              <a:t/>
+            </a:r>
+            <a:endParaRPr/>
+          </a:p>
+        </p:txBody>
+      </p:sp>
+      <p:sp>
+        <p:nvSpPr>
+          <p:cNvPr id="67" name="Google Shape;67;p9"/>
           <p:cNvSpPr txBox="1"/>
           <p:nvPr/>
         </p:nvSpPr>
@@ -5748,7 +6907,7 @@
       </p:sp>
       <p:sp>
         <p:nvSpPr>
-          <p:cNvPr id="45" name="Google Shape;45;p9"/>
+          <p:cNvPr id="68" name="Google Shape;68;p9"/>
           <p:cNvSpPr txBox="1"/>
           <p:nvPr/>
         </p:nvSpPr>
@@ -5801,7 +6960,7 @@
       </p:sp>
       <p:sp>
         <p:nvSpPr>
-          <p:cNvPr id="46" name="Google Shape;46;p9"/>
+          <p:cNvPr id="69" name="Google Shape;69;p9"/>
           <p:cNvSpPr txBox="1"/>
           <p:nvPr/>
         </p:nvSpPr>
@@ -5854,7 +7013,7 @@
       </p:sp>
       <p:sp>
         <p:nvSpPr>
-          <p:cNvPr id="47" name="Google Shape;47;p9"/>
+          <p:cNvPr id="70" name="Google Shape;70;p9"/>
           <p:cNvSpPr txBox="1"/>
           <p:nvPr/>
         </p:nvSpPr>
@@ -5915,7 +7074,7 @@
       </p:sp>
       <p:sp>
         <p:nvSpPr>
-          <p:cNvPr id="48" name="Google Shape;48;p9"/>
+          <p:cNvPr id="71" name="Google Shape;71;p9"/>
           <p:cNvSpPr txBox="1"/>
           <p:nvPr/>
         </p:nvSpPr>
@@ -5968,7 +7127,7 @@
       </p:sp>
       <p:sp>
         <p:nvSpPr>
-          <p:cNvPr id="49" name="Google Shape;49;p9"/>
+          <p:cNvPr id="72" name="Google Shape;72;p9"/>
           <p:cNvSpPr txBox="1"/>
           <p:nvPr/>
         </p:nvSpPr>
@@ -6021,7 +7180,7 @@
       </p:sp>
       <p:sp>
         <p:nvSpPr>
-          <p:cNvPr id="50" name="Google Shape;50;p9"/>
+          <p:cNvPr id="73" name="Google Shape;73;p9"/>
           <p:cNvSpPr txBox="1"/>
           <p:nvPr/>
         </p:nvSpPr>
@@ -6074,7 +7233,7 @@
       </p:sp>
       <p:sp>
         <p:nvSpPr>
-          <p:cNvPr id="51" name="Google Shape;51;p9"/>
+          <p:cNvPr id="74" name="Google Shape;74;p9"/>
           <p:cNvSpPr txBox="1"/>
           <p:nvPr/>
         </p:nvSpPr>
@@ -6127,7 +7286,7 @@
       </p:sp>
       <p:sp>
         <p:nvSpPr>
-          <p:cNvPr id="52" name="Google Shape;52;p9"/>
+          <p:cNvPr id="75" name="Google Shape;75;p9"/>
           <p:cNvSpPr txBox="1"/>
           <p:nvPr/>
         </p:nvSpPr>
@@ -6180,7 +7339,7 @@
       </p:sp>
       <p:sp>
         <p:nvSpPr>
-          <p:cNvPr id="53" name="Google Shape;53;p9"/>
+          <p:cNvPr id="76" name="Google Shape;76;p9"/>
           <p:cNvSpPr txBox="1"/>
           <p:nvPr/>
         </p:nvSpPr>
@@ -6233,7 +7392,7 @@
       </p:sp>
       <p:sp>
         <p:nvSpPr>
-          <p:cNvPr id="54" name="Google Shape;54;p9"/>
+          <p:cNvPr id="77" name="Google Shape;77;p9"/>
           <p:cNvSpPr txBox="1"/>
           <p:nvPr/>
         </p:nvSpPr>
@@ -6286,7 +7445,7 @@
       </p:sp>
       <p:sp>
         <p:nvSpPr>
-          <p:cNvPr id="55" name="Google Shape;55;p9"/>
+          <p:cNvPr id="78" name="Google Shape;78;p9"/>
           <p:cNvSpPr txBox="1"/>
           <p:nvPr/>
         </p:nvSpPr>
@@ -6339,7 +7498,7 @@
       </p:sp>
       <p:sp>
         <p:nvSpPr>
-          <p:cNvPr id="56" name="Google Shape;56;p9"/>
+          <p:cNvPr id="79" name="Google Shape;79;p9"/>
           <p:cNvSpPr txBox="1"/>
           <p:nvPr/>
         </p:nvSpPr>
@@ -6392,7 +7551,7 @@
       </p:sp>
       <p:sp>
         <p:nvSpPr>
-          <p:cNvPr id="57" name="Google Shape;57;p9"/>
+          <p:cNvPr id="80" name="Google Shape;80;p9"/>
           <p:cNvSpPr txBox="1"/>
           <p:nvPr/>
         </p:nvSpPr>
@@ -6445,7 +7604,7 @@
       </p:sp>
       <p:sp>
         <p:nvSpPr>
-          <p:cNvPr id="58" name="Google Shape;58;p9"/>
+          <p:cNvPr id="81" name="Google Shape;81;p9"/>
           <p:cNvSpPr txBox="1"/>
           <p:nvPr/>
         </p:nvSpPr>
@@ -6537,13 +7696,13 @@
     <p:bg>
       <p:bgPr>
         <a:solidFill>
-          <a:srgbClr val="FFF9EE"/>
+          <a:srgbClr val="FFFDF7"/>
         </a:solidFill>
       </p:bgPr>
     </p:bg>
     <p:spTree>
       <p:nvGrpSpPr>
-        <p:cNvPr id="63" name="Shape 63"/>
+        <p:cNvPr id="86" name="Shape 86"/>
         <p:cNvGrpSpPr/>
         <p:nvPr/>
       </p:nvGrpSpPr>
@@ -6555,24 +7714,686 @@
           <a:chExt cx="0" cy="0"/>
         </a:xfrm>
       </p:grpSpPr>
+      <p:sp>
+        <p:nvSpPr>
+          <p:cNvPr id="87" name="Google Shape;87;p10"/>
+          <p:cNvSpPr/>
+          <p:nvPr/>
+        </p:nvSpPr>
+        <p:spPr>
+          <a:xfrm>
+            <a:off x="508000" y="304800"/>
+            <a:ext cx="7789200" cy="711300"/>
+          </a:xfrm>
+          <a:prstGeom prst="roundRect">
+            <a:avLst>
+              <a:gd fmla="val 16667" name="adj"/>
+            </a:avLst>
+          </a:prstGeom>
+          <a:solidFill>
+            <a:srgbClr val="FDE047"/>
+          </a:solidFill>
+          <a:ln cap="flat" cmpd="sng" w="38950">
+            <a:solidFill>
+              <a:srgbClr val="1C1C1C"/>
+            </a:solidFill>
+            <a:prstDash val="solid"/>
+            <a:round/>
+            <a:headEnd len="sm" w="sm" type="none"/>
+            <a:tailEnd len="sm" w="sm" type="none"/>
+          </a:ln>
+        </p:spPr>
+        <p:txBody>
+          <a:bodyPr anchorCtr="0" anchor="ctr" bIns="91425" lIns="91425" spcFirstLastPara="1" rIns="91425" wrap="square" tIns="91425">
+            <a:noAutofit/>
+          </a:bodyPr>
+          <a:lstStyle/>
+          <a:p>
+            <a:pPr indent="0" lvl="0" marL="0" rtl="0" algn="ctr">
+              <a:spcBef>
+                <a:spcPts val="0"/>
+              </a:spcBef>
+              <a:spcAft>
+                <a:spcPts val="0"/>
+              </a:spcAft>
+              <a:buNone/>
+            </a:pPr>
+            <a:r>
+              <a:t/>
+            </a:r>
+            <a:endParaRPr/>
+          </a:p>
+        </p:txBody>
+      </p:sp>
+      <p:sp>
+        <p:nvSpPr>
+          <p:cNvPr id="88" name="Google Shape;88;p10"/>
+          <p:cNvSpPr/>
+          <p:nvPr/>
+        </p:nvSpPr>
+        <p:spPr>
+          <a:xfrm>
+            <a:off x="9652000" y="304800"/>
+            <a:ext cx="2031900" cy="575700"/>
+          </a:xfrm>
+          <a:prstGeom prst="roundRect">
+            <a:avLst>
+              <a:gd fmla="val 16667" name="adj"/>
+            </a:avLst>
+          </a:prstGeom>
+          <a:solidFill>
+            <a:srgbClr val="F472B6"/>
+          </a:solidFill>
+          <a:ln cap="flat" cmpd="sng" w="38950">
+            <a:solidFill>
+              <a:srgbClr val="1C1C1C"/>
+            </a:solidFill>
+            <a:prstDash val="solid"/>
+            <a:round/>
+            <a:headEnd len="sm" w="sm" type="none"/>
+            <a:tailEnd len="sm" w="sm" type="none"/>
+          </a:ln>
+        </p:spPr>
+        <p:txBody>
+          <a:bodyPr anchorCtr="0" anchor="ctr" bIns="91425" lIns="91425" spcFirstLastPara="1" rIns="91425" wrap="square" tIns="91425">
+            <a:noAutofit/>
+          </a:bodyPr>
+          <a:lstStyle/>
+          <a:p>
+            <a:pPr indent="0" lvl="0" marL="0" rtl="0" algn="ctr">
+              <a:spcBef>
+                <a:spcPts val="0"/>
+              </a:spcBef>
+              <a:spcAft>
+                <a:spcPts val="0"/>
+              </a:spcAft>
+              <a:buNone/>
+            </a:pPr>
+            <a:r>
+              <a:t/>
+            </a:r>
+            <a:endParaRPr/>
+          </a:p>
+        </p:txBody>
+      </p:sp>
+      <p:sp>
+        <p:nvSpPr>
+          <p:cNvPr id="89" name="Google Shape;89;p10"/>
+          <p:cNvSpPr/>
+          <p:nvPr/>
+        </p:nvSpPr>
+        <p:spPr>
+          <a:xfrm>
+            <a:off x="592667" y="1219200"/>
+            <a:ext cx="6603900" cy="914400"/>
+          </a:xfrm>
+          <a:prstGeom prst="roundRect">
+            <a:avLst>
+              <a:gd fmla="val 16667" name="adj"/>
+            </a:avLst>
+          </a:prstGeom>
+          <a:solidFill>
+            <a:srgbClr val="FFFFFF"/>
+          </a:solidFill>
+          <a:ln cap="flat" cmpd="sng" w="38950">
+            <a:solidFill>
+              <a:srgbClr val="1C1C1C"/>
+            </a:solidFill>
+            <a:prstDash val="solid"/>
+            <a:round/>
+            <a:headEnd len="sm" w="sm" type="none"/>
+            <a:tailEnd len="sm" w="sm" type="none"/>
+          </a:ln>
+        </p:spPr>
+        <p:txBody>
+          <a:bodyPr anchorCtr="0" anchor="ctr" bIns="91425" lIns="91425" spcFirstLastPara="1" rIns="91425" wrap="square" tIns="91425">
+            <a:noAutofit/>
+          </a:bodyPr>
+          <a:lstStyle/>
+          <a:p>
+            <a:pPr indent="0" lvl="0" marL="0" rtl="0" algn="ctr">
+              <a:spcBef>
+                <a:spcPts val="0"/>
+              </a:spcBef>
+              <a:spcAft>
+                <a:spcPts val="0"/>
+              </a:spcAft>
+              <a:buNone/>
+            </a:pPr>
+            <a:r>
+              <a:t/>
+            </a:r>
+            <a:endParaRPr/>
+          </a:p>
+        </p:txBody>
+      </p:sp>
+      <p:sp>
+        <p:nvSpPr>
+          <p:cNvPr id="90" name="Google Shape;90;p10"/>
+          <p:cNvSpPr/>
+          <p:nvPr/>
+        </p:nvSpPr>
+        <p:spPr>
+          <a:xfrm>
+            <a:off x="711200" y="1337733"/>
+            <a:ext cx="203100" cy="694200"/>
+          </a:xfrm>
+          <a:prstGeom prst="roundRect">
+            <a:avLst>
+              <a:gd fmla="val 16667" name="adj"/>
+            </a:avLst>
+          </a:prstGeom>
+          <a:solidFill>
+            <a:srgbClr val="FDE047"/>
+          </a:solidFill>
+          <a:ln cap="flat" cmpd="sng" w="16925">
+            <a:solidFill>
+              <a:srgbClr val="1C1C1C"/>
+            </a:solidFill>
+            <a:prstDash val="solid"/>
+            <a:round/>
+            <a:headEnd len="sm" w="sm" type="none"/>
+            <a:tailEnd len="sm" w="sm" type="none"/>
+          </a:ln>
+        </p:spPr>
+        <p:txBody>
+          <a:bodyPr anchorCtr="0" anchor="ctr" bIns="91425" lIns="91425" spcFirstLastPara="1" rIns="91425" wrap="square" tIns="91425">
+            <a:noAutofit/>
+          </a:bodyPr>
+          <a:lstStyle/>
+          <a:p>
+            <a:pPr indent="0" lvl="0" marL="0" rtl="0" algn="ctr">
+              <a:spcBef>
+                <a:spcPts val="0"/>
+              </a:spcBef>
+              <a:spcAft>
+                <a:spcPts val="0"/>
+              </a:spcAft>
+              <a:buNone/>
+            </a:pPr>
+            <a:r>
+              <a:t/>
+            </a:r>
+            <a:endParaRPr/>
+          </a:p>
+        </p:txBody>
+      </p:sp>
+      <p:sp>
+        <p:nvSpPr>
+          <p:cNvPr id="91" name="Google Shape;91;p10"/>
+          <p:cNvSpPr/>
+          <p:nvPr/>
+        </p:nvSpPr>
+        <p:spPr>
+          <a:xfrm>
+            <a:off x="592667" y="2269067"/>
+            <a:ext cx="6603900" cy="914400"/>
+          </a:xfrm>
+          <a:prstGeom prst="roundRect">
+            <a:avLst>
+              <a:gd fmla="val 16667" name="adj"/>
+            </a:avLst>
+          </a:prstGeom>
+          <a:solidFill>
+            <a:srgbClr val="FFFFFF"/>
+          </a:solidFill>
+          <a:ln cap="flat" cmpd="sng" w="38950">
+            <a:solidFill>
+              <a:srgbClr val="1C1C1C"/>
+            </a:solidFill>
+            <a:prstDash val="solid"/>
+            <a:round/>
+            <a:headEnd len="sm" w="sm" type="none"/>
+            <a:tailEnd len="sm" w="sm" type="none"/>
+          </a:ln>
+        </p:spPr>
+        <p:txBody>
+          <a:bodyPr anchorCtr="0" anchor="ctr" bIns="91425" lIns="91425" spcFirstLastPara="1" rIns="91425" wrap="square" tIns="91425">
+            <a:noAutofit/>
+          </a:bodyPr>
+          <a:lstStyle/>
+          <a:p>
+            <a:pPr indent="0" lvl="0" marL="0" rtl="0" algn="ctr">
+              <a:spcBef>
+                <a:spcPts val="0"/>
+              </a:spcBef>
+              <a:spcAft>
+                <a:spcPts val="0"/>
+              </a:spcAft>
+              <a:buNone/>
+            </a:pPr>
+            <a:r>
+              <a:t/>
+            </a:r>
+            <a:endParaRPr/>
+          </a:p>
+        </p:txBody>
+      </p:sp>
+      <p:sp>
+        <p:nvSpPr>
+          <p:cNvPr id="92" name="Google Shape;92;p10"/>
+          <p:cNvSpPr/>
+          <p:nvPr/>
+        </p:nvSpPr>
+        <p:spPr>
+          <a:xfrm>
+            <a:off x="711200" y="2387600"/>
+            <a:ext cx="203100" cy="694200"/>
+          </a:xfrm>
+          <a:prstGeom prst="roundRect">
+            <a:avLst>
+              <a:gd fmla="val 16667" name="adj"/>
+            </a:avLst>
+          </a:prstGeom>
+          <a:solidFill>
+            <a:srgbClr val="38BDF8"/>
+          </a:solidFill>
+          <a:ln cap="flat" cmpd="sng" w="16925">
+            <a:solidFill>
+              <a:srgbClr val="1C1C1C"/>
+            </a:solidFill>
+            <a:prstDash val="solid"/>
+            <a:round/>
+            <a:headEnd len="sm" w="sm" type="none"/>
+            <a:tailEnd len="sm" w="sm" type="none"/>
+          </a:ln>
+        </p:spPr>
+        <p:txBody>
+          <a:bodyPr anchorCtr="0" anchor="ctr" bIns="91425" lIns="91425" spcFirstLastPara="1" rIns="91425" wrap="square" tIns="91425">
+            <a:noAutofit/>
+          </a:bodyPr>
+          <a:lstStyle/>
+          <a:p>
+            <a:pPr indent="0" lvl="0" marL="0" rtl="0" algn="ctr">
+              <a:spcBef>
+                <a:spcPts val="0"/>
+              </a:spcBef>
+              <a:spcAft>
+                <a:spcPts val="0"/>
+              </a:spcAft>
+              <a:buNone/>
+            </a:pPr>
+            <a:r>
+              <a:t/>
+            </a:r>
+            <a:endParaRPr/>
+          </a:p>
+        </p:txBody>
+      </p:sp>
+      <p:sp>
+        <p:nvSpPr>
+          <p:cNvPr id="93" name="Google Shape;93;p10"/>
+          <p:cNvSpPr/>
+          <p:nvPr/>
+        </p:nvSpPr>
+        <p:spPr>
+          <a:xfrm>
+            <a:off x="592667" y="3318933"/>
+            <a:ext cx="6603900" cy="914400"/>
+          </a:xfrm>
+          <a:prstGeom prst="roundRect">
+            <a:avLst>
+              <a:gd fmla="val 16667" name="adj"/>
+            </a:avLst>
+          </a:prstGeom>
+          <a:solidFill>
+            <a:srgbClr val="FFFFFF"/>
+          </a:solidFill>
+          <a:ln cap="flat" cmpd="sng" w="38950">
+            <a:solidFill>
+              <a:srgbClr val="1C1C1C"/>
+            </a:solidFill>
+            <a:prstDash val="solid"/>
+            <a:round/>
+            <a:headEnd len="sm" w="sm" type="none"/>
+            <a:tailEnd len="sm" w="sm" type="none"/>
+          </a:ln>
+        </p:spPr>
+        <p:txBody>
+          <a:bodyPr anchorCtr="0" anchor="ctr" bIns="91425" lIns="91425" spcFirstLastPara="1" rIns="91425" wrap="square" tIns="91425">
+            <a:noAutofit/>
+          </a:bodyPr>
+          <a:lstStyle/>
+          <a:p>
+            <a:pPr indent="0" lvl="0" marL="0" rtl="0" algn="ctr">
+              <a:spcBef>
+                <a:spcPts val="0"/>
+              </a:spcBef>
+              <a:spcAft>
+                <a:spcPts val="0"/>
+              </a:spcAft>
+              <a:buNone/>
+            </a:pPr>
+            <a:r>
+              <a:t/>
+            </a:r>
+            <a:endParaRPr/>
+          </a:p>
+        </p:txBody>
+      </p:sp>
+      <p:sp>
+        <p:nvSpPr>
+          <p:cNvPr id="94" name="Google Shape;94;p10"/>
+          <p:cNvSpPr/>
+          <p:nvPr/>
+        </p:nvSpPr>
+        <p:spPr>
+          <a:xfrm>
+            <a:off x="711200" y="3437467"/>
+            <a:ext cx="203100" cy="694200"/>
+          </a:xfrm>
+          <a:prstGeom prst="roundRect">
+            <a:avLst>
+              <a:gd fmla="val 16667" name="adj"/>
+            </a:avLst>
+          </a:prstGeom>
+          <a:solidFill>
+            <a:srgbClr val="4ADE80"/>
+          </a:solidFill>
+          <a:ln cap="flat" cmpd="sng" w="16925">
+            <a:solidFill>
+              <a:srgbClr val="1C1C1C"/>
+            </a:solidFill>
+            <a:prstDash val="solid"/>
+            <a:round/>
+            <a:headEnd len="sm" w="sm" type="none"/>
+            <a:tailEnd len="sm" w="sm" type="none"/>
+          </a:ln>
+        </p:spPr>
+        <p:txBody>
+          <a:bodyPr anchorCtr="0" anchor="ctr" bIns="91425" lIns="91425" spcFirstLastPara="1" rIns="91425" wrap="square" tIns="91425">
+            <a:noAutofit/>
+          </a:bodyPr>
+          <a:lstStyle/>
+          <a:p>
+            <a:pPr indent="0" lvl="0" marL="0" rtl="0" algn="ctr">
+              <a:spcBef>
+                <a:spcPts val="0"/>
+              </a:spcBef>
+              <a:spcAft>
+                <a:spcPts val="0"/>
+              </a:spcAft>
+              <a:buNone/>
+            </a:pPr>
+            <a:r>
+              <a:t/>
+            </a:r>
+            <a:endParaRPr/>
+          </a:p>
+        </p:txBody>
+      </p:sp>
+      <p:sp>
+        <p:nvSpPr>
+          <p:cNvPr id="95" name="Google Shape;95;p10"/>
+          <p:cNvSpPr/>
+          <p:nvPr/>
+        </p:nvSpPr>
+        <p:spPr>
+          <a:xfrm>
+            <a:off x="592667" y="4368800"/>
+            <a:ext cx="6603900" cy="914400"/>
+          </a:xfrm>
+          <a:prstGeom prst="roundRect">
+            <a:avLst>
+              <a:gd fmla="val 16667" name="adj"/>
+            </a:avLst>
+          </a:prstGeom>
+          <a:solidFill>
+            <a:srgbClr val="FFFFFF"/>
+          </a:solidFill>
+          <a:ln cap="flat" cmpd="sng" w="38950">
+            <a:solidFill>
+              <a:srgbClr val="1C1C1C"/>
+            </a:solidFill>
+            <a:prstDash val="solid"/>
+            <a:round/>
+            <a:headEnd len="sm" w="sm" type="none"/>
+            <a:tailEnd len="sm" w="sm" type="none"/>
+          </a:ln>
+        </p:spPr>
+        <p:txBody>
+          <a:bodyPr anchorCtr="0" anchor="ctr" bIns="91425" lIns="91425" spcFirstLastPara="1" rIns="91425" wrap="square" tIns="91425">
+            <a:noAutofit/>
+          </a:bodyPr>
+          <a:lstStyle/>
+          <a:p>
+            <a:pPr indent="0" lvl="0" marL="0" rtl="0" algn="ctr">
+              <a:spcBef>
+                <a:spcPts val="0"/>
+              </a:spcBef>
+              <a:spcAft>
+                <a:spcPts val="0"/>
+              </a:spcAft>
+              <a:buNone/>
+            </a:pPr>
+            <a:r>
+              <a:t/>
+            </a:r>
+            <a:endParaRPr/>
+          </a:p>
+        </p:txBody>
+      </p:sp>
+      <p:sp>
+        <p:nvSpPr>
+          <p:cNvPr id="96" name="Google Shape;96;p10"/>
+          <p:cNvSpPr/>
+          <p:nvPr/>
+        </p:nvSpPr>
+        <p:spPr>
+          <a:xfrm>
+            <a:off x="711200" y="4487333"/>
+            <a:ext cx="203100" cy="694200"/>
+          </a:xfrm>
+          <a:prstGeom prst="roundRect">
+            <a:avLst>
+              <a:gd fmla="val 16667" name="adj"/>
+            </a:avLst>
+          </a:prstGeom>
+          <a:solidFill>
+            <a:srgbClr val="C084FC"/>
+          </a:solidFill>
+          <a:ln cap="flat" cmpd="sng" w="16925">
+            <a:solidFill>
+              <a:srgbClr val="1C1C1C"/>
+            </a:solidFill>
+            <a:prstDash val="solid"/>
+            <a:round/>
+            <a:headEnd len="sm" w="sm" type="none"/>
+            <a:tailEnd len="sm" w="sm" type="none"/>
+          </a:ln>
+        </p:spPr>
+        <p:txBody>
+          <a:bodyPr anchorCtr="0" anchor="ctr" bIns="91425" lIns="91425" spcFirstLastPara="1" rIns="91425" wrap="square" tIns="91425">
+            <a:noAutofit/>
+          </a:bodyPr>
+          <a:lstStyle/>
+          <a:p>
+            <a:pPr indent="0" lvl="0" marL="0" rtl="0" algn="ctr">
+              <a:spcBef>
+                <a:spcPts val="0"/>
+              </a:spcBef>
+              <a:spcAft>
+                <a:spcPts val="0"/>
+              </a:spcAft>
+              <a:buNone/>
+            </a:pPr>
+            <a:r>
+              <a:t/>
+            </a:r>
+            <a:endParaRPr/>
+          </a:p>
+        </p:txBody>
+      </p:sp>
+      <p:sp>
+        <p:nvSpPr>
+          <p:cNvPr id="97" name="Google Shape;97;p10"/>
+          <p:cNvSpPr/>
+          <p:nvPr/>
+        </p:nvSpPr>
+        <p:spPr>
+          <a:xfrm>
+            <a:off x="592667" y="5418667"/>
+            <a:ext cx="6603900" cy="914400"/>
+          </a:xfrm>
+          <a:prstGeom prst="roundRect">
+            <a:avLst>
+              <a:gd fmla="val 16667" name="adj"/>
+            </a:avLst>
+          </a:prstGeom>
+          <a:solidFill>
+            <a:srgbClr val="FFFFFF"/>
+          </a:solidFill>
+          <a:ln cap="flat" cmpd="sng" w="38950">
+            <a:solidFill>
+              <a:srgbClr val="1C1C1C"/>
+            </a:solidFill>
+            <a:prstDash val="solid"/>
+            <a:round/>
+            <a:headEnd len="sm" w="sm" type="none"/>
+            <a:tailEnd len="sm" w="sm" type="none"/>
+          </a:ln>
+        </p:spPr>
+        <p:txBody>
+          <a:bodyPr anchorCtr="0" anchor="ctr" bIns="91425" lIns="91425" spcFirstLastPara="1" rIns="91425" wrap="square" tIns="91425">
+            <a:noAutofit/>
+          </a:bodyPr>
+          <a:lstStyle/>
+          <a:p>
+            <a:pPr indent="0" lvl="0" marL="0" rtl="0" algn="ctr">
+              <a:spcBef>
+                <a:spcPts val="0"/>
+              </a:spcBef>
+              <a:spcAft>
+                <a:spcPts val="0"/>
+              </a:spcAft>
+              <a:buNone/>
+            </a:pPr>
+            <a:r>
+              <a:t/>
+            </a:r>
+            <a:endParaRPr/>
+          </a:p>
+        </p:txBody>
+      </p:sp>
+      <p:sp>
+        <p:nvSpPr>
+          <p:cNvPr id="98" name="Google Shape;98;p10"/>
+          <p:cNvSpPr/>
+          <p:nvPr/>
+        </p:nvSpPr>
+        <p:spPr>
+          <a:xfrm>
+            <a:off x="711200" y="5537200"/>
+            <a:ext cx="203100" cy="694200"/>
+          </a:xfrm>
+          <a:prstGeom prst="roundRect">
+            <a:avLst>
+              <a:gd fmla="val 16667" name="adj"/>
+            </a:avLst>
+          </a:prstGeom>
+          <a:solidFill>
+            <a:srgbClr val="FB923C"/>
+          </a:solidFill>
+          <a:ln cap="flat" cmpd="sng" w="16925">
+            <a:solidFill>
+              <a:srgbClr val="1C1C1C"/>
+            </a:solidFill>
+            <a:prstDash val="solid"/>
+            <a:round/>
+            <a:headEnd len="sm" w="sm" type="none"/>
+            <a:tailEnd len="sm" w="sm" type="none"/>
+          </a:ln>
+        </p:spPr>
+        <p:txBody>
+          <a:bodyPr anchorCtr="0" anchor="ctr" bIns="91425" lIns="91425" spcFirstLastPara="1" rIns="91425" wrap="square" tIns="91425">
+            <a:noAutofit/>
+          </a:bodyPr>
+          <a:lstStyle/>
+          <a:p>
+            <a:pPr indent="0" lvl="0" marL="0" rtl="0" algn="ctr">
+              <a:spcBef>
+                <a:spcPts val="0"/>
+              </a:spcBef>
+              <a:spcAft>
+                <a:spcPts val="0"/>
+              </a:spcAft>
+              <a:buNone/>
+            </a:pPr>
+            <a:r>
+              <a:t/>
+            </a:r>
+            <a:endParaRPr/>
+          </a:p>
+        </p:txBody>
+      </p:sp>
+      <p:sp>
+        <p:nvSpPr>
+          <p:cNvPr id="99" name="Google Shape;99;p10"/>
+          <p:cNvSpPr/>
+          <p:nvPr/>
+        </p:nvSpPr>
+        <p:spPr>
+          <a:xfrm>
+            <a:off x="7620000" y="4826000"/>
+            <a:ext cx="3979200" cy="1608600"/>
+          </a:xfrm>
+          <a:prstGeom prst="roundRect">
+            <a:avLst>
+              <a:gd fmla="val 16667" name="adj"/>
+            </a:avLst>
+          </a:prstGeom>
+          <a:solidFill>
+            <a:srgbClr val="38BDF8"/>
+          </a:solidFill>
+          <a:ln cap="flat" cmpd="sng" w="38950">
+            <a:solidFill>
+              <a:srgbClr val="1C1C1C"/>
+            </a:solidFill>
+            <a:prstDash val="solid"/>
+            <a:round/>
+            <a:headEnd len="sm" w="sm" type="none"/>
+            <a:tailEnd len="sm" w="sm" type="none"/>
+          </a:ln>
+        </p:spPr>
+        <p:txBody>
+          <a:bodyPr anchorCtr="0" anchor="ctr" bIns="91425" lIns="91425" spcFirstLastPara="1" rIns="91425" wrap="square" tIns="91425">
+            <a:noAutofit/>
+          </a:bodyPr>
+          <a:lstStyle/>
+          <a:p>
+            <a:pPr indent="0" lvl="0" marL="0" rtl="0" algn="ctr">
+              <a:spcBef>
+                <a:spcPts val="0"/>
+              </a:spcBef>
+              <a:spcAft>
+                <a:spcPts val="0"/>
+              </a:spcAft>
+              <a:buNone/>
+            </a:pPr>
+            <a:r>
+              <a:t/>
+            </a:r>
+            <a:endParaRPr/>
+          </a:p>
+        </p:txBody>
+      </p:sp>
       <p:pic>
         <p:nvPicPr>
-          <p:cNvPr id="64" name="Google Shape;64;p10"/>
+          <p:cNvPr id="100" name="Google Shape;100;p10" title="2023 Nissan Rogue photo"/>
           <p:cNvPicPr preferRelativeResize="0"/>
           <p:nvPr/>
         </p:nvPicPr>
-        <p:blipFill>
+        <p:blipFill rotWithShape="1">
           <a:blip r:embed="rId3">
             <a:alphaModFix/>
           </a:blip>
-          <a:stretch>
-            <a:fillRect/>
-          </a:stretch>
+          <a:srcRect b="0" l="0" r="0" t="0"/>
+          <a:stretch/>
         </p:blipFill>
         <p:spPr>
           <a:xfrm>
-            <a:off x="0" y="0"/>
-            <a:ext cx="12191998" cy="6857999"/>
+            <a:off x="7416800" y="1507067"/>
+            <a:ext cx="4301066" cy="2641599"/>
           </a:xfrm>
           <a:prstGeom prst="rect">
             <a:avLst/>
@@ -6585,7 +8406,56 @@
       </p:pic>
       <p:sp>
         <p:nvSpPr>
-          <p:cNvPr id="65" name="Google Shape;65;p10"/>
+          <p:cNvPr id="101" name="Google Shape;101;p10"/>
+          <p:cNvSpPr/>
+          <p:nvPr/>
+        </p:nvSpPr>
+        <p:spPr>
+          <a:xfrm>
+            <a:off x="7416800" y="1507067"/>
+            <a:ext cx="4301100" cy="2641500"/>
+          </a:xfrm>
+          <a:prstGeom prst="roundRect">
+            <a:avLst>
+              <a:gd fmla="val 16667" name="adj"/>
+            </a:avLst>
+          </a:prstGeom>
+          <a:noFill/>
+          <a:ln cap="flat" cmpd="sng" w="38950">
+            <a:solidFill>
+              <a:srgbClr val="1C1C1C"/>
+            </a:solidFill>
+            <a:prstDash val="solid"/>
+            <a:round/>
+            <a:headEnd len="sm" w="sm" type="none"/>
+            <a:tailEnd len="sm" w="sm" type="none"/>
+          </a:ln>
+        </p:spPr>
+        <p:txBody>
+          <a:bodyPr anchorCtr="0" anchor="ctr" bIns="91425" lIns="91425" spcFirstLastPara="1" rIns="91425" wrap="square" tIns="91425">
+            <a:noAutofit/>
+          </a:bodyPr>
+          <a:lstStyle/>
+          <a:p>
+            <a:pPr indent="0" lvl="0" marL="0" rtl="0" algn="ctr">
+              <a:spcBef>
+                <a:spcPts val="0"/>
+              </a:spcBef>
+              <a:spcAft>
+                <a:spcPts val="0"/>
+              </a:spcAft>
+              <a:buNone/>
+            </a:pPr>
+            <a:r>
+              <a:t/>
+            </a:r>
+            <a:endParaRPr/>
+          </a:p>
+        </p:txBody>
+      </p:sp>
+      <p:sp>
+        <p:nvSpPr>
+          <p:cNvPr id="102" name="Google Shape;102;p10"/>
           <p:cNvSpPr txBox="1"/>
           <p:nvPr/>
         </p:nvSpPr>
@@ -6638,7 +8508,7 @@
       </p:sp>
       <p:sp>
         <p:nvSpPr>
-          <p:cNvPr id="66" name="Google Shape;66;p10"/>
+          <p:cNvPr id="103" name="Google Shape;103;p10"/>
           <p:cNvSpPr txBox="1"/>
           <p:nvPr/>
         </p:nvSpPr>
@@ -6691,7 +8561,7 @@
       </p:sp>
       <p:sp>
         <p:nvSpPr>
-          <p:cNvPr id="67" name="Google Shape;67;p10"/>
+          <p:cNvPr id="104" name="Google Shape;104;p10"/>
           <p:cNvSpPr txBox="1"/>
           <p:nvPr/>
         </p:nvSpPr>
@@ -6744,7 +8614,7 @@
       </p:sp>
       <p:sp>
         <p:nvSpPr>
-          <p:cNvPr id="68" name="Google Shape;68;p10"/>
+          <p:cNvPr id="105" name="Google Shape;105;p10"/>
           <p:cNvSpPr txBox="1"/>
           <p:nvPr/>
         </p:nvSpPr>
@@ -6797,7 +8667,7 @@
       </p:sp>
       <p:sp>
         <p:nvSpPr>
-          <p:cNvPr id="69" name="Google Shape;69;p10"/>
+          <p:cNvPr id="106" name="Google Shape;106;p10"/>
           <p:cNvSpPr txBox="1"/>
           <p:nvPr/>
         </p:nvSpPr>
@@ -6850,7 +8720,7 @@
       </p:sp>
       <p:sp>
         <p:nvSpPr>
-          <p:cNvPr id="70" name="Google Shape;70;p10"/>
+          <p:cNvPr id="107" name="Google Shape;107;p10"/>
           <p:cNvSpPr txBox="1"/>
           <p:nvPr/>
         </p:nvSpPr>
@@ -6903,7 +8773,7 @@
       </p:sp>
       <p:sp>
         <p:nvSpPr>
-          <p:cNvPr id="71" name="Google Shape;71;p10"/>
+          <p:cNvPr id="108" name="Google Shape;108;p10"/>
           <p:cNvSpPr txBox="1"/>
           <p:nvPr/>
         </p:nvSpPr>
@@ -6956,7 +8826,7 @@
       </p:sp>
       <p:sp>
         <p:nvSpPr>
-          <p:cNvPr id="72" name="Google Shape;72;p10"/>
+          <p:cNvPr id="109" name="Google Shape;109;p10"/>
           <p:cNvSpPr txBox="1"/>
           <p:nvPr/>
         </p:nvSpPr>
@@ -7009,7 +8879,7 @@
       </p:sp>
       <p:sp>
         <p:nvSpPr>
-          <p:cNvPr id="73" name="Google Shape;73;p10"/>
+          <p:cNvPr id="110" name="Google Shape;110;p10"/>
           <p:cNvSpPr txBox="1"/>
           <p:nvPr/>
         </p:nvSpPr>
@@ -7062,7 +8932,7 @@
       </p:sp>
       <p:sp>
         <p:nvSpPr>
-          <p:cNvPr id="74" name="Google Shape;74;p10"/>
+          <p:cNvPr id="111" name="Google Shape;111;p10"/>
           <p:cNvSpPr txBox="1"/>
           <p:nvPr/>
         </p:nvSpPr>
@@ -7115,7 +8985,7 @@
       </p:sp>
       <p:sp>
         <p:nvSpPr>
-          <p:cNvPr id="75" name="Google Shape;75;p10"/>
+          <p:cNvPr id="112" name="Google Shape;112;p10"/>
           <p:cNvSpPr txBox="1"/>
           <p:nvPr/>
         </p:nvSpPr>
@@ -7168,7 +9038,7 @@
       </p:sp>
       <p:sp>
         <p:nvSpPr>
-          <p:cNvPr id="76" name="Google Shape;76;p10"/>
+          <p:cNvPr id="113" name="Google Shape;113;p10"/>
           <p:cNvSpPr txBox="1"/>
           <p:nvPr/>
         </p:nvSpPr>
@@ -7221,7 +9091,7 @@
       </p:sp>
       <p:sp>
         <p:nvSpPr>
-          <p:cNvPr id="77" name="Google Shape;77;p10"/>
+          <p:cNvPr id="114" name="Google Shape;114;p10"/>
           <p:cNvSpPr txBox="1"/>
           <p:nvPr/>
         </p:nvSpPr>
@@ -7274,7 +9144,7 @@
       </p:sp>
       <p:sp>
         <p:nvSpPr>
-          <p:cNvPr id="78" name="Google Shape;78;p10"/>
+          <p:cNvPr id="115" name="Google Shape;115;p10"/>
           <p:cNvSpPr txBox="1"/>
           <p:nvPr/>
         </p:nvSpPr>
@@ -7436,13 +9306,13 @@
     <p:bg>
       <p:bgPr>
         <a:solidFill>
-          <a:srgbClr val="FFF9EE"/>
+          <a:srgbClr val="FFFDF7"/>
         </a:solidFill>
       </p:bgPr>
     </p:bg>
     <p:spTree>
       <p:nvGrpSpPr>
-        <p:cNvPr id="83" name="Shape 83"/>
+        <p:cNvPr id="120" name="Shape 120"/>
         <p:cNvGrpSpPr/>
         <p:nvPr/>
       </p:nvGrpSpPr>
@@ -7454,24 +9324,1251 @@
           <a:chExt cx="0" cy="0"/>
         </a:xfrm>
       </p:grpSpPr>
+      <p:sp>
+        <p:nvSpPr>
+          <p:cNvPr id="121" name="Google Shape;121;p11"/>
+          <p:cNvSpPr/>
+          <p:nvPr/>
+        </p:nvSpPr>
+        <p:spPr>
+          <a:xfrm>
+            <a:off x="508000" y="304800"/>
+            <a:ext cx="7789200" cy="711300"/>
+          </a:xfrm>
+          <a:prstGeom prst="roundRect">
+            <a:avLst>
+              <a:gd fmla="val 16667" name="adj"/>
+            </a:avLst>
+          </a:prstGeom>
+          <a:solidFill>
+            <a:srgbClr val="B26206"/>
+          </a:solidFill>
+          <a:ln cap="flat" cmpd="sng" w="38950">
+            <a:solidFill>
+              <a:srgbClr val="1C1C1C"/>
+            </a:solidFill>
+            <a:prstDash val="solid"/>
+            <a:round/>
+            <a:headEnd len="sm" w="sm" type="none"/>
+            <a:tailEnd len="sm" w="sm" type="none"/>
+          </a:ln>
+        </p:spPr>
+        <p:txBody>
+          <a:bodyPr anchorCtr="0" anchor="ctr" bIns="91425" lIns="91425" spcFirstLastPara="1" rIns="91425" wrap="square" tIns="91425">
+            <a:noAutofit/>
+          </a:bodyPr>
+          <a:lstStyle/>
+          <a:p>
+            <a:pPr indent="0" lvl="0" marL="0" rtl="0" algn="ctr">
+              <a:spcBef>
+                <a:spcPts val="0"/>
+              </a:spcBef>
+              <a:spcAft>
+                <a:spcPts val="0"/>
+              </a:spcAft>
+              <a:buNone/>
+            </a:pPr>
+            <a:r>
+              <a:t/>
+            </a:r>
+            <a:endParaRPr/>
+          </a:p>
+        </p:txBody>
+      </p:sp>
+      <p:sp>
+        <p:nvSpPr>
+          <p:cNvPr id="122" name="Google Shape;122;p11"/>
+          <p:cNvSpPr/>
+          <p:nvPr/>
+        </p:nvSpPr>
+        <p:spPr>
+          <a:xfrm>
+            <a:off x="9652000" y="304800"/>
+            <a:ext cx="2031900" cy="575700"/>
+          </a:xfrm>
+          <a:prstGeom prst="roundRect">
+            <a:avLst>
+              <a:gd fmla="val 16667" name="adj"/>
+            </a:avLst>
+          </a:prstGeom>
+          <a:solidFill>
+            <a:srgbClr val="F472B6"/>
+          </a:solidFill>
+          <a:ln cap="flat" cmpd="sng" w="38950">
+            <a:solidFill>
+              <a:srgbClr val="1C1C1C"/>
+            </a:solidFill>
+            <a:prstDash val="solid"/>
+            <a:round/>
+            <a:headEnd len="sm" w="sm" type="none"/>
+            <a:tailEnd len="sm" w="sm" type="none"/>
+          </a:ln>
+        </p:spPr>
+        <p:txBody>
+          <a:bodyPr anchorCtr="0" anchor="ctr" bIns="91425" lIns="91425" spcFirstLastPara="1" rIns="91425" wrap="square" tIns="91425">
+            <a:noAutofit/>
+          </a:bodyPr>
+          <a:lstStyle/>
+          <a:p>
+            <a:pPr indent="0" lvl="0" marL="0" rtl="0" algn="ctr">
+              <a:spcBef>
+                <a:spcPts val="0"/>
+              </a:spcBef>
+              <a:spcAft>
+                <a:spcPts val="0"/>
+              </a:spcAft>
+              <a:buNone/>
+            </a:pPr>
+            <a:r>
+              <a:t/>
+            </a:r>
+            <a:endParaRPr/>
+          </a:p>
+        </p:txBody>
+      </p:sp>
+      <p:sp>
+        <p:nvSpPr>
+          <p:cNvPr id="123" name="Google Shape;123;p11"/>
+          <p:cNvSpPr/>
+          <p:nvPr/>
+        </p:nvSpPr>
+        <p:spPr>
+          <a:xfrm>
+            <a:off x="508000" y="1270000"/>
+            <a:ext cx="2031900" cy="701400"/>
+          </a:xfrm>
+          <a:prstGeom prst="rect">
+            <a:avLst/>
+          </a:prstGeom>
+          <a:solidFill>
+            <a:srgbClr val="FB923C"/>
+          </a:solidFill>
+          <a:ln cap="flat" cmpd="sng" w="38950">
+            <a:solidFill>
+              <a:srgbClr val="1C1C1C"/>
+            </a:solidFill>
+            <a:prstDash val="solid"/>
+            <a:round/>
+            <a:headEnd len="sm" w="sm" type="none"/>
+            <a:tailEnd len="sm" w="sm" type="none"/>
+          </a:ln>
+        </p:spPr>
+        <p:txBody>
+          <a:bodyPr anchorCtr="0" anchor="ctr" bIns="91425" lIns="91425" spcFirstLastPara="1" rIns="91425" wrap="square" tIns="91425">
+            <a:noAutofit/>
+          </a:bodyPr>
+          <a:lstStyle/>
+          <a:p>
+            <a:pPr indent="0" lvl="0" marL="0" rtl="0" algn="ctr">
+              <a:spcBef>
+                <a:spcPts val="0"/>
+              </a:spcBef>
+              <a:spcAft>
+                <a:spcPts val="0"/>
+              </a:spcAft>
+              <a:buNone/>
+            </a:pPr>
+            <a:r>
+              <a:t/>
+            </a:r>
+            <a:endParaRPr/>
+          </a:p>
+        </p:txBody>
+      </p:sp>
+      <p:sp>
+        <p:nvSpPr>
+          <p:cNvPr id="124" name="Google Shape;124;p11"/>
+          <p:cNvSpPr/>
+          <p:nvPr/>
+        </p:nvSpPr>
+        <p:spPr>
+          <a:xfrm>
+            <a:off x="2540000" y="1270000"/>
+            <a:ext cx="2793900" cy="701400"/>
+          </a:xfrm>
+          <a:prstGeom prst="rect">
+            <a:avLst/>
+          </a:prstGeom>
+          <a:solidFill>
+            <a:srgbClr val="FB923C"/>
+          </a:solidFill>
+          <a:ln cap="flat" cmpd="sng" w="38950">
+            <a:solidFill>
+              <a:srgbClr val="1C1C1C"/>
+            </a:solidFill>
+            <a:prstDash val="solid"/>
+            <a:round/>
+            <a:headEnd len="sm" w="sm" type="none"/>
+            <a:tailEnd len="sm" w="sm" type="none"/>
+          </a:ln>
+        </p:spPr>
+        <p:txBody>
+          <a:bodyPr anchorCtr="0" anchor="ctr" bIns="91425" lIns="91425" spcFirstLastPara="1" rIns="91425" wrap="square" tIns="91425">
+            <a:noAutofit/>
+          </a:bodyPr>
+          <a:lstStyle/>
+          <a:p>
+            <a:pPr indent="0" lvl="0" marL="0" rtl="0" algn="ctr">
+              <a:spcBef>
+                <a:spcPts val="0"/>
+              </a:spcBef>
+              <a:spcAft>
+                <a:spcPts val="0"/>
+              </a:spcAft>
+              <a:buNone/>
+            </a:pPr>
+            <a:r>
+              <a:t/>
+            </a:r>
+            <a:endParaRPr/>
+          </a:p>
+        </p:txBody>
+      </p:sp>
+      <p:sp>
+        <p:nvSpPr>
+          <p:cNvPr id="125" name="Google Shape;125;p11"/>
+          <p:cNvSpPr/>
+          <p:nvPr/>
+        </p:nvSpPr>
+        <p:spPr>
+          <a:xfrm>
+            <a:off x="5334000" y="1270000"/>
+            <a:ext cx="2793900" cy="701400"/>
+          </a:xfrm>
+          <a:prstGeom prst="rect">
+            <a:avLst/>
+          </a:prstGeom>
+          <a:solidFill>
+            <a:srgbClr val="FB923C"/>
+          </a:solidFill>
+          <a:ln cap="flat" cmpd="sng" w="38950">
+            <a:solidFill>
+              <a:srgbClr val="1C1C1C"/>
+            </a:solidFill>
+            <a:prstDash val="solid"/>
+            <a:round/>
+            <a:headEnd len="sm" w="sm" type="none"/>
+            <a:tailEnd len="sm" w="sm" type="none"/>
+          </a:ln>
+        </p:spPr>
+        <p:txBody>
+          <a:bodyPr anchorCtr="0" anchor="ctr" bIns="91425" lIns="91425" spcFirstLastPara="1" rIns="91425" wrap="square" tIns="91425">
+            <a:noAutofit/>
+          </a:bodyPr>
+          <a:lstStyle/>
+          <a:p>
+            <a:pPr indent="0" lvl="0" marL="0" rtl="0" algn="ctr">
+              <a:spcBef>
+                <a:spcPts val="0"/>
+              </a:spcBef>
+              <a:spcAft>
+                <a:spcPts val="0"/>
+              </a:spcAft>
+              <a:buNone/>
+            </a:pPr>
+            <a:r>
+              <a:t/>
+            </a:r>
+            <a:endParaRPr/>
+          </a:p>
+        </p:txBody>
+      </p:sp>
+      <p:sp>
+        <p:nvSpPr>
+          <p:cNvPr id="126" name="Google Shape;126;p11"/>
+          <p:cNvSpPr/>
+          <p:nvPr/>
+        </p:nvSpPr>
+        <p:spPr>
+          <a:xfrm>
+            <a:off x="508000" y="1971524"/>
+            <a:ext cx="2031900" cy="701400"/>
+          </a:xfrm>
+          <a:prstGeom prst="rect">
+            <a:avLst/>
+          </a:prstGeom>
+          <a:solidFill>
+            <a:srgbClr val="FFFFFF"/>
+          </a:solidFill>
+          <a:ln cap="flat" cmpd="sng" w="38950">
+            <a:solidFill>
+              <a:srgbClr val="1C1C1C"/>
+            </a:solidFill>
+            <a:prstDash val="solid"/>
+            <a:round/>
+            <a:headEnd len="sm" w="sm" type="none"/>
+            <a:tailEnd len="sm" w="sm" type="none"/>
+          </a:ln>
+        </p:spPr>
+        <p:txBody>
+          <a:bodyPr anchorCtr="0" anchor="ctr" bIns="91425" lIns="91425" spcFirstLastPara="1" rIns="91425" wrap="square" tIns="91425">
+            <a:noAutofit/>
+          </a:bodyPr>
+          <a:lstStyle/>
+          <a:p>
+            <a:pPr indent="0" lvl="0" marL="0" rtl="0" algn="ctr">
+              <a:spcBef>
+                <a:spcPts val="0"/>
+              </a:spcBef>
+              <a:spcAft>
+                <a:spcPts val="0"/>
+              </a:spcAft>
+              <a:buNone/>
+            </a:pPr>
+            <a:r>
+              <a:t/>
+            </a:r>
+            <a:endParaRPr/>
+          </a:p>
+        </p:txBody>
+      </p:sp>
+      <p:sp>
+        <p:nvSpPr>
+          <p:cNvPr id="127" name="Google Shape;127;p11"/>
+          <p:cNvSpPr/>
+          <p:nvPr/>
+        </p:nvSpPr>
+        <p:spPr>
+          <a:xfrm>
+            <a:off x="2540000" y="1971524"/>
+            <a:ext cx="2793900" cy="701400"/>
+          </a:xfrm>
+          <a:prstGeom prst="rect">
+            <a:avLst/>
+          </a:prstGeom>
+          <a:solidFill>
+            <a:srgbClr val="FFFFFF"/>
+          </a:solidFill>
+          <a:ln cap="flat" cmpd="sng" w="38950">
+            <a:solidFill>
+              <a:srgbClr val="1C1C1C"/>
+            </a:solidFill>
+            <a:prstDash val="solid"/>
+            <a:round/>
+            <a:headEnd len="sm" w="sm" type="none"/>
+            <a:tailEnd len="sm" w="sm" type="none"/>
+          </a:ln>
+        </p:spPr>
+        <p:txBody>
+          <a:bodyPr anchorCtr="0" anchor="ctr" bIns="91425" lIns="91425" spcFirstLastPara="1" rIns="91425" wrap="square" tIns="91425">
+            <a:noAutofit/>
+          </a:bodyPr>
+          <a:lstStyle/>
+          <a:p>
+            <a:pPr indent="0" lvl="0" marL="0" rtl="0" algn="ctr">
+              <a:spcBef>
+                <a:spcPts val="0"/>
+              </a:spcBef>
+              <a:spcAft>
+                <a:spcPts val="0"/>
+              </a:spcAft>
+              <a:buNone/>
+            </a:pPr>
+            <a:r>
+              <a:t/>
+            </a:r>
+            <a:endParaRPr/>
+          </a:p>
+        </p:txBody>
+      </p:sp>
+      <p:sp>
+        <p:nvSpPr>
+          <p:cNvPr id="128" name="Google Shape;128;p11"/>
+          <p:cNvSpPr/>
+          <p:nvPr/>
+        </p:nvSpPr>
+        <p:spPr>
+          <a:xfrm>
+            <a:off x="5334000" y="1971524"/>
+            <a:ext cx="2793900" cy="701400"/>
+          </a:xfrm>
+          <a:prstGeom prst="rect">
+            <a:avLst/>
+          </a:prstGeom>
+          <a:solidFill>
+            <a:srgbClr val="FFFFFF"/>
+          </a:solidFill>
+          <a:ln cap="flat" cmpd="sng" w="38950">
+            <a:solidFill>
+              <a:srgbClr val="1C1C1C"/>
+            </a:solidFill>
+            <a:prstDash val="solid"/>
+            <a:round/>
+            <a:headEnd len="sm" w="sm" type="none"/>
+            <a:tailEnd len="sm" w="sm" type="none"/>
+          </a:ln>
+        </p:spPr>
+        <p:txBody>
+          <a:bodyPr anchorCtr="0" anchor="ctr" bIns="91425" lIns="91425" spcFirstLastPara="1" rIns="91425" wrap="square" tIns="91425">
+            <a:noAutofit/>
+          </a:bodyPr>
+          <a:lstStyle/>
+          <a:p>
+            <a:pPr indent="0" lvl="0" marL="0" rtl="0" algn="ctr">
+              <a:spcBef>
+                <a:spcPts val="0"/>
+              </a:spcBef>
+              <a:spcAft>
+                <a:spcPts val="0"/>
+              </a:spcAft>
+              <a:buNone/>
+            </a:pPr>
+            <a:r>
+              <a:t/>
+            </a:r>
+            <a:endParaRPr/>
+          </a:p>
+        </p:txBody>
+      </p:sp>
+      <p:sp>
+        <p:nvSpPr>
+          <p:cNvPr id="129" name="Google Shape;129;p11"/>
+          <p:cNvSpPr/>
+          <p:nvPr/>
+        </p:nvSpPr>
+        <p:spPr>
+          <a:xfrm>
+            <a:off x="508000" y="2673048"/>
+            <a:ext cx="2031900" cy="701400"/>
+          </a:xfrm>
+          <a:prstGeom prst="rect">
+            <a:avLst/>
+          </a:prstGeom>
+          <a:solidFill>
+            <a:srgbClr val="FFFFFF"/>
+          </a:solidFill>
+          <a:ln cap="flat" cmpd="sng" w="38950">
+            <a:solidFill>
+              <a:srgbClr val="1C1C1C"/>
+            </a:solidFill>
+            <a:prstDash val="solid"/>
+            <a:round/>
+            <a:headEnd len="sm" w="sm" type="none"/>
+            <a:tailEnd len="sm" w="sm" type="none"/>
+          </a:ln>
+        </p:spPr>
+        <p:txBody>
+          <a:bodyPr anchorCtr="0" anchor="ctr" bIns="91425" lIns="91425" spcFirstLastPara="1" rIns="91425" wrap="square" tIns="91425">
+            <a:noAutofit/>
+          </a:bodyPr>
+          <a:lstStyle/>
+          <a:p>
+            <a:pPr indent="0" lvl="0" marL="0" rtl="0" algn="ctr">
+              <a:spcBef>
+                <a:spcPts val="0"/>
+              </a:spcBef>
+              <a:spcAft>
+                <a:spcPts val="0"/>
+              </a:spcAft>
+              <a:buNone/>
+            </a:pPr>
+            <a:r>
+              <a:t/>
+            </a:r>
+            <a:endParaRPr/>
+          </a:p>
+        </p:txBody>
+      </p:sp>
+      <p:sp>
+        <p:nvSpPr>
+          <p:cNvPr id="130" name="Google Shape;130;p11"/>
+          <p:cNvSpPr/>
+          <p:nvPr/>
+        </p:nvSpPr>
+        <p:spPr>
+          <a:xfrm>
+            <a:off x="2540000" y="2673048"/>
+            <a:ext cx="2793900" cy="701400"/>
+          </a:xfrm>
+          <a:prstGeom prst="rect">
+            <a:avLst/>
+          </a:prstGeom>
+          <a:solidFill>
+            <a:srgbClr val="FFFFFF"/>
+          </a:solidFill>
+          <a:ln cap="flat" cmpd="sng" w="38950">
+            <a:solidFill>
+              <a:srgbClr val="1C1C1C"/>
+            </a:solidFill>
+            <a:prstDash val="solid"/>
+            <a:round/>
+            <a:headEnd len="sm" w="sm" type="none"/>
+            <a:tailEnd len="sm" w="sm" type="none"/>
+          </a:ln>
+        </p:spPr>
+        <p:txBody>
+          <a:bodyPr anchorCtr="0" anchor="ctr" bIns="91425" lIns="91425" spcFirstLastPara="1" rIns="91425" wrap="square" tIns="91425">
+            <a:noAutofit/>
+          </a:bodyPr>
+          <a:lstStyle/>
+          <a:p>
+            <a:pPr indent="0" lvl="0" marL="0" rtl="0" algn="ctr">
+              <a:spcBef>
+                <a:spcPts val="0"/>
+              </a:spcBef>
+              <a:spcAft>
+                <a:spcPts val="0"/>
+              </a:spcAft>
+              <a:buNone/>
+            </a:pPr>
+            <a:r>
+              <a:t/>
+            </a:r>
+            <a:endParaRPr/>
+          </a:p>
+        </p:txBody>
+      </p:sp>
+      <p:sp>
+        <p:nvSpPr>
+          <p:cNvPr id="131" name="Google Shape;131;p11"/>
+          <p:cNvSpPr/>
+          <p:nvPr/>
+        </p:nvSpPr>
+        <p:spPr>
+          <a:xfrm>
+            <a:off x="5334000" y="2673048"/>
+            <a:ext cx="2793900" cy="701400"/>
+          </a:xfrm>
+          <a:prstGeom prst="rect">
+            <a:avLst/>
+          </a:prstGeom>
+          <a:solidFill>
+            <a:srgbClr val="FFFFFF"/>
+          </a:solidFill>
+          <a:ln cap="flat" cmpd="sng" w="38950">
+            <a:solidFill>
+              <a:srgbClr val="1C1C1C"/>
+            </a:solidFill>
+            <a:prstDash val="solid"/>
+            <a:round/>
+            <a:headEnd len="sm" w="sm" type="none"/>
+            <a:tailEnd len="sm" w="sm" type="none"/>
+          </a:ln>
+        </p:spPr>
+        <p:txBody>
+          <a:bodyPr anchorCtr="0" anchor="ctr" bIns="91425" lIns="91425" spcFirstLastPara="1" rIns="91425" wrap="square" tIns="91425">
+            <a:noAutofit/>
+          </a:bodyPr>
+          <a:lstStyle/>
+          <a:p>
+            <a:pPr indent="0" lvl="0" marL="0" rtl="0" algn="ctr">
+              <a:spcBef>
+                <a:spcPts val="0"/>
+              </a:spcBef>
+              <a:spcAft>
+                <a:spcPts val="0"/>
+              </a:spcAft>
+              <a:buNone/>
+            </a:pPr>
+            <a:r>
+              <a:t/>
+            </a:r>
+            <a:endParaRPr/>
+          </a:p>
+        </p:txBody>
+      </p:sp>
+      <p:sp>
+        <p:nvSpPr>
+          <p:cNvPr id="132" name="Google Shape;132;p11"/>
+          <p:cNvSpPr/>
+          <p:nvPr/>
+        </p:nvSpPr>
+        <p:spPr>
+          <a:xfrm>
+            <a:off x="508000" y="3374571"/>
+            <a:ext cx="2031900" cy="701400"/>
+          </a:xfrm>
+          <a:prstGeom prst="rect">
+            <a:avLst/>
+          </a:prstGeom>
+          <a:solidFill>
+            <a:srgbClr val="FFFFFF"/>
+          </a:solidFill>
+          <a:ln cap="flat" cmpd="sng" w="38950">
+            <a:solidFill>
+              <a:srgbClr val="1C1C1C"/>
+            </a:solidFill>
+            <a:prstDash val="solid"/>
+            <a:round/>
+            <a:headEnd len="sm" w="sm" type="none"/>
+            <a:tailEnd len="sm" w="sm" type="none"/>
+          </a:ln>
+        </p:spPr>
+        <p:txBody>
+          <a:bodyPr anchorCtr="0" anchor="ctr" bIns="91425" lIns="91425" spcFirstLastPara="1" rIns="91425" wrap="square" tIns="91425">
+            <a:noAutofit/>
+          </a:bodyPr>
+          <a:lstStyle/>
+          <a:p>
+            <a:pPr indent="0" lvl="0" marL="0" rtl="0" algn="ctr">
+              <a:spcBef>
+                <a:spcPts val="0"/>
+              </a:spcBef>
+              <a:spcAft>
+                <a:spcPts val="0"/>
+              </a:spcAft>
+              <a:buNone/>
+            </a:pPr>
+            <a:r>
+              <a:t/>
+            </a:r>
+            <a:endParaRPr/>
+          </a:p>
+        </p:txBody>
+      </p:sp>
+      <p:sp>
+        <p:nvSpPr>
+          <p:cNvPr id="133" name="Google Shape;133;p11"/>
+          <p:cNvSpPr/>
+          <p:nvPr/>
+        </p:nvSpPr>
+        <p:spPr>
+          <a:xfrm>
+            <a:off x="2540000" y="3374571"/>
+            <a:ext cx="2793900" cy="701400"/>
+          </a:xfrm>
+          <a:prstGeom prst="rect">
+            <a:avLst/>
+          </a:prstGeom>
+          <a:solidFill>
+            <a:srgbClr val="FFFFFF"/>
+          </a:solidFill>
+          <a:ln cap="flat" cmpd="sng" w="38950">
+            <a:solidFill>
+              <a:srgbClr val="1C1C1C"/>
+            </a:solidFill>
+            <a:prstDash val="solid"/>
+            <a:round/>
+            <a:headEnd len="sm" w="sm" type="none"/>
+            <a:tailEnd len="sm" w="sm" type="none"/>
+          </a:ln>
+        </p:spPr>
+        <p:txBody>
+          <a:bodyPr anchorCtr="0" anchor="ctr" bIns="91425" lIns="91425" spcFirstLastPara="1" rIns="91425" wrap="square" tIns="91425">
+            <a:noAutofit/>
+          </a:bodyPr>
+          <a:lstStyle/>
+          <a:p>
+            <a:pPr indent="0" lvl="0" marL="0" rtl="0" algn="ctr">
+              <a:spcBef>
+                <a:spcPts val="0"/>
+              </a:spcBef>
+              <a:spcAft>
+                <a:spcPts val="0"/>
+              </a:spcAft>
+              <a:buNone/>
+            </a:pPr>
+            <a:r>
+              <a:t/>
+            </a:r>
+            <a:endParaRPr/>
+          </a:p>
+        </p:txBody>
+      </p:sp>
+      <p:sp>
+        <p:nvSpPr>
+          <p:cNvPr id="134" name="Google Shape;134;p11"/>
+          <p:cNvSpPr/>
+          <p:nvPr/>
+        </p:nvSpPr>
+        <p:spPr>
+          <a:xfrm>
+            <a:off x="5334000" y="3374571"/>
+            <a:ext cx="2793900" cy="701400"/>
+          </a:xfrm>
+          <a:prstGeom prst="rect">
+            <a:avLst/>
+          </a:prstGeom>
+          <a:solidFill>
+            <a:srgbClr val="FFFFFF"/>
+          </a:solidFill>
+          <a:ln cap="flat" cmpd="sng" w="38950">
+            <a:solidFill>
+              <a:srgbClr val="1C1C1C"/>
+            </a:solidFill>
+            <a:prstDash val="solid"/>
+            <a:round/>
+            <a:headEnd len="sm" w="sm" type="none"/>
+            <a:tailEnd len="sm" w="sm" type="none"/>
+          </a:ln>
+        </p:spPr>
+        <p:txBody>
+          <a:bodyPr anchorCtr="0" anchor="ctr" bIns="91425" lIns="91425" spcFirstLastPara="1" rIns="91425" wrap="square" tIns="91425">
+            <a:noAutofit/>
+          </a:bodyPr>
+          <a:lstStyle/>
+          <a:p>
+            <a:pPr indent="0" lvl="0" marL="0" rtl="0" algn="ctr">
+              <a:spcBef>
+                <a:spcPts val="0"/>
+              </a:spcBef>
+              <a:spcAft>
+                <a:spcPts val="0"/>
+              </a:spcAft>
+              <a:buNone/>
+            </a:pPr>
+            <a:r>
+              <a:t/>
+            </a:r>
+            <a:endParaRPr/>
+          </a:p>
+        </p:txBody>
+      </p:sp>
+      <p:sp>
+        <p:nvSpPr>
+          <p:cNvPr id="135" name="Google Shape;135;p11"/>
+          <p:cNvSpPr/>
+          <p:nvPr/>
+        </p:nvSpPr>
+        <p:spPr>
+          <a:xfrm>
+            <a:off x="508000" y="4076095"/>
+            <a:ext cx="2031900" cy="701400"/>
+          </a:xfrm>
+          <a:prstGeom prst="rect">
+            <a:avLst/>
+          </a:prstGeom>
+          <a:solidFill>
+            <a:srgbClr val="FFFFFF"/>
+          </a:solidFill>
+          <a:ln cap="flat" cmpd="sng" w="38950">
+            <a:solidFill>
+              <a:srgbClr val="1C1C1C"/>
+            </a:solidFill>
+            <a:prstDash val="solid"/>
+            <a:round/>
+            <a:headEnd len="sm" w="sm" type="none"/>
+            <a:tailEnd len="sm" w="sm" type="none"/>
+          </a:ln>
+        </p:spPr>
+        <p:txBody>
+          <a:bodyPr anchorCtr="0" anchor="ctr" bIns="91425" lIns="91425" spcFirstLastPara="1" rIns="91425" wrap="square" tIns="91425">
+            <a:noAutofit/>
+          </a:bodyPr>
+          <a:lstStyle/>
+          <a:p>
+            <a:pPr indent="0" lvl="0" marL="0" rtl="0" algn="ctr">
+              <a:spcBef>
+                <a:spcPts val="0"/>
+              </a:spcBef>
+              <a:spcAft>
+                <a:spcPts val="0"/>
+              </a:spcAft>
+              <a:buNone/>
+            </a:pPr>
+            <a:r>
+              <a:t/>
+            </a:r>
+            <a:endParaRPr/>
+          </a:p>
+        </p:txBody>
+      </p:sp>
+      <p:sp>
+        <p:nvSpPr>
+          <p:cNvPr id="136" name="Google Shape;136;p11"/>
+          <p:cNvSpPr/>
+          <p:nvPr/>
+        </p:nvSpPr>
+        <p:spPr>
+          <a:xfrm>
+            <a:off x="2540000" y="4076095"/>
+            <a:ext cx="2793900" cy="701400"/>
+          </a:xfrm>
+          <a:prstGeom prst="rect">
+            <a:avLst/>
+          </a:prstGeom>
+          <a:solidFill>
+            <a:srgbClr val="FFFFFF"/>
+          </a:solidFill>
+          <a:ln cap="flat" cmpd="sng" w="38950">
+            <a:solidFill>
+              <a:srgbClr val="1C1C1C"/>
+            </a:solidFill>
+            <a:prstDash val="solid"/>
+            <a:round/>
+            <a:headEnd len="sm" w="sm" type="none"/>
+            <a:tailEnd len="sm" w="sm" type="none"/>
+          </a:ln>
+        </p:spPr>
+        <p:txBody>
+          <a:bodyPr anchorCtr="0" anchor="ctr" bIns="91425" lIns="91425" spcFirstLastPara="1" rIns="91425" wrap="square" tIns="91425">
+            <a:noAutofit/>
+          </a:bodyPr>
+          <a:lstStyle/>
+          <a:p>
+            <a:pPr indent="0" lvl="0" marL="0" rtl="0" algn="ctr">
+              <a:spcBef>
+                <a:spcPts val="0"/>
+              </a:spcBef>
+              <a:spcAft>
+                <a:spcPts val="0"/>
+              </a:spcAft>
+              <a:buNone/>
+            </a:pPr>
+            <a:r>
+              <a:t/>
+            </a:r>
+            <a:endParaRPr/>
+          </a:p>
+        </p:txBody>
+      </p:sp>
+      <p:sp>
+        <p:nvSpPr>
+          <p:cNvPr id="137" name="Google Shape;137;p11"/>
+          <p:cNvSpPr/>
+          <p:nvPr/>
+        </p:nvSpPr>
+        <p:spPr>
+          <a:xfrm>
+            <a:off x="5334000" y="4076095"/>
+            <a:ext cx="2793900" cy="701400"/>
+          </a:xfrm>
+          <a:prstGeom prst="rect">
+            <a:avLst/>
+          </a:prstGeom>
+          <a:solidFill>
+            <a:srgbClr val="FFFFFF"/>
+          </a:solidFill>
+          <a:ln cap="flat" cmpd="sng" w="38950">
+            <a:solidFill>
+              <a:srgbClr val="1C1C1C"/>
+            </a:solidFill>
+            <a:prstDash val="solid"/>
+            <a:round/>
+            <a:headEnd len="sm" w="sm" type="none"/>
+            <a:tailEnd len="sm" w="sm" type="none"/>
+          </a:ln>
+        </p:spPr>
+        <p:txBody>
+          <a:bodyPr anchorCtr="0" anchor="ctr" bIns="91425" lIns="91425" spcFirstLastPara="1" rIns="91425" wrap="square" tIns="91425">
+            <a:noAutofit/>
+          </a:bodyPr>
+          <a:lstStyle/>
+          <a:p>
+            <a:pPr indent="0" lvl="0" marL="0" rtl="0" algn="ctr">
+              <a:spcBef>
+                <a:spcPts val="0"/>
+              </a:spcBef>
+              <a:spcAft>
+                <a:spcPts val="0"/>
+              </a:spcAft>
+              <a:buNone/>
+            </a:pPr>
+            <a:r>
+              <a:t/>
+            </a:r>
+            <a:endParaRPr/>
+          </a:p>
+        </p:txBody>
+      </p:sp>
+      <p:sp>
+        <p:nvSpPr>
+          <p:cNvPr id="138" name="Google Shape;138;p11"/>
+          <p:cNvSpPr/>
+          <p:nvPr/>
+        </p:nvSpPr>
+        <p:spPr>
+          <a:xfrm>
+            <a:off x="508000" y="4777619"/>
+            <a:ext cx="2031900" cy="701400"/>
+          </a:xfrm>
+          <a:prstGeom prst="rect">
+            <a:avLst/>
+          </a:prstGeom>
+          <a:solidFill>
+            <a:srgbClr val="FFFFFF"/>
+          </a:solidFill>
+          <a:ln cap="flat" cmpd="sng" w="38950">
+            <a:solidFill>
+              <a:srgbClr val="1C1C1C"/>
+            </a:solidFill>
+            <a:prstDash val="solid"/>
+            <a:round/>
+            <a:headEnd len="sm" w="sm" type="none"/>
+            <a:tailEnd len="sm" w="sm" type="none"/>
+          </a:ln>
+        </p:spPr>
+        <p:txBody>
+          <a:bodyPr anchorCtr="0" anchor="ctr" bIns="91425" lIns="91425" spcFirstLastPara="1" rIns="91425" wrap="square" tIns="91425">
+            <a:noAutofit/>
+          </a:bodyPr>
+          <a:lstStyle/>
+          <a:p>
+            <a:pPr indent="0" lvl="0" marL="0" rtl="0" algn="ctr">
+              <a:spcBef>
+                <a:spcPts val="0"/>
+              </a:spcBef>
+              <a:spcAft>
+                <a:spcPts val="0"/>
+              </a:spcAft>
+              <a:buNone/>
+            </a:pPr>
+            <a:r>
+              <a:t/>
+            </a:r>
+            <a:endParaRPr/>
+          </a:p>
+        </p:txBody>
+      </p:sp>
+      <p:sp>
+        <p:nvSpPr>
+          <p:cNvPr id="139" name="Google Shape;139;p11"/>
+          <p:cNvSpPr/>
+          <p:nvPr/>
+        </p:nvSpPr>
+        <p:spPr>
+          <a:xfrm>
+            <a:off x="2540000" y="4777619"/>
+            <a:ext cx="2793900" cy="701400"/>
+          </a:xfrm>
+          <a:prstGeom prst="rect">
+            <a:avLst/>
+          </a:prstGeom>
+          <a:solidFill>
+            <a:srgbClr val="FFFFFF"/>
+          </a:solidFill>
+          <a:ln cap="flat" cmpd="sng" w="38950">
+            <a:solidFill>
+              <a:srgbClr val="1C1C1C"/>
+            </a:solidFill>
+            <a:prstDash val="solid"/>
+            <a:round/>
+            <a:headEnd len="sm" w="sm" type="none"/>
+            <a:tailEnd len="sm" w="sm" type="none"/>
+          </a:ln>
+        </p:spPr>
+        <p:txBody>
+          <a:bodyPr anchorCtr="0" anchor="ctr" bIns="91425" lIns="91425" spcFirstLastPara="1" rIns="91425" wrap="square" tIns="91425">
+            <a:noAutofit/>
+          </a:bodyPr>
+          <a:lstStyle/>
+          <a:p>
+            <a:pPr indent="0" lvl="0" marL="0" rtl="0" algn="ctr">
+              <a:spcBef>
+                <a:spcPts val="0"/>
+              </a:spcBef>
+              <a:spcAft>
+                <a:spcPts val="0"/>
+              </a:spcAft>
+              <a:buNone/>
+            </a:pPr>
+            <a:r>
+              <a:t/>
+            </a:r>
+            <a:endParaRPr/>
+          </a:p>
+        </p:txBody>
+      </p:sp>
+      <p:sp>
+        <p:nvSpPr>
+          <p:cNvPr id="140" name="Google Shape;140;p11"/>
+          <p:cNvSpPr/>
+          <p:nvPr/>
+        </p:nvSpPr>
+        <p:spPr>
+          <a:xfrm>
+            <a:off x="5334000" y="4777619"/>
+            <a:ext cx="2793900" cy="701400"/>
+          </a:xfrm>
+          <a:prstGeom prst="rect">
+            <a:avLst/>
+          </a:prstGeom>
+          <a:solidFill>
+            <a:srgbClr val="FFFFFF"/>
+          </a:solidFill>
+          <a:ln cap="flat" cmpd="sng" w="38950">
+            <a:solidFill>
+              <a:srgbClr val="1C1C1C"/>
+            </a:solidFill>
+            <a:prstDash val="solid"/>
+            <a:round/>
+            <a:headEnd len="sm" w="sm" type="none"/>
+            <a:tailEnd len="sm" w="sm" type="none"/>
+          </a:ln>
+        </p:spPr>
+        <p:txBody>
+          <a:bodyPr anchorCtr="0" anchor="ctr" bIns="91425" lIns="91425" spcFirstLastPara="1" rIns="91425" wrap="square" tIns="91425">
+            <a:noAutofit/>
+          </a:bodyPr>
+          <a:lstStyle/>
+          <a:p>
+            <a:pPr indent="0" lvl="0" marL="0" rtl="0" algn="ctr">
+              <a:spcBef>
+                <a:spcPts val="0"/>
+              </a:spcBef>
+              <a:spcAft>
+                <a:spcPts val="0"/>
+              </a:spcAft>
+              <a:buNone/>
+            </a:pPr>
+            <a:r>
+              <a:t/>
+            </a:r>
+            <a:endParaRPr/>
+          </a:p>
+        </p:txBody>
+      </p:sp>
+      <p:sp>
+        <p:nvSpPr>
+          <p:cNvPr id="141" name="Google Shape;141;p11"/>
+          <p:cNvSpPr/>
+          <p:nvPr/>
+        </p:nvSpPr>
+        <p:spPr>
+          <a:xfrm>
+            <a:off x="508000" y="5479143"/>
+            <a:ext cx="2031900" cy="701400"/>
+          </a:xfrm>
+          <a:prstGeom prst="rect">
+            <a:avLst/>
+          </a:prstGeom>
+          <a:solidFill>
+            <a:srgbClr val="4ADE80"/>
+          </a:solidFill>
+          <a:ln cap="flat" cmpd="sng" w="38950">
+            <a:solidFill>
+              <a:srgbClr val="1C1C1C"/>
+            </a:solidFill>
+            <a:prstDash val="solid"/>
+            <a:round/>
+            <a:headEnd len="sm" w="sm" type="none"/>
+            <a:tailEnd len="sm" w="sm" type="none"/>
+          </a:ln>
+        </p:spPr>
+        <p:txBody>
+          <a:bodyPr anchorCtr="0" anchor="ctr" bIns="91425" lIns="91425" spcFirstLastPara="1" rIns="91425" wrap="square" tIns="91425">
+            <a:noAutofit/>
+          </a:bodyPr>
+          <a:lstStyle/>
+          <a:p>
+            <a:pPr indent="0" lvl="0" marL="0" rtl="0" algn="ctr">
+              <a:spcBef>
+                <a:spcPts val="0"/>
+              </a:spcBef>
+              <a:spcAft>
+                <a:spcPts val="0"/>
+              </a:spcAft>
+              <a:buNone/>
+            </a:pPr>
+            <a:r>
+              <a:t/>
+            </a:r>
+            <a:endParaRPr/>
+          </a:p>
+        </p:txBody>
+      </p:sp>
+      <p:sp>
+        <p:nvSpPr>
+          <p:cNvPr id="142" name="Google Shape;142;p11"/>
+          <p:cNvSpPr/>
+          <p:nvPr/>
+        </p:nvSpPr>
+        <p:spPr>
+          <a:xfrm>
+            <a:off x="2540000" y="5479143"/>
+            <a:ext cx="2793900" cy="701400"/>
+          </a:xfrm>
+          <a:prstGeom prst="rect">
+            <a:avLst/>
+          </a:prstGeom>
+          <a:solidFill>
+            <a:srgbClr val="4ADE80"/>
+          </a:solidFill>
+          <a:ln cap="flat" cmpd="sng" w="38950">
+            <a:solidFill>
+              <a:srgbClr val="1C1C1C"/>
+            </a:solidFill>
+            <a:prstDash val="solid"/>
+            <a:round/>
+            <a:headEnd len="sm" w="sm" type="none"/>
+            <a:tailEnd len="sm" w="sm" type="none"/>
+          </a:ln>
+        </p:spPr>
+        <p:txBody>
+          <a:bodyPr anchorCtr="0" anchor="ctr" bIns="91425" lIns="91425" spcFirstLastPara="1" rIns="91425" wrap="square" tIns="91425">
+            <a:noAutofit/>
+          </a:bodyPr>
+          <a:lstStyle/>
+          <a:p>
+            <a:pPr indent="0" lvl="0" marL="0" rtl="0" algn="ctr">
+              <a:spcBef>
+                <a:spcPts val="0"/>
+              </a:spcBef>
+              <a:spcAft>
+                <a:spcPts val="0"/>
+              </a:spcAft>
+              <a:buNone/>
+            </a:pPr>
+            <a:r>
+              <a:t/>
+            </a:r>
+            <a:endParaRPr/>
+          </a:p>
+        </p:txBody>
+      </p:sp>
+      <p:sp>
+        <p:nvSpPr>
+          <p:cNvPr id="143" name="Google Shape;143;p11"/>
+          <p:cNvSpPr/>
+          <p:nvPr/>
+        </p:nvSpPr>
+        <p:spPr>
+          <a:xfrm>
+            <a:off x="5334000" y="5479143"/>
+            <a:ext cx="2793900" cy="701400"/>
+          </a:xfrm>
+          <a:prstGeom prst="rect">
+            <a:avLst/>
+          </a:prstGeom>
+          <a:solidFill>
+            <a:srgbClr val="4ADE80"/>
+          </a:solidFill>
+          <a:ln cap="flat" cmpd="sng" w="38950">
+            <a:solidFill>
+              <a:srgbClr val="1C1C1C"/>
+            </a:solidFill>
+            <a:prstDash val="solid"/>
+            <a:round/>
+            <a:headEnd len="sm" w="sm" type="none"/>
+            <a:tailEnd len="sm" w="sm" type="none"/>
+          </a:ln>
+        </p:spPr>
+        <p:txBody>
+          <a:bodyPr anchorCtr="0" anchor="ctr" bIns="91425" lIns="91425" spcFirstLastPara="1" rIns="91425" wrap="square" tIns="91425">
+            <a:noAutofit/>
+          </a:bodyPr>
+          <a:lstStyle/>
+          <a:p>
+            <a:pPr indent="0" lvl="0" marL="0" rtl="0" algn="ctr">
+              <a:spcBef>
+                <a:spcPts val="0"/>
+              </a:spcBef>
+              <a:spcAft>
+                <a:spcPts val="0"/>
+              </a:spcAft>
+              <a:buNone/>
+            </a:pPr>
+            <a:r>
+              <a:t/>
+            </a:r>
+            <a:endParaRPr/>
+          </a:p>
+        </p:txBody>
+      </p:sp>
+      <p:sp>
+        <p:nvSpPr>
+          <p:cNvPr id="144" name="Google Shape;144;p11"/>
+          <p:cNvSpPr/>
+          <p:nvPr/>
+        </p:nvSpPr>
+        <p:spPr>
+          <a:xfrm>
+            <a:off x="9042400" y="4741333"/>
+            <a:ext cx="2286000" cy="1693200"/>
+          </a:xfrm>
+          <a:prstGeom prst="roundRect">
+            <a:avLst>
+              <a:gd fmla="val 16667" name="adj"/>
+            </a:avLst>
+          </a:prstGeom>
+          <a:solidFill>
+            <a:srgbClr val="38BDF8"/>
+          </a:solidFill>
+          <a:ln cap="flat" cmpd="sng" w="38950">
+            <a:solidFill>
+              <a:srgbClr val="1C1C1C"/>
+            </a:solidFill>
+            <a:prstDash val="solid"/>
+            <a:round/>
+            <a:headEnd len="sm" w="sm" type="none"/>
+            <a:tailEnd len="sm" w="sm" type="none"/>
+          </a:ln>
+        </p:spPr>
+        <p:txBody>
+          <a:bodyPr anchorCtr="0" anchor="ctr" bIns="91425" lIns="91425" spcFirstLastPara="1" rIns="91425" wrap="square" tIns="91425">
+            <a:noAutofit/>
+          </a:bodyPr>
+          <a:lstStyle/>
+          <a:p>
+            <a:pPr indent="0" lvl="0" marL="0" rtl="0" algn="ctr">
+              <a:spcBef>
+                <a:spcPts val="0"/>
+              </a:spcBef>
+              <a:spcAft>
+                <a:spcPts val="0"/>
+              </a:spcAft>
+              <a:buNone/>
+            </a:pPr>
+            <a:r>
+              <a:t/>
+            </a:r>
+            <a:endParaRPr/>
+          </a:p>
+        </p:txBody>
+      </p:sp>
+      <p:sp>
+        <p:nvSpPr>
+          <p:cNvPr id="145" name="Google Shape;145;p11"/>
+          <p:cNvSpPr/>
+          <p:nvPr/>
+        </p:nvSpPr>
+        <p:spPr>
+          <a:xfrm>
+            <a:off x="8229600" y="5554133"/>
+            <a:ext cx="643500" cy="372600"/>
+          </a:xfrm>
+          <a:prstGeom prst="rightArrow">
+            <a:avLst>
+              <a:gd fmla="val 50000" name="adj1"/>
+              <a:gd fmla="val 50000" name="adj2"/>
+            </a:avLst>
+          </a:prstGeom>
+          <a:solidFill>
+            <a:srgbClr val="666666"/>
+          </a:solidFill>
+          <a:ln>
+            <a:noFill/>
+          </a:ln>
+        </p:spPr>
+        <p:txBody>
+          <a:bodyPr anchorCtr="0" anchor="ctr" bIns="91425" lIns="91425" spcFirstLastPara="1" rIns="91425" wrap="square" tIns="91425">
+            <a:noAutofit/>
+          </a:bodyPr>
+          <a:lstStyle/>
+          <a:p>
+            <a:pPr indent="0" lvl="0" marL="0" rtl="0" algn="ctr">
+              <a:spcBef>
+                <a:spcPts val="0"/>
+              </a:spcBef>
+              <a:spcAft>
+                <a:spcPts val="0"/>
+              </a:spcAft>
+              <a:buNone/>
+            </a:pPr>
+            <a:r>
+              <a:t/>
+            </a:r>
+            <a:endParaRPr/>
+          </a:p>
+        </p:txBody>
+      </p:sp>
       <p:pic>
         <p:nvPicPr>
-          <p:cNvPr id="84" name="Google Shape;84;p11"/>
+          <p:cNvPr id="146" name="Google Shape;146;p11" title="Loan comparison calculator photo"/>
           <p:cNvPicPr preferRelativeResize="0"/>
           <p:nvPr/>
         </p:nvPicPr>
-        <p:blipFill>
+        <p:blipFill rotWithShape="1">
           <a:blip r:embed="rId3">
             <a:alphaModFix/>
           </a:blip>
-          <a:stretch>
-            <a:fillRect/>
-          </a:stretch>
+          <a:srcRect b="0" l="0" r="0" t="0"/>
+          <a:stretch/>
         </p:blipFill>
         <p:spPr>
           <a:xfrm>
-            <a:off x="0" y="0"/>
-            <a:ext cx="12191998" cy="6857999"/>
+            <a:off x="8280400" y="1253067"/>
+            <a:ext cx="3759199" cy="2540000"/>
           </a:xfrm>
           <a:prstGeom prst="rect">
             <a:avLst/>
@@ -7484,7 +10581,56 @@
       </p:pic>
       <p:sp>
         <p:nvSpPr>
-          <p:cNvPr id="85" name="Google Shape;85;p11"/>
+          <p:cNvPr id="147" name="Google Shape;147;p11"/>
+          <p:cNvSpPr/>
+          <p:nvPr/>
+        </p:nvSpPr>
+        <p:spPr>
+          <a:xfrm>
+            <a:off x="8280400" y="1253067"/>
+            <a:ext cx="3759300" cy="2540100"/>
+          </a:xfrm>
+          <a:prstGeom prst="roundRect">
+            <a:avLst>
+              <a:gd fmla="val 16667" name="adj"/>
+            </a:avLst>
+          </a:prstGeom>
+          <a:noFill/>
+          <a:ln cap="flat" cmpd="sng" w="38950">
+            <a:solidFill>
+              <a:srgbClr val="1C1C1C"/>
+            </a:solidFill>
+            <a:prstDash val="solid"/>
+            <a:round/>
+            <a:headEnd len="sm" w="sm" type="none"/>
+            <a:tailEnd len="sm" w="sm" type="none"/>
+          </a:ln>
+        </p:spPr>
+        <p:txBody>
+          <a:bodyPr anchorCtr="0" anchor="ctr" bIns="91425" lIns="91425" spcFirstLastPara="1" rIns="91425" wrap="square" tIns="91425">
+            <a:noAutofit/>
+          </a:bodyPr>
+          <a:lstStyle/>
+          <a:p>
+            <a:pPr indent="0" lvl="0" marL="0" rtl="0" algn="ctr">
+              <a:spcBef>
+                <a:spcPts val="0"/>
+              </a:spcBef>
+              <a:spcAft>
+                <a:spcPts val="0"/>
+              </a:spcAft>
+              <a:buNone/>
+            </a:pPr>
+            <a:r>
+              <a:t/>
+            </a:r>
+            <a:endParaRPr/>
+          </a:p>
+        </p:txBody>
+      </p:sp>
+      <p:sp>
+        <p:nvSpPr>
+          <p:cNvPr id="148" name="Google Shape;148;p11"/>
           <p:cNvSpPr txBox="1"/>
           <p:nvPr/>
         </p:nvSpPr>
@@ -7537,7 +10683,7 @@
       </p:sp>
       <p:sp>
         <p:nvSpPr>
-          <p:cNvPr id="86" name="Google Shape;86;p11"/>
+          <p:cNvPr id="149" name="Google Shape;149;p11"/>
           <p:cNvSpPr txBox="1"/>
           <p:nvPr/>
         </p:nvSpPr>
@@ -7590,7 +10736,7 @@
       </p:sp>
       <p:sp>
         <p:nvSpPr>
-          <p:cNvPr id="87" name="Google Shape;87;p11"/>
+          <p:cNvPr id="150" name="Google Shape;150;p11"/>
           <p:cNvSpPr txBox="1"/>
           <p:nvPr/>
         </p:nvSpPr>
@@ -7643,7 +10789,7 @@
       </p:sp>
       <p:sp>
         <p:nvSpPr>
-          <p:cNvPr id="88" name="Google Shape;88;p11"/>
+          <p:cNvPr id="151" name="Google Shape;151;p11"/>
           <p:cNvSpPr txBox="1"/>
           <p:nvPr/>
         </p:nvSpPr>
@@ -7696,7 +10842,7 @@
       </p:sp>
       <p:sp>
         <p:nvSpPr>
-          <p:cNvPr id="89" name="Google Shape;89;p11"/>
+          <p:cNvPr id="152" name="Google Shape;152;p11"/>
           <p:cNvSpPr txBox="1"/>
           <p:nvPr/>
         </p:nvSpPr>
@@ -7749,7 +10895,7 @@
       </p:sp>
       <p:sp>
         <p:nvSpPr>
-          <p:cNvPr id="90" name="Google Shape;90;p11"/>
+          <p:cNvPr id="153" name="Google Shape;153;p11"/>
           <p:cNvSpPr txBox="1"/>
           <p:nvPr/>
         </p:nvSpPr>
@@ -7802,7 +10948,7 @@
       </p:sp>
       <p:sp>
         <p:nvSpPr>
-          <p:cNvPr id="91" name="Google Shape;91;p11"/>
+          <p:cNvPr id="154" name="Google Shape;154;p11"/>
           <p:cNvSpPr txBox="1"/>
           <p:nvPr/>
         </p:nvSpPr>
@@ -7855,7 +11001,7 @@
       </p:sp>
       <p:sp>
         <p:nvSpPr>
-          <p:cNvPr id="92" name="Google Shape;92;p11"/>
+          <p:cNvPr id="155" name="Google Shape;155;p11"/>
           <p:cNvSpPr txBox="1"/>
           <p:nvPr/>
         </p:nvSpPr>
@@ -7908,7 +11054,7 @@
       </p:sp>
       <p:sp>
         <p:nvSpPr>
-          <p:cNvPr id="93" name="Google Shape;93;p11"/>
+          <p:cNvPr id="156" name="Google Shape;156;p11"/>
           <p:cNvSpPr txBox="1"/>
           <p:nvPr/>
         </p:nvSpPr>
@@ -7961,7 +11107,7 @@
       </p:sp>
       <p:sp>
         <p:nvSpPr>
-          <p:cNvPr id="94" name="Google Shape;94;p11"/>
+          <p:cNvPr id="157" name="Google Shape;157;p11"/>
           <p:cNvSpPr txBox="1"/>
           <p:nvPr/>
         </p:nvSpPr>
@@ -8014,7 +11160,7 @@
       </p:sp>
       <p:sp>
         <p:nvSpPr>
-          <p:cNvPr id="95" name="Google Shape;95;p11"/>
+          <p:cNvPr id="158" name="Google Shape;158;p11"/>
           <p:cNvSpPr txBox="1"/>
           <p:nvPr/>
         </p:nvSpPr>
@@ -8067,7 +11213,7 @@
       </p:sp>
       <p:sp>
         <p:nvSpPr>
-          <p:cNvPr id="96" name="Google Shape;96;p11"/>
+          <p:cNvPr id="159" name="Google Shape;159;p11"/>
           <p:cNvSpPr txBox="1"/>
           <p:nvPr/>
         </p:nvSpPr>
@@ -8120,7 +11266,7 @@
       </p:sp>
       <p:sp>
         <p:nvSpPr>
-          <p:cNvPr id="97" name="Google Shape;97;p11"/>
+          <p:cNvPr id="160" name="Google Shape;160;p11"/>
           <p:cNvSpPr txBox="1"/>
           <p:nvPr/>
         </p:nvSpPr>
@@ -8173,7 +11319,7 @@
       </p:sp>
       <p:sp>
         <p:nvSpPr>
-          <p:cNvPr id="98" name="Google Shape;98;p11"/>
+          <p:cNvPr id="161" name="Google Shape;161;p11"/>
           <p:cNvSpPr txBox="1"/>
           <p:nvPr/>
         </p:nvSpPr>
@@ -8226,7 +11372,7 @@
       </p:sp>
       <p:sp>
         <p:nvSpPr>
-          <p:cNvPr id="99" name="Google Shape;99;p11"/>
+          <p:cNvPr id="162" name="Google Shape;162;p11"/>
           <p:cNvSpPr txBox="1"/>
           <p:nvPr/>
         </p:nvSpPr>
@@ -8279,7 +11425,7 @@
       </p:sp>
       <p:sp>
         <p:nvSpPr>
-          <p:cNvPr id="100" name="Google Shape;100;p11"/>
+          <p:cNvPr id="163" name="Google Shape;163;p11"/>
           <p:cNvSpPr txBox="1"/>
           <p:nvPr/>
         </p:nvSpPr>
@@ -8332,7 +11478,7 @@
       </p:sp>
       <p:sp>
         <p:nvSpPr>
-          <p:cNvPr id="101" name="Google Shape;101;p11"/>
+          <p:cNvPr id="164" name="Google Shape;164;p11"/>
           <p:cNvSpPr txBox="1"/>
           <p:nvPr/>
         </p:nvSpPr>
@@ -8385,7 +11531,7 @@
       </p:sp>
       <p:sp>
         <p:nvSpPr>
-          <p:cNvPr id="102" name="Google Shape;102;p11"/>
+          <p:cNvPr id="165" name="Google Shape;165;p11"/>
           <p:cNvSpPr txBox="1"/>
           <p:nvPr/>
         </p:nvSpPr>
@@ -8438,7 +11584,7 @@
       </p:sp>
       <p:sp>
         <p:nvSpPr>
-          <p:cNvPr id="103" name="Google Shape;103;p11"/>
+          <p:cNvPr id="166" name="Google Shape;166;p11"/>
           <p:cNvSpPr txBox="1"/>
           <p:nvPr/>
         </p:nvSpPr>
@@ -8491,7 +11637,7 @@
       </p:sp>
       <p:sp>
         <p:nvSpPr>
-          <p:cNvPr id="104" name="Google Shape;104;p11"/>
+          <p:cNvPr id="167" name="Google Shape;167;p11"/>
           <p:cNvSpPr txBox="1"/>
           <p:nvPr/>
         </p:nvSpPr>
@@ -8544,7 +11690,7 @@
       </p:sp>
       <p:sp>
         <p:nvSpPr>
-          <p:cNvPr id="105" name="Google Shape;105;p11"/>
+          <p:cNvPr id="168" name="Google Shape;168;p11"/>
           <p:cNvSpPr txBox="1"/>
           <p:nvPr/>
         </p:nvSpPr>
@@ -8597,7 +11743,7 @@
       </p:sp>
       <p:sp>
         <p:nvSpPr>
-          <p:cNvPr id="106" name="Google Shape;106;p11"/>
+          <p:cNvPr id="169" name="Google Shape;169;p11"/>
           <p:cNvSpPr txBox="1"/>
           <p:nvPr/>
         </p:nvSpPr>
@@ -8650,7 +11796,7 @@
       </p:sp>
       <p:sp>
         <p:nvSpPr>
-          <p:cNvPr id="107" name="Google Shape;107;p11"/>
+          <p:cNvPr id="170" name="Google Shape;170;p11"/>
           <p:cNvSpPr txBox="1"/>
           <p:nvPr/>
         </p:nvSpPr>
@@ -8703,7 +11849,7 @@
       </p:sp>
       <p:sp>
         <p:nvSpPr>
-          <p:cNvPr id="108" name="Google Shape;108;p11"/>
+          <p:cNvPr id="171" name="Google Shape;171;p11"/>
           <p:cNvSpPr txBox="1"/>
           <p:nvPr/>
         </p:nvSpPr>
@@ -8764,7 +11910,7 @@
       </p:sp>
       <p:sp>
         <p:nvSpPr>
-          <p:cNvPr id="109" name="Google Shape;109;p11"/>
+          <p:cNvPr id="172" name="Google Shape;172;p11"/>
           <p:cNvSpPr txBox="1"/>
           <p:nvPr/>
         </p:nvSpPr>
@@ -8856,13 +12002,13 @@
     <p:bg>
       <p:bgPr>
         <a:solidFill>
-          <a:srgbClr val="FFF9EE"/>
+          <a:srgbClr val="FFFDF7"/>
         </a:solidFill>
       </p:bgPr>
     </p:bg>
     <p:spTree>
       <p:nvGrpSpPr>
-        <p:cNvPr id="114" name="Shape 114"/>
+        <p:cNvPr id="177" name="Shape 177"/>
         <p:cNvGrpSpPr/>
         <p:nvPr/>
       </p:nvGrpSpPr>
@@ -8874,24 +12020,686 @@
           <a:chExt cx="0" cy="0"/>
         </a:xfrm>
       </p:grpSpPr>
+      <p:sp>
+        <p:nvSpPr>
+          <p:cNvPr id="178" name="Google Shape;178;p12"/>
+          <p:cNvSpPr/>
+          <p:nvPr/>
+        </p:nvSpPr>
+        <p:spPr>
+          <a:xfrm>
+            <a:off x="508000" y="304800"/>
+            <a:ext cx="7789200" cy="711300"/>
+          </a:xfrm>
+          <a:prstGeom prst="roundRect">
+            <a:avLst>
+              <a:gd fmla="val 16667" name="adj"/>
+            </a:avLst>
+          </a:prstGeom>
+          <a:solidFill>
+            <a:srgbClr val="FDE047"/>
+          </a:solidFill>
+          <a:ln cap="flat" cmpd="sng" w="38950">
+            <a:solidFill>
+              <a:srgbClr val="1C1C1C"/>
+            </a:solidFill>
+            <a:prstDash val="solid"/>
+            <a:round/>
+            <a:headEnd len="sm" w="sm" type="none"/>
+            <a:tailEnd len="sm" w="sm" type="none"/>
+          </a:ln>
+        </p:spPr>
+        <p:txBody>
+          <a:bodyPr anchorCtr="0" anchor="ctr" bIns="91425" lIns="91425" spcFirstLastPara="1" rIns="91425" wrap="square" tIns="91425">
+            <a:noAutofit/>
+          </a:bodyPr>
+          <a:lstStyle/>
+          <a:p>
+            <a:pPr indent="0" lvl="0" marL="0" rtl="0" algn="ctr">
+              <a:spcBef>
+                <a:spcPts val="0"/>
+              </a:spcBef>
+              <a:spcAft>
+                <a:spcPts val="0"/>
+              </a:spcAft>
+              <a:buNone/>
+            </a:pPr>
+            <a:r>
+              <a:t/>
+            </a:r>
+            <a:endParaRPr/>
+          </a:p>
+        </p:txBody>
+      </p:sp>
+      <p:sp>
+        <p:nvSpPr>
+          <p:cNvPr id="179" name="Google Shape;179;p12"/>
+          <p:cNvSpPr/>
+          <p:nvPr/>
+        </p:nvSpPr>
+        <p:spPr>
+          <a:xfrm>
+            <a:off x="9652000" y="304800"/>
+            <a:ext cx="2031900" cy="575700"/>
+          </a:xfrm>
+          <a:prstGeom prst="roundRect">
+            <a:avLst>
+              <a:gd fmla="val 16667" name="adj"/>
+            </a:avLst>
+          </a:prstGeom>
+          <a:solidFill>
+            <a:srgbClr val="F472B6"/>
+          </a:solidFill>
+          <a:ln cap="flat" cmpd="sng" w="38950">
+            <a:solidFill>
+              <a:srgbClr val="1C1C1C"/>
+            </a:solidFill>
+            <a:prstDash val="solid"/>
+            <a:round/>
+            <a:headEnd len="sm" w="sm" type="none"/>
+            <a:tailEnd len="sm" w="sm" type="none"/>
+          </a:ln>
+        </p:spPr>
+        <p:txBody>
+          <a:bodyPr anchorCtr="0" anchor="ctr" bIns="91425" lIns="91425" spcFirstLastPara="1" rIns="91425" wrap="square" tIns="91425">
+            <a:noAutofit/>
+          </a:bodyPr>
+          <a:lstStyle/>
+          <a:p>
+            <a:pPr indent="0" lvl="0" marL="0" rtl="0" algn="ctr">
+              <a:spcBef>
+                <a:spcPts val="0"/>
+              </a:spcBef>
+              <a:spcAft>
+                <a:spcPts val="0"/>
+              </a:spcAft>
+              <a:buNone/>
+            </a:pPr>
+            <a:r>
+              <a:t/>
+            </a:r>
+            <a:endParaRPr/>
+          </a:p>
+        </p:txBody>
+      </p:sp>
+      <p:sp>
+        <p:nvSpPr>
+          <p:cNvPr id="180" name="Google Shape;180;p12"/>
+          <p:cNvSpPr/>
+          <p:nvPr/>
+        </p:nvSpPr>
+        <p:spPr>
+          <a:xfrm>
+            <a:off x="592667" y="1219200"/>
+            <a:ext cx="6603900" cy="914400"/>
+          </a:xfrm>
+          <a:prstGeom prst="roundRect">
+            <a:avLst>
+              <a:gd fmla="val 16667" name="adj"/>
+            </a:avLst>
+          </a:prstGeom>
+          <a:solidFill>
+            <a:srgbClr val="FFFFFF"/>
+          </a:solidFill>
+          <a:ln cap="flat" cmpd="sng" w="38950">
+            <a:solidFill>
+              <a:srgbClr val="1C1C1C"/>
+            </a:solidFill>
+            <a:prstDash val="solid"/>
+            <a:round/>
+            <a:headEnd len="sm" w="sm" type="none"/>
+            <a:tailEnd len="sm" w="sm" type="none"/>
+          </a:ln>
+        </p:spPr>
+        <p:txBody>
+          <a:bodyPr anchorCtr="0" anchor="ctr" bIns="91425" lIns="91425" spcFirstLastPara="1" rIns="91425" wrap="square" tIns="91425">
+            <a:noAutofit/>
+          </a:bodyPr>
+          <a:lstStyle/>
+          <a:p>
+            <a:pPr indent="0" lvl="0" marL="0" rtl="0" algn="ctr">
+              <a:spcBef>
+                <a:spcPts val="0"/>
+              </a:spcBef>
+              <a:spcAft>
+                <a:spcPts val="0"/>
+              </a:spcAft>
+              <a:buNone/>
+            </a:pPr>
+            <a:r>
+              <a:t/>
+            </a:r>
+            <a:endParaRPr/>
+          </a:p>
+        </p:txBody>
+      </p:sp>
+      <p:sp>
+        <p:nvSpPr>
+          <p:cNvPr id="181" name="Google Shape;181;p12"/>
+          <p:cNvSpPr/>
+          <p:nvPr/>
+        </p:nvSpPr>
+        <p:spPr>
+          <a:xfrm>
+            <a:off x="711200" y="1337733"/>
+            <a:ext cx="203100" cy="694200"/>
+          </a:xfrm>
+          <a:prstGeom prst="roundRect">
+            <a:avLst>
+              <a:gd fmla="val 16667" name="adj"/>
+            </a:avLst>
+          </a:prstGeom>
+          <a:solidFill>
+            <a:srgbClr val="FDE047"/>
+          </a:solidFill>
+          <a:ln cap="flat" cmpd="sng" w="16925">
+            <a:solidFill>
+              <a:srgbClr val="1C1C1C"/>
+            </a:solidFill>
+            <a:prstDash val="solid"/>
+            <a:round/>
+            <a:headEnd len="sm" w="sm" type="none"/>
+            <a:tailEnd len="sm" w="sm" type="none"/>
+          </a:ln>
+        </p:spPr>
+        <p:txBody>
+          <a:bodyPr anchorCtr="0" anchor="ctr" bIns="91425" lIns="91425" spcFirstLastPara="1" rIns="91425" wrap="square" tIns="91425">
+            <a:noAutofit/>
+          </a:bodyPr>
+          <a:lstStyle/>
+          <a:p>
+            <a:pPr indent="0" lvl="0" marL="0" rtl="0" algn="ctr">
+              <a:spcBef>
+                <a:spcPts val="0"/>
+              </a:spcBef>
+              <a:spcAft>
+                <a:spcPts val="0"/>
+              </a:spcAft>
+              <a:buNone/>
+            </a:pPr>
+            <a:r>
+              <a:t/>
+            </a:r>
+            <a:endParaRPr/>
+          </a:p>
+        </p:txBody>
+      </p:sp>
+      <p:sp>
+        <p:nvSpPr>
+          <p:cNvPr id="182" name="Google Shape;182;p12"/>
+          <p:cNvSpPr/>
+          <p:nvPr/>
+        </p:nvSpPr>
+        <p:spPr>
+          <a:xfrm>
+            <a:off x="592667" y="2269067"/>
+            <a:ext cx="6603900" cy="914400"/>
+          </a:xfrm>
+          <a:prstGeom prst="roundRect">
+            <a:avLst>
+              <a:gd fmla="val 16667" name="adj"/>
+            </a:avLst>
+          </a:prstGeom>
+          <a:solidFill>
+            <a:srgbClr val="FFFFFF"/>
+          </a:solidFill>
+          <a:ln cap="flat" cmpd="sng" w="38950">
+            <a:solidFill>
+              <a:srgbClr val="1C1C1C"/>
+            </a:solidFill>
+            <a:prstDash val="solid"/>
+            <a:round/>
+            <a:headEnd len="sm" w="sm" type="none"/>
+            <a:tailEnd len="sm" w="sm" type="none"/>
+          </a:ln>
+        </p:spPr>
+        <p:txBody>
+          <a:bodyPr anchorCtr="0" anchor="ctr" bIns="91425" lIns="91425" spcFirstLastPara="1" rIns="91425" wrap="square" tIns="91425">
+            <a:noAutofit/>
+          </a:bodyPr>
+          <a:lstStyle/>
+          <a:p>
+            <a:pPr indent="0" lvl="0" marL="0" rtl="0" algn="ctr">
+              <a:spcBef>
+                <a:spcPts val="0"/>
+              </a:spcBef>
+              <a:spcAft>
+                <a:spcPts val="0"/>
+              </a:spcAft>
+              <a:buNone/>
+            </a:pPr>
+            <a:r>
+              <a:t/>
+            </a:r>
+            <a:endParaRPr/>
+          </a:p>
+        </p:txBody>
+      </p:sp>
+      <p:sp>
+        <p:nvSpPr>
+          <p:cNvPr id="183" name="Google Shape;183;p12"/>
+          <p:cNvSpPr/>
+          <p:nvPr/>
+        </p:nvSpPr>
+        <p:spPr>
+          <a:xfrm>
+            <a:off x="711200" y="2387600"/>
+            <a:ext cx="203100" cy="694200"/>
+          </a:xfrm>
+          <a:prstGeom prst="roundRect">
+            <a:avLst>
+              <a:gd fmla="val 16667" name="adj"/>
+            </a:avLst>
+          </a:prstGeom>
+          <a:solidFill>
+            <a:srgbClr val="38BDF8"/>
+          </a:solidFill>
+          <a:ln cap="flat" cmpd="sng" w="16925">
+            <a:solidFill>
+              <a:srgbClr val="1C1C1C"/>
+            </a:solidFill>
+            <a:prstDash val="solid"/>
+            <a:round/>
+            <a:headEnd len="sm" w="sm" type="none"/>
+            <a:tailEnd len="sm" w="sm" type="none"/>
+          </a:ln>
+        </p:spPr>
+        <p:txBody>
+          <a:bodyPr anchorCtr="0" anchor="ctr" bIns="91425" lIns="91425" spcFirstLastPara="1" rIns="91425" wrap="square" tIns="91425">
+            <a:noAutofit/>
+          </a:bodyPr>
+          <a:lstStyle/>
+          <a:p>
+            <a:pPr indent="0" lvl="0" marL="0" rtl="0" algn="ctr">
+              <a:spcBef>
+                <a:spcPts val="0"/>
+              </a:spcBef>
+              <a:spcAft>
+                <a:spcPts val="0"/>
+              </a:spcAft>
+              <a:buNone/>
+            </a:pPr>
+            <a:r>
+              <a:t/>
+            </a:r>
+            <a:endParaRPr/>
+          </a:p>
+        </p:txBody>
+      </p:sp>
+      <p:sp>
+        <p:nvSpPr>
+          <p:cNvPr id="184" name="Google Shape;184;p12"/>
+          <p:cNvSpPr/>
+          <p:nvPr/>
+        </p:nvSpPr>
+        <p:spPr>
+          <a:xfrm>
+            <a:off x="592667" y="3318933"/>
+            <a:ext cx="6603900" cy="914400"/>
+          </a:xfrm>
+          <a:prstGeom prst="roundRect">
+            <a:avLst>
+              <a:gd fmla="val 16667" name="adj"/>
+            </a:avLst>
+          </a:prstGeom>
+          <a:solidFill>
+            <a:srgbClr val="FFFFFF"/>
+          </a:solidFill>
+          <a:ln cap="flat" cmpd="sng" w="38950">
+            <a:solidFill>
+              <a:srgbClr val="1C1C1C"/>
+            </a:solidFill>
+            <a:prstDash val="solid"/>
+            <a:round/>
+            <a:headEnd len="sm" w="sm" type="none"/>
+            <a:tailEnd len="sm" w="sm" type="none"/>
+          </a:ln>
+        </p:spPr>
+        <p:txBody>
+          <a:bodyPr anchorCtr="0" anchor="ctr" bIns="91425" lIns="91425" spcFirstLastPara="1" rIns="91425" wrap="square" tIns="91425">
+            <a:noAutofit/>
+          </a:bodyPr>
+          <a:lstStyle/>
+          <a:p>
+            <a:pPr indent="0" lvl="0" marL="0" rtl="0" algn="ctr">
+              <a:spcBef>
+                <a:spcPts val="0"/>
+              </a:spcBef>
+              <a:spcAft>
+                <a:spcPts val="0"/>
+              </a:spcAft>
+              <a:buNone/>
+            </a:pPr>
+            <a:r>
+              <a:t/>
+            </a:r>
+            <a:endParaRPr/>
+          </a:p>
+        </p:txBody>
+      </p:sp>
+      <p:sp>
+        <p:nvSpPr>
+          <p:cNvPr id="185" name="Google Shape;185;p12"/>
+          <p:cNvSpPr/>
+          <p:nvPr/>
+        </p:nvSpPr>
+        <p:spPr>
+          <a:xfrm>
+            <a:off x="711200" y="3437467"/>
+            <a:ext cx="203100" cy="694200"/>
+          </a:xfrm>
+          <a:prstGeom prst="roundRect">
+            <a:avLst>
+              <a:gd fmla="val 16667" name="adj"/>
+            </a:avLst>
+          </a:prstGeom>
+          <a:solidFill>
+            <a:srgbClr val="4ADE80"/>
+          </a:solidFill>
+          <a:ln cap="flat" cmpd="sng" w="16925">
+            <a:solidFill>
+              <a:srgbClr val="1C1C1C"/>
+            </a:solidFill>
+            <a:prstDash val="solid"/>
+            <a:round/>
+            <a:headEnd len="sm" w="sm" type="none"/>
+            <a:tailEnd len="sm" w="sm" type="none"/>
+          </a:ln>
+        </p:spPr>
+        <p:txBody>
+          <a:bodyPr anchorCtr="0" anchor="ctr" bIns="91425" lIns="91425" spcFirstLastPara="1" rIns="91425" wrap="square" tIns="91425">
+            <a:noAutofit/>
+          </a:bodyPr>
+          <a:lstStyle/>
+          <a:p>
+            <a:pPr indent="0" lvl="0" marL="0" rtl="0" algn="ctr">
+              <a:spcBef>
+                <a:spcPts val="0"/>
+              </a:spcBef>
+              <a:spcAft>
+                <a:spcPts val="0"/>
+              </a:spcAft>
+              <a:buNone/>
+            </a:pPr>
+            <a:r>
+              <a:t/>
+            </a:r>
+            <a:endParaRPr/>
+          </a:p>
+        </p:txBody>
+      </p:sp>
+      <p:sp>
+        <p:nvSpPr>
+          <p:cNvPr id="186" name="Google Shape;186;p12"/>
+          <p:cNvSpPr/>
+          <p:nvPr/>
+        </p:nvSpPr>
+        <p:spPr>
+          <a:xfrm>
+            <a:off x="592667" y="4368800"/>
+            <a:ext cx="6603900" cy="914400"/>
+          </a:xfrm>
+          <a:prstGeom prst="roundRect">
+            <a:avLst>
+              <a:gd fmla="val 16667" name="adj"/>
+            </a:avLst>
+          </a:prstGeom>
+          <a:solidFill>
+            <a:srgbClr val="FFFFFF"/>
+          </a:solidFill>
+          <a:ln cap="flat" cmpd="sng" w="38950">
+            <a:solidFill>
+              <a:srgbClr val="1C1C1C"/>
+            </a:solidFill>
+            <a:prstDash val="solid"/>
+            <a:round/>
+            <a:headEnd len="sm" w="sm" type="none"/>
+            <a:tailEnd len="sm" w="sm" type="none"/>
+          </a:ln>
+        </p:spPr>
+        <p:txBody>
+          <a:bodyPr anchorCtr="0" anchor="ctr" bIns="91425" lIns="91425" spcFirstLastPara="1" rIns="91425" wrap="square" tIns="91425">
+            <a:noAutofit/>
+          </a:bodyPr>
+          <a:lstStyle/>
+          <a:p>
+            <a:pPr indent="0" lvl="0" marL="0" rtl="0" algn="ctr">
+              <a:spcBef>
+                <a:spcPts val="0"/>
+              </a:spcBef>
+              <a:spcAft>
+                <a:spcPts val="0"/>
+              </a:spcAft>
+              <a:buNone/>
+            </a:pPr>
+            <a:r>
+              <a:t/>
+            </a:r>
+            <a:endParaRPr/>
+          </a:p>
+        </p:txBody>
+      </p:sp>
+      <p:sp>
+        <p:nvSpPr>
+          <p:cNvPr id="187" name="Google Shape;187;p12"/>
+          <p:cNvSpPr/>
+          <p:nvPr/>
+        </p:nvSpPr>
+        <p:spPr>
+          <a:xfrm>
+            <a:off x="711200" y="4487333"/>
+            <a:ext cx="203100" cy="694200"/>
+          </a:xfrm>
+          <a:prstGeom prst="roundRect">
+            <a:avLst>
+              <a:gd fmla="val 16667" name="adj"/>
+            </a:avLst>
+          </a:prstGeom>
+          <a:solidFill>
+            <a:srgbClr val="C084FC"/>
+          </a:solidFill>
+          <a:ln cap="flat" cmpd="sng" w="16925">
+            <a:solidFill>
+              <a:srgbClr val="1C1C1C"/>
+            </a:solidFill>
+            <a:prstDash val="solid"/>
+            <a:round/>
+            <a:headEnd len="sm" w="sm" type="none"/>
+            <a:tailEnd len="sm" w="sm" type="none"/>
+          </a:ln>
+        </p:spPr>
+        <p:txBody>
+          <a:bodyPr anchorCtr="0" anchor="ctr" bIns="91425" lIns="91425" spcFirstLastPara="1" rIns="91425" wrap="square" tIns="91425">
+            <a:noAutofit/>
+          </a:bodyPr>
+          <a:lstStyle/>
+          <a:p>
+            <a:pPr indent="0" lvl="0" marL="0" rtl="0" algn="ctr">
+              <a:spcBef>
+                <a:spcPts val="0"/>
+              </a:spcBef>
+              <a:spcAft>
+                <a:spcPts val="0"/>
+              </a:spcAft>
+              <a:buNone/>
+            </a:pPr>
+            <a:r>
+              <a:t/>
+            </a:r>
+            <a:endParaRPr/>
+          </a:p>
+        </p:txBody>
+      </p:sp>
+      <p:sp>
+        <p:nvSpPr>
+          <p:cNvPr id="188" name="Google Shape;188;p12"/>
+          <p:cNvSpPr/>
+          <p:nvPr/>
+        </p:nvSpPr>
+        <p:spPr>
+          <a:xfrm>
+            <a:off x="592667" y="5418667"/>
+            <a:ext cx="6603900" cy="914400"/>
+          </a:xfrm>
+          <a:prstGeom prst="roundRect">
+            <a:avLst>
+              <a:gd fmla="val 16667" name="adj"/>
+            </a:avLst>
+          </a:prstGeom>
+          <a:solidFill>
+            <a:srgbClr val="FFFFFF"/>
+          </a:solidFill>
+          <a:ln cap="flat" cmpd="sng" w="38950">
+            <a:solidFill>
+              <a:srgbClr val="1C1C1C"/>
+            </a:solidFill>
+            <a:prstDash val="solid"/>
+            <a:round/>
+            <a:headEnd len="sm" w="sm" type="none"/>
+            <a:tailEnd len="sm" w="sm" type="none"/>
+          </a:ln>
+        </p:spPr>
+        <p:txBody>
+          <a:bodyPr anchorCtr="0" anchor="ctr" bIns="91425" lIns="91425" spcFirstLastPara="1" rIns="91425" wrap="square" tIns="91425">
+            <a:noAutofit/>
+          </a:bodyPr>
+          <a:lstStyle/>
+          <a:p>
+            <a:pPr indent="0" lvl="0" marL="0" rtl="0" algn="ctr">
+              <a:spcBef>
+                <a:spcPts val="0"/>
+              </a:spcBef>
+              <a:spcAft>
+                <a:spcPts val="0"/>
+              </a:spcAft>
+              <a:buNone/>
+            </a:pPr>
+            <a:r>
+              <a:t/>
+            </a:r>
+            <a:endParaRPr/>
+          </a:p>
+        </p:txBody>
+      </p:sp>
+      <p:sp>
+        <p:nvSpPr>
+          <p:cNvPr id="189" name="Google Shape;189;p12"/>
+          <p:cNvSpPr/>
+          <p:nvPr/>
+        </p:nvSpPr>
+        <p:spPr>
+          <a:xfrm>
+            <a:off x="711200" y="5537200"/>
+            <a:ext cx="203100" cy="694200"/>
+          </a:xfrm>
+          <a:prstGeom prst="roundRect">
+            <a:avLst>
+              <a:gd fmla="val 16667" name="adj"/>
+            </a:avLst>
+          </a:prstGeom>
+          <a:solidFill>
+            <a:srgbClr val="FB923C"/>
+          </a:solidFill>
+          <a:ln cap="flat" cmpd="sng" w="16925">
+            <a:solidFill>
+              <a:srgbClr val="1C1C1C"/>
+            </a:solidFill>
+            <a:prstDash val="solid"/>
+            <a:round/>
+            <a:headEnd len="sm" w="sm" type="none"/>
+            <a:tailEnd len="sm" w="sm" type="none"/>
+          </a:ln>
+        </p:spPr>
+        <p:txBody>
+          <a:bodyPr anchorCtr="0" anchor="ctr" bIns="91425" lIns="91425" spcFirstLastPara="1" rIns="91425" wrap="square" tIns="91425">
+            <a:noAutofit/>
+          </a:bodyPr>
+          <a:lstStyle/>
+          <a:p>
+            <a:pPr indent="0" lvl="0" marL="0" rtl="0" algn="ctr">
+              <a:spcBef>
+                <a:spcPts val="0"/>
+              </a:spcBef>
+              <a:spcAft>
+                <a:spcPts val="0"/>
+              </a:spcAft>
+              <a:buNone/>
+            </a:pPr>
+            <a:r>
+              <a:t/>
+            </a:r>
+            <a:endParaRPr/>
+          </a:p>
+        </p:txBody>
+      </p:sp>
+      <p:sp>
+        <p:nvSpPr>
+          <p:cNvPr id="190" name="Google Shape;190;p12"/>
+          <p:cNvSpPr/>
+          <p:nvPr/>
+        </p:nvSpPr>
+        <p:spPr>
+          <a:xfrm>
+            <a:off x="7620000" y="4826000"/>
+            <a:ext cx="3979200" cy="1608600"/>
+          </a:xfrm>
+          <a:prstGeom prst="roundRect">
+            <a:avLst>
+              <a:gd fmla="val 16667" name="adj"/>
+            </a:avLst>
+          </a:prstGeom>
+          <a:solidFill>
+            <a:srgbClr val="38BDF8"/>
+          </a:solidFill>
+          <a:ln cap="flat" cmpd="sng" w="38950">
+            <a:solidFill>
+              <a:srgbClr val="1C1C1C"/>
+            </a:solidFill>
+            <a:prstDash val="solid"/>
+            <a:round/>
+            <a:headEnd len="sm" w="sm" type="none"/>
+            <a:tailEnd len="sm" w="sm" type="none"/>
+          </a:ln>
+        </p:spPr>
+        <p:txBody>
+          <a:bodyPr anchorCtr="0" anchor="ctr" bIns="91425" lIns="91425" spcFirstLastPara="1" rIns="91425" wrap="square" tIns="91425">
+            <a:noAutofit/>
+          </a:bodyPr>
+          <a:lstStyle/>
+          <a:p>
+            <a:pPr indent="0" lvl="0" marL="0" rtl="0" algn="ctr">
+              <a:spcBef>
+                <a:spcPts val="0"/>
+              </a:spcBef>
+              <a:spcAft>
+                <a:spcPts val="0"/>
+              </a:spcAft>
+              <a:buNone/>
+            </a:pPr>
+            <a:r>
+              <a:t/>
+            </a:r>
+            <a:endParaRPr/>
+          </a:p>
+        </p:txBody>
+      </p:sp>
       <p:pic>
         <p:nvPicPr>
-          <p:cNvPr id="115" name="Google Shape;115;p12"/>
+          <p:cNvPr id="191" name="Google Shape;191;p12" title="2012 Jeep Wrangler photo"/>
           <p:cNvPicPr preferRelativeResize="0"/>
           <p:nvPr/>
         </p:nvPicPr>
-        <p:blipFill>
+        <p:blipFill rotWithShape="1">
           <a:blip r:embed="rId3">
             <a:alphaModFix/>
           </a:blip>
-          <a:stretch>
-            <a:fillRect/>
-          </a:stretch>
+          <a:srcRect b="0" l="0" r="0" t="0"/>
+          <a:stretch/>
         </p:blipFill>
         <p:spPr>
           <a:xfrm>
-            <a:off x="0" y="0"/>
-            <a:ext cx="12191998" cy="6857999"/>
+            <a:off x="7416800" y="1507067"/>
+            <a:ext cx="4301066" cy="2641599"/>
           </a:xfrm>
           <a:prstGeom prst="rect">
             <a:avLst/>
@@ -8904,7 +12712,56 @@
       </p:pic>
       <p:sp>
         <p:nvSpPr>
-          <p:cNvPr id="116" name="Google Shape;116;p12"/>
+          <p:cNvPr id="192" name="Google Shape;192;p12"/>
+          <p:cNvSpPr/>
+          <p:nvPr/>
+        </p:nvSpPr>
+        <p:spPr>
+          <a:xfrm>
+            <a:off x="7416800" y="1507067"/>
+            <a:ext cx="4301100" cy="2641500"/>
+          </a:xfrm>
+          <a:prstGeom prst="roundRect">
+            <a:avLst>
+              <a:gd fmla="val 16667" name="adj"/>
+            </a:avLst>
+          </a:prstGeom>
+          <a:noFill/>
+          <a:ln cap="flat" cmpd="sng" w="38950">
+            <a:solidFill>
+              <a:srgbClr val="1C1C1C"/>
+            </a:solidFill>
+            <a:prstDash val="solid"/>
+            <a:round/>
+            <a:headEnd len="sm" w="sm" type="none"/>
+            <a:tailEnd len="sm" w="sm" type="none"/>
+          </a:ln>
+        </p:spPr>
+        <p:txBody>
+          <a:bodyPr anchorCtr="0" anchor="ctr" bIns="91425" lIns="91425" spcFirstLastPara="1" rIns="91425" wrap="square" tIns="91425">
+            <a:noAutofit/>
+          </a:bodyPr>
+          <a:lstStyle/>
+          <a:p>
+            <a:pPr indent="0" lvl="0" marL="0" rtl="0" algn="ctr">
+              <a:spcBef>
+                <a:spcPts val="0"/>
+              </a:spcBef>
+              <a:spcAft>
+                <a:spcPts val="0"/>
+              </a:spcAft>
+              <a:buNone/>
+            </a:pPr>
+            <a:r>
+              <a:t/>
+            </a:r>
+            <a:endParaRPr/>
+          </a:p>
+        </p:txBody>
+      </p:sp>
+      <p:sp>
+        <p:nvSpPr>
+          <p:cNvPr id="193" name="Google Shape;193;p12"/>
           <p:cNvSpPr txBox="1"/>
           <p:nvPr/>
         </p:nvSpPr>
@@ -8957,7 +12814,7 @@
       </p:sp>
       <p:sp>
         <p:nvSpPr>
-          <p:cNvPr id="117" name="Google Shape;117;p12"/>
+          <p:cNvPr id="194" name="Google Shape;194;p12"/>
           <p:cNvSpPr txBox="1"/>
           <p:nvPr/>
         </p:nvSpPr>
@@ -9010,7 +12867,7 @@
       </p:sp>
       <p:sp>
         <p:nvSpPr>
-          <p:cNvPr id="118" name="Google Shape;118;p12"/>
+          <p:cNvPr id="195" name="Google Shape;195;p12"/>
           <p:cNvSpPr txBox="1"/>
           <p:nvPr/>
         </p:nvSpPr>
@@ -9063,7 +12920,7 @@
       </p:sp>
       <p:sp>
         <p:nvSpPr>
-          <p:cNvPr id="119" name="Google Shape;119;p12"/>
+          <p:cNvPr id="196" name="Google Shape;196;p12"/>
           <p:cNvSpPr txBox="1"/>
           <p:nvPr/>
         </p:nvSpPr>
@@ -9116,7 +12973,7 @@
       </p:sp>
       <p:sp>
         <p:nvSpPr>
-          <p:cNvPr id="120" name="Google Shape;120;p12"/>
+          <p:cNvPr id="197" name="Google Shape;197;p12"/>
           <p:cNvSpPr txBox="1"/>
           <p:nvPr/>
         </p:nvSpPr>
@@ -9169,7 +13026,7 @@
       </p:sp>
       <p:sp>
         <p:nvSpPr>
-          <p:cNvPr id="121" name="Google Shape;121;p12"/>
+          <p:cNvPr id="198" name="Google Shape;198;p12"/>
           <p:cNvSpPr txBox="1"/>
           <p:nvPr/>
         </p:nvSpPr>
@@ -9222,7 +13079,7 @@
       </p:sp>
       <p:sp>
         <p:nvSpPr>
-          <p:cNvPr id="122" name="Google Shape;122;p12"/>
+          <p:cNvPr id="199" name="Google Shape;199;p12"/>
           <p:cNvSpPr txBox="1"/>
           <p:nvPr/>
         </p:nvSpPr>
@@ -9275,7 +13132,7 @@
       </p:sp>
       <p:sp>
         <p:nvSpPr>
-          <p:cNvPr id="123" name="Google Shape;123;p12"/>
+          <p:cNvPr id="200" name="Google Shape;200;p12"/>
           <p:cNvSpPr txBox="1"/>
           <p:nvPr/>
         </p:nvSpPr>
@@ -9328,7 +13185,7 @@
       </p:sp>
       <p:sp>
         <p:nvSpPr>
-          <p:cNvPr id="124" name="Google Shape;124;p12"/>
+          <p:cNvPr id="201" name="Google Shape;201;p12"/>
           <p:cNvSpPr txBox="1"/>
           <p:nvPr/>
         </p:nvSpPr>
@@ -9381,7 +13238,7 @@
       </p:sp>
       <p:sp>
         <p:nvSpPr>
-          <p:cNvPr id="125" name="Google Shape;125;p12"/>
+          <p:cNvPr id="202" name="Google Shape;202;p12"/>
           <p:cNvSpPr txBox="1"/>
           <p:nvPr/>
         </p:nvSpPr>
@@ -9434,7 +13291,7 @@
       </p:sp>
       <p:sp>
         <p:nvSpPr>
-          <p:cNvPr id="126" name="Google Shape;126;p12"/>
+          <p:cNvPr id="203" name="Google Shape;203;p12"/>
           <p:cNvSpPr txBox="1"/>
           <p:nvPr/>
         </p:nvSpPr>
@@ -9487,7 +13344,7 @@
       </p:sp>
       <p:sp>
         <p:nvSpPr>
-          <p:cNvPr id="127" name="Google Shape;127;p12"/>
+          <p:cNvPr id="204" name="Google Shape;204;p12"/>
           <p:cNvSpPr txBox="1"/>
           <p:nvPr/>
         </p:nvSpPr>
@@ -9540,7 +13397,7 @@
       </p:sp>
       <p:sp>
         <p:nvSpPr>
-          <p:cNvPr id="128" name="Google Shape;128;p12"/>
+          <p:cNvPr id="205" name="Google Shape;205;p12"/>
           <p:cNvSpPr txBox="1"/>
           <p:nvPr/>
         </p:nvSpPr>
@@ -9593,7 +13450,7 @@
       </p:sp>
       <p:sp>
         <p:nvSpPr>
-          <p:cNvPr id="129" name="Google Shape;129;p12"/>
+          <p:cNvPr id="206" name="Google Shape;206;p12"/>
           <p:cNvSpPr txBox="1"/>
           <p:nvPr/>
         </p:nvSpPr>
@@ -9724,13 +13581,13 @@
     <p:bg>
       <p:bgPr>
         <a:solidFill>
-          <a:srgbClr val="FFF9EE"/>
+          <a:srgbClr val="FFFDF7"/>
         </a:solidFill>
       </p:bgPr>
     </p:bg>
     <p:spTree>
       <p:nvGrpSpPr>
-        <p:cNvPr id="134" name="Shape 134"/>
+        <p:cNvPr id="211" name="Shape 211"/>
         <p:cNvGrpSpPr/>
         <p:nvPr/>
       </p:nvGrpSpPr>
@@ -9742,24 +13599,1251 @@
           <a:chExt cx="0" cy="0"/>
         </a:xfrm>
       </p:grpSpPr>
+      <p:sp>
+        <p:nvSpPr>
+          <p:cNvPr id="212" name="Google Shape;212;p13"/>
+          <p:cNvSpPr/>
+          <p:nvPr/>
+        </p:nvSpPr>
+        <p:spPr>
+          <a:xfrm>
+            <a:off x="508000" y="304800"/>
+            <a:ext cx="7789200" cy="711300"/>
+          </a:xfrm>
+          <a:prstGeom prst="roundRect">
+            <a:avLst>
+              <a:gd fmla="val 16667" name="adj"/>
+            </a:avLst>
+          </a:prstGeom>
+          <a:solidFill>
+            <a:srgbClr val="B26206"/>
+          </a:solidFill>
+          <a:ln cap="flat" cmpd="sng" w="38950">
+            <a:solidFill>
+              <a:srgbClr val="1C1C1C"/>
+            </a:solidFill>
+            <a:prstDash val="solid"/>
+            <a:round/>
+            <a:headEnd len="sm" w="sm" type="none"/>
+            <a:tailEnd len="sm" w="sm" type="none"/>
+          </a:ln>
+        </p:spPr>
+        <p:txBody>
+          <a:bodyPr anchorCtr="0" anchor="ctr" bIns="91425" lIns="91425" spcFirstLastPara="1" rIns="91425" wrap="square" tIns="91425">
+            <a:noAutofit/>
+          </a:bodyPr>
+          <a:lstStyle/>
+          <a:p>
+            <a:pPr indent="0" lvl="0" marL="0" rtl="0" algn="ctr">
+              <a:spcBef>
+                <a:spcPts val="0"/>
+              </a:spcBef>
+              <a:spcAft>
+                <a:spcPts val="0"/>
+              </a:spcAft>
+              <a:buNone/>
+            </a:pPr>
+            <a:r>
+              <a:t/>
+            </a:r>
+            <a:endParaRPr/>
+          </a:p>
+        </p:txBody>
+      </p:sp>
+      <p:sp>
+        <p:nvSpPr>
+          <p:cNvPr id="213" name="Google Shape;213;p13"/>
+          <p:cNvSpPr/>
+          <p:nvPr/>
+        </p:nvSpPr>
+        <p:spPr>
+          <a:xfrm>
+            <a:off x="9652000" y="304800"/>
+            <a:ext cx="2031900" cy="575700"/>
+          </a:xfrm>
+          <a:prstGeom prst="roundRect">
+            <a:avLst>
+              <a:gd fmla="val 16667" name="adj"/>
+            </a:avLst>
+          </a:prstGeom>
+          <a:solidFill>
+            <a:srgbClr val="F472B6"/>
+          </a:solidFill>
+          <a:ln cap="flat" cmpd="sng" w="38950">
+            <a:solidFill>
+              <a:srgbClr val="1C1C1C"/>
+            </a:solidFill>
+            <a:prstDash val="solid"/>
+            <a:round/>
+            <a:headEnd len="sm" w="sm" type="none"/>
+            <a:tailEnd len="sm" w="sm" type="none"/>
+          </a:ln>
+        </p:spPr>
+        <p:txBody>
+          <a:bodyPr anchorCtr="0" anchor="ctr" bIns="91425" lIns="91425" spcFirstLastPara="1" rIns="91425" wrap="square" tIns="91425">
+            <a:noAutofit/>
+          </a:bodyPr>
+          <a:lstStyle/>
+          <a:p>
+            <a:pPr indent="0" lvl="0" marL="0" rtl="0" algn="ctr">
+              <a:spcBef>
+                <a:spcPts val="0"/>
+              </a:spcBef>
+              <a:spcAft>
+                <a:spcPts val="0"/>
+              </a:spcAft>
+              <a:buNone/>
+            </a:pPr>
+            <a:r>
+              <a:t/>
+            </a:r>
+            <a:endParaRPr/>
+          </a:p>
+        </p:txBody>
+      </p:sp>
+      <p:sp>
+        <p:nvSpPr>
+          <p:cNvPr id="214" name="Google Shape;214;p13"/>
+          <p:cNvSpPr/>
+          <p:nvPr/>
+        </p:nvSpPr>
+        <p:spPr>
+          <a:xfrm>
+            <a:off x="508000" y="1270000"/>
+            <a:ext cx="2031900" cy="701400"/>
+          </a:xfrm>
+          <a:prstGeom prst="rect">
+            <a:avLst/>
+          </a:prstGeom>
+          <a:solidFill>
+            <a:srgbClr val="FB923C"/>
+          </a:solidFill>
+          <a:ln cap="flat" cmpd="sng" w="38950">
+            <a:solidFill>
+              <a:srgbClr val="1C1C1C"/>
+            </a:solidFill>
+            <a:prstDash val="solid"/>
+            <a:round/>
+            <a:headEnd len="sm" w="sm" type="none"/>
+            <a:tailEnd len="sm" w="sm" type="none"/>
+          </a:ln>
+        </p:spPr>
+        <p:txBody>
+          <a:bodyPr anchorCtr="0" anchor="ctr" bIns="91425" lIns="91425" spcFirstLastPara="1" rIns="91425" wrap="square" tIns="91425">
+            <a:noAutofit/>
+          </a:bodyPr>
+          <a:lstStyle/>
+          <a:p>
+            <a:pPr indent="0" lvl="0" marL="0" rtl="0" algn="ctr">
+              <a:spcBef>
+                <a:spcPts val="0"/>
+              </a:spcBef>
+              <a:spcAft>
+                <a:spcPts val="0"/>
+              </a:spcAft>
+              <a:buNone/>
+            </a:pPr>
+            <a:r>
+              <a:t/>
+            </a:r>
+            <a:endParaRPr/>
+          </a:p>
+        </p:txBody>
+      </p:sp>
+      <p:sp>
+        <p:nvSpPr>
+          <p:cNvPr id="215" name="Google Shape;215;p13"/>
+          <p:cNvSpPr/>
+          <p:nvPr/>
+        </p:nvSpPr>
+        <p:spPr>
+          <a:xfrm>
+            <a:off x="2540000" y="1270000"/>
+            <a:ext cx="2793900" cy="701400"/>
+          </a:xfrm>
+          <a:prstGeom prst="rect">
+            <a:avLst/>
+          </a:prstGeom>
+          <a:solidFill>
+            <a:srgbClr val="FB923C"/>
+          </a:solidFill>
+          <a:ln cap="flat" cmpd="sng" w="38950">
+            <a:solidFill>
+              <a:srgbClr val="1C1C1C"/>
+            </a:solidFill>
+            <a:prstDash val="solid"/>
+            <a:round/>
+            <a:headEnd len="sm" w="sm" type="none"/>
+            <a:tailEnd len="sm" w="sm" type="none"/>
+          </a:ln>
+        </p:spPr>
+        <p:txBody>
+          <a:bodyPr anchorCtr="0" anchor="ctr" bIns="91425" lIns="91425" spcFirstLastPara="1" rIns="91425" wrap="square" tIns="91425">
+            <a:noAutofit/>
+          </a:bodyPr>
+          <a:lstStyle/>
+          <a:p>
+            <a:pPr indent="0" lvl="0" marL="0" rtl="0" algn="ctr">
+              <a:spcBef>
+                <a:spcPts val="0"/>
+              </a:spcBef>
+              <a:spcAft>
+                <a:spcPts val="0"/>
+              </a:spcAft>
+              <a:buNone/>
+            </a:pPr>
+            <a:r>
+              <a:t/>
+            </a:r>
+            <a:endParaRPr/>
+          </a:p>
+        </p:txBody>
+      </p:sp>
+      <p:sp>
+        <p:nvSpPr>
+          <p:cNvPr id="216" name="Google Shape;216;p13"/>
+          <p:cNvSpPr/>
+          <p:nvPr/>
+        </p:nvSpPr>
+        <p:spPr>
+          <a:xfrm>
+            <a:off x="5334000" y="1270000"/>
+            <a:ext cx="2793900" cy="701400"/>
+          </a:xfrm>
+          <a:prstGeom prst="rect">
+            <a:avLst/>
+          </a:prstGeom>
+          <a:solidFill>
+            <a:srgbClr val="FB923C"/>
+          </a:solidFill>
+          <a:ln cap="flat" cmpd="sng" w="38950">
+            <a:solidFill>
+              <a:srgbClr val="1C1C1C"/>
+            </a:solidFill>
+            <a:prstDash val="solid"/>
+            <a:round/>
+            <a:headEnd len="sm" w="sm" type="none"/>
+            <a:tailEnd len="sm" w="sm" type="none"/>
+          </a:ln>
+        </p:spPr>
+        <p:txBody>
+          <a:bodyPr anchorCtr="0" anchor="ctr" bIns="91425" lIns="91425" spcFirstLastPara="1" rIns="91425" wrap="square" tIns="91425">
+            <a:noAutofit/>
+          </a:bodyPr>
+          <a:lstStyle/>
+          <a:p>
+            <a:pPr indent="0" lvl="0" marL="0" rtl="0" algn="ctr">
+              <a:spcBef>
+                <a:spcPts val="0"/>
+              </a:spcBef>
+              <a:spcAft>
+                <a:spcPts val="0"/>
+              </a:spcAft>
+              <a:buNone/>
+            </a:pPr>
+            <a:r>
+              <a:t/>
+            </a:r>
+            <a:endParaRPr/>
+          </a:p>
+        </p:txBody>
+      </p:sp>
+      <p:sp>
+        <p:nvSpPr>
+          <p:cNvPr id="217" name="Google Shape;217;p13"/>
+          <p:cNvSpPr/>
+          <p:nvPr/>
+        </p:nvSpPr>
+        <p:spPr>
+          <a:xfrm>
+            <a:off x="508000" y="1971524"/>
+            <a:ext cx="2031900" cy="701400"/>
+          </a:xfrm>
+          <a:prstGeom prst="rect">
+            <a:avLst/>
+          </a:prstGeom>
+          <a:solidFill>
+            <a:srgbClr val="FFFFFF"/>
+          </a:solidFill>
+          <a:ln cap="flat" cmpd="sng" w="38950">
+            <a:solidFill>
+              <a:srgbClr val="1C1C1C"/>
+            </a:solidFill>
+            <a:prstDash val="solid"/>
+            <a:round/>
+            <a:headEnd len="sm" w="sm" type="none"/>
+            <a:tailEnd len="sm" w="sm" type="none"/>
+          </a:ln>
+        </p:spPr>
+        <p:txBody>
+          <a:bodyPr anchorCtr="0" anchor="ctr" bIns="91425" lIns="91425" spcFirstLastPara="1" rIns="91425" wrap="square" tIns="91425">
+            <a:noAutofit/>
+          </a:bodyPr>
+          <a:lstStyle/>
+          <a:p>
+            <a:pPr indent="0" lvl="0" marL="0" rtl="0" algn="ctr">
+              <a:spcBef>
+                <a:spcPts val="0"/>
+              </a:spcBef>
+              <a:spcAft>
+                <a:spcPts val="0"/>
+              </a:spcAft>
+              <a:buNone/>
+            </a:pPr>
+            <a:r>
+              <a:t/>
+            </a:r>
+            <a:endParaRPr/>
+          </a:p>
+        </p:txBody>
+      </p:sp>
+      <p:sp>
+        <p:nvSpPr>
+          <p:cNvPr id="218" name="Google Shape;218;p13"/>
+          <p:cNvSpPr/>
+          <p:nvPr/>
+        </p:nvSpPr>
+        <p:spPr>
+          <a:xfrm>
+            <a:off x="2540000" y="1971524"/>
+            <a:ext cx="2793900" cy="701400"/>
+          </a:xfrm>
+          <a:prstGeom prst="rect">
+            <a:avLst/>
+          </a:prstGeom>
+          <a:solidFill>
+            <a:srgbClr val="FFFFFF"/>
+          </a:solidFill>
+          <a:ln cap="flat" cmpd="sng" w="38950">
+            <a:solidFill>
+              <a:srgbClr val="1C1C1C"/>
+            </a:solidFill>
+            <a:prstDash val="solid"/>
+            <a:round/>
+            <a:headEnd len="sm" w="sm" type="none"/>
+            <a:tailEnd len="sm" w="sm" type="none"/>
+          </a:ln>
+        </p:spPr>
+        <p:txBody>
+          <a:bodyPr anchorCtr="0" anchor="ctr" bIns="91425" lIns="91425" spcFirstLastPara="1" rIns="91425" wrap="square" tIns="91425">
+            <a:noAutofit/>
+          </a:bodyPr>
+          <a:lstStyle/>
+          <a:p>
+            <a:pPr indent="0" lvl="0" marL="0" rtl="0" algn="ctr">
+              <a:spcBef>
+                <a:spcPts val="0"/>
+              </a:spcBef>
+              <a:spcAft>
+                <a:spcPts val="0"/>
+              </a:spcAft>
+              <a:buNone/>
+            </a:pPr>
+            <a:r>
+              <a:t/>
+            </a:r>
+            <a:endParaRPr/>
+          </a:p>
+        </p:txBody>
+      </p:sp>
+      <p:sp>
+        <p:nvSpPr>
+          <p:cNvPr id="219" name="Google Shape;219;p13"/>
+          <p:cNvSpPr/>
+          <p:nvPr/>
+        </p:nvSpPr>
+        <p:spPr>
+          <a:xfrm>
+            <a:off x="5334000" y="1971524"/>
+            <a:ext cx="2793900" cy="701400"/>
+          </a:xfrm>
+          <a:prstGeom prst="rect">
+            <a:avLst/>
+          </a:prstGeom>
+          <a:solidFill>
+            <a:srgbClr val="FFFFFF"/>
+          </a:solidFill>
+          <a:ln cap="flat" cmpd="sng" w="38950">
+            <a:solidFill>
+              <a:srgbClr val="1C1C1C"/>
+            </a:solidFill>
+            <a:prstDash val="solid"/>
+            <a:round/>
+            <a:headEnd len="sm" w="sm" type="none"/>
+            <a:tailEnd len="sm" w="sm" type="none"/>
+          </a:ln>
+        </p:spPr>
+        <p:txBody>
+          <a:bodyPr anchorCtr="0" anchor="ctr" bIns="91425" lIns="91425" spcFirstLastPara="1" rIns="91425" wrap="square" tIns="91425">
+            <a:noAutofit/>
+          </a:bodyPr>
+          <a:lstStyle/>
+          <a:p>
+            <a:pPr indent="0" lvl="0" marL="0" rtl="0" algn="ctr">
+              <a:spcBef>
+                <a:spcPts val="0"/>
+              </a:spcBef>
+              <a:spcAft>
+                <a:spcPts val="0"/>
+              </a:spcAft>
+              <a:buNone/>
+            </a:pPr>
+            <a:r>
+              <a:t/>
+            </a:r>
+            <a:endParaRPr/>
+          </a:p>
+        </p:txBody>
+      </p:sp>
+      <p:sp>
+        <p:nvSpPr>
+          <p:cNvPr id="220" name="Google Shape;220;p13"/>
+          <p:cNvSpPr/>
+          <p:nvPr/>
+        </p:nvSpPr>
+        <p:spPr>
+          <a:xfrm>
+            <a:off x="508000" y="2673048"/>
+            <a:ext cx="2031900" cy="701400"/>
+          </a:xfrm>
+          <a:prstGeom prst="rect">
+            <a:avLst/>
+          </a:prstGeom>
+          <a:solidFill>
+            <a:srgbClr val="FFFFFF"/>
+          </a:solidFill>
+          <a:ln cap="flat" cmpd="sng" w="38950">
+            <a:solidFill>
+              <a:srgbClr val="1C1C1C"/>
+            </a:solidFill>
+            <a:prstDash val="solid"/>
+            <a:round/>
+            <a:headEnd len="sm" w="sm" type="none"/>
+            <a:tailEnd len="sm" w="sm" type="none"/>
+          </a:ln>
+        </p:spPr>
+        <p:txBody>
+          <a:bodyPr anchorCtr="0" anchor="ctr" bIns="91425" lIns="91425" spcFirstLastPara="1" rIns="91425" wrap="square" tIns="91425">
+            <a:noAutofit/>
+          </a:bodyPr>
+          <a:lstStyle/>
+          <a:p>
+            <a:pPr indent="0" lvl="0" marL="0" rtl="0" algn="ctr">
+              <a:spcBef>
+                <a:spcPts val="0"/>
+              </a:spcBef>
+              <a:spcAft>
+                <a:spcPts val="0"/>
+              </a:spcAft>
+              <a:buNone/>
+            </a:pPr>
+            <a:r>
+              <a:t/>
+            </a:r>
+            <a:endParaRPr/>
+          </a:p>
+        </p:txBody>
+      </p:sp>
+      <p:sp>
+        <p:nvSpPr>
+          <p:cNvPr id="221" name="Google Shape;221;p13"/>
+          <p:cNvSpPr/>
+          <p:nvPr/>
+        </p:nvSpPr>
+        <p:spPr>
+          <a:xfrm>
+            <a:off x="2540000" y="2673048"/>
+            <a:ext cx="2793900" cy="701400"/>
+          </a:xfrm>
+          <a:prstGeom prst="rect">
+            <a:avLst/>
+          </a:prstGeom>
+          <a:solidFill>
+            <a:srgbClr val="FFFFFF"/>
+          </a:solidFill>
+          <a:ln cap="flat" cmpd="sng" w="38950">
+            <a:solidFill>
+              <a:srgbClr val="1C1C1C"/>
+            </a:solidFill>
+            <a:prstDash val="solid"/>
+            <a:round/>
+            <a:headEnd len="sm" w="sm" type="none"/>
+            <a:tailEnd len="sm" w="sm" type="none"/>
+          </a:ln>
+        </p:spPr>
+        <p:txBody>
+          <a:bodyPr anchorCtr="0" anchor="ctr" bIns="91425" lIns="91425" spcFirstLastPara="1" rIns="91425" wrap="square" tIns="91425">
+            <a:noAutofit/>
+          </a:bodyPr>
+          <a:lstStyle/>
+          <a:p>
+            <a:pPr indent="0" lvl="0" marL="0" rtl="0" algn="ctr">
+              <a:spcBef>
+                <a:spcPts val="0"/>
+              </a:spcBef>
+              <a:spcAft>
+                <a:spcPts val="0"/>
+              </a:spcAft>
+              <a:buNone/>
+            </a:pPr>
+            <a:r>
+              <a:t/>
+            </a:r>
+            <a:endParaRPr/>
+          </a:p>
+        </p:txBody>
+      </p:sp>
+      <p:sp>
+        <p:nvSpPr>
+          <p:cNvPr id="222" name="Google Shape;222;p13"/>
+          <p:cNvSpPr/>
+          <p:nvPr/>
+        </p:nvSpPr>
+        <p:spPr>
+          <a:xfrm>
+            <a:off x="5334000" y="2673048"/>
+            <a:ext cx="2793900" cy="701400"/>
+          </a:xfrm>
+          <a:prstGeom prst="rect">
+            <a:avLst/>
+          </a:prstGeom>
+          <a:solidFill>
+            <a:srgbClr val="FFFFFF"/>
+          </a:solidFill>
+          <a:ln cap="flat" cmpd="sng" w="38950">
+            <a:solidFill>
+              <a:srgbClr val="1C1C1C"/>
+            </a:solidFill>
+            <a:prstDash val="solid"/>
+            <a:round/>
+            <a:headEnd len="sm" w="sm" type="none"/>
+            <a:tailEnd len="sm" w="sm" type="none"/>
+          </a:ln>
+        </p:spPr>
+        <p:txBody>
+          <a:bodyPr anchorCtr="0" anchor="ctr" bIns="91425" lIns="91425" spcFirstLastPara="1" rIns="91425" wrap="square" tIns="91425">
+            <a:noAutofit/>
+          </a:bodyPr>
+          <a:lstStyle/>
+          <a:p>
+            <a:pPr indent="0" lvl="0" marL="0" rtl="0" algn="ctr">
+              <a:spcBef>
+                <a:spcPts val="0"/>
+              </a:spcBef>
+              <a:spcAft>
+                <a:spcPts val="0"/>
+              </a:spcAft>
+              <a:buNone/>
+            </a:pPr>
+            <a:r>
+              <a:t/>
+            </a:r>
+            <a:endParaRPr/>
+          </a:p>
+        </p:txBody>
+      </p:sp>
+      <p:sp>
+        <p:nvSpPr>
+          <p:cNvPr id="223" name="Google Shape;223;p13"/>
+          <p:cNvSpPr/>
+          <p:nvPr/>
+        </p:nvSpPr>
+        <p:spPr>
+          <a:xfrm>
+            <a:off x="508000" y="3374571"/>
+            <a:ext cx="2031900" cy="701400"/>
+          </a:xfrm>
+          <a:prstGeom prst="rect">
+            <a:avLst/>
+          </a:prstGeom>
+          <a:solidFill>
+            <a:srgbClr val="FFFFFF"/>
+          </a:solidFill>
+          <a:ln cap="flat" cmpd="sng" w="38950">
+            <a:solidFill>
+              <a:srgbClr val="1C1C1C"/>
+            </a:solidFill>
+            <a:prstDash val="solid"/>
+            <a:round/>
+            <a:headEnd len="sm" w="sm" type="none"/>
+            <a:tailEnd len="sm" w="sm" type="none"/>
+          </a:ln>
+        </p:spPr>
+        <p:txBody>
+          <a:bodyPr anchorCtr="0" anchor="ctr" bIns="91425" lIns="91425" spcFirstLastPara="1" rIns="91425" wrap="square" tIns="91425">
+            <a:noAutofit/>
+          </a:bodyPr>
+          <a:lstStyle/>
+          <a:p>
+            <a:pPr indent="0" lvl="0" marL="0" rtl="0" algn="ctr">
+              <a:spcBef>
+                <a:spcPts val="0"/>
+              </a:spcBef>
+              <a:spcAft>
+                <a:spcPts val="0"/>
+              </a:spcAft>
+              <a:buNone/>
+            </a:pPr>
+            <a:r>
+              <a:t/>
+            </a:r>
+            <a:endParaRPr/>
+          </a:p>
+        </p:txBody>
+      </p:sp>
+      <p:sp>
+        <p:nvSpPr>
+          <p:cNvPr id="224" name="Google Shape;224;p13"/>
+          <p:cNvSpPr/>
+          <p:nvPr/>
+        </p:nvSpPr>
+        <p:spPr>
+          <a:xfrm>
+            <a:off x="2540000" y="3374571"/>
+            <a:ext cx="2793900" cy="701400"/>
+          </a:xfrm>
+          <a:prstGeom prst="rect">
+            <a:avLst/>
+          </a:prstGeom>
+          <a:solidFill>
+            <a:srgbClr val="FFFFFF"/>
+          </a:solidFill>
+          <a:ln cap="flat" cmpd="sng" w="38950">
+            <a:solidFill>
+              <a:srgbClr val="1C1C1C"/>
+            </a:solidFill>
+            <a:prstDash val="solid"/>
+            <a:round/>
+            <a:headEnd len="sm" w="sm" type="none"/>
+            <a:tailEnd len="sm" w="sm" type="none"/>
+          </a:ln>
+        </p:spPr>
+        <p:txBody>
+          <a:bodyPr anchorCtr="0" anchor="ctr" bIns="91425" lIns="91425" spcFirstLastPara="1" rIns="91425" wrap="square" tIns="91425">
+            <a:noAutofit/>
+          </a:bodyPr>
+          <a:lstStyle/>
+          <a:p>
+            <a:pPr indent="0" lvl="0" marL="0" rtl="0" algn="ctr">
+              <a:spcBef>
+                <a:spcPts val="0"/>
+              </a:spcBef>
+              <a:spcAft>
+                <a:spcPts val="0"/>
+              </a:spcAft>
+              <a:buNone/>
+            </a:pPr>
+            <a:r>
+              <a:t/>
+            </a:r>
+            <a:endParaRPr/>
+          </a:p>
+        </p:txBody>
+      </p:sp>
+      <p:sp>
+        <p:nvSpPr>
+          <p:cNvPr id="225" name="Google Shape;225;p13"/>
+          <p:cNvSpPr/>
+          <p:nvPr/>
+        </p:nvSpPr>
+        <p:spPr>
+          <a:xfrm>
+            <a:off x="5334000" y="3374571"/>
+            <a:ext cx="2793900" cy="701400"/>
+          </a:xfrm>
+          <a:prstGeom prst="rect">
+            <a:avLst/>
+          </a:prstGeom>
+          <a:solidFill>
+            <a:srgbClr val="FFFFFF"/>
+          </a:solidFill>
+          <a:ln cap="flat" cmpd="sng" w="38950">
+            <a:solidFill>
+              <a:srgbClr val="1C1C1C"/>
+            </a:solidFill>
+            <a:prstDash val="solid"/>
+            <a:round/>
+            <a:headEnd len="sm" w="sm" type="none"/>
+            <a:tailEnd len="sm" w="sm" type="none"/>
+          </a:ln>
+        </p:spPr>
+        <p:txBody>
+          <a:bodyPr anchorCtr="0" anchor="ctr" bIns="91425" lIns="91425" spcFirstLastPara="1" rIns="91425" wrap="square" tIns="91425">
+            <a:noAutofit/>
+          </a:bodyPr>
+          <a:lstStyle/>
+          <a:p>
+            <a:pPr indent="0" lvl="0" marL="0" rtl="0" algn="ctr">
+              <a:spcBef>
+                <a:spcPts val="0"/>
+              </a:spcBef>
+              <a:spcAft>
+                <a:spcPts val="0"/>
+              </a:spcAft>
+              <a:buNone/>
+            </a:pPr>
+            <a:r>
+              <a:t/>
+            </a:r>
+            <a:endParaRPr/>
+          </a:p>
+        </p:txBody>
+      </p:sp>
+      <p:sp>
+        <p:nvSpPr>
+          <p:cNvPr id="226" name="Google Shape;226;p13"/>
+          <p:cNvSpPr/>
+          <p:nvPr/>
+        </p:nvSpPr>
+        <p:spPr>
+          <a:xfrm>
+            <a:off x="508000" y="4076095"/>
+            <a:ext cx="2031900" cy="701400"/>
+          </a:xfrm>
+          <a:prstGeom prst="rect">
+            <a:avLst/>
+          </a:prstGeom>
+          <a:solidFill>
+            <a:srgbClr val="FFFFFF"/>
+          </a:solidFill>
+          <a:ln cap="flat" cmpd="sng" w="38950">
+            <a:solidFill>
+              <a:srgbClr val="1C1C1C"/>
+            </a:solidFill>
+            <a:prstDash val="solid"/>
+            <a:round/>
+            <a:headEnd len="sm" w="sm" type="none"/>
+            <a:tailEnd len="sm" w="sm" type="none"/>
+          </a:ln>
+        </p:spPr>
+        <p:txBody>
+          <a:bodyPr anchorCtr="0" anchor="ctr" bIns="91425" lIns="91425" spcFirstLastPara="1" rIns="91425" wrap="square" tIns="91425">
+            <a:noAutofit/>
+          </a:bodyPr>
+          <a:lstStyle/>
+          <a:p>
+            <a:pPr indent="0" lvl="0" marL="0" rtl="0" algn="ctr">
+              <a:spcBef>
+                <a:spcPts val="0"/>
+              </a:spcBef>
+              <a:spcAft>
+                <a:spcPts val="0"/>
+              </a:spcAft>
+              <a:buNone/>
+            </a:pPr>
+            <a:r>
+              <a:t/>
+            </a:r>
+            <a:endParaRPr/>
+          </a:p>
+        </p:txBody>
+      </p:sp>
+      <p:sp>
+        <p:nvSpPr>
+          <p:cNvPr id="227" name="Google Shape;227;p13"/>
+          <p:cNvSpPr/>
+          <p:nvPr/>
+        </p:nvSpPr>
+        <p:spPr>
+          <a:xfrm>
+            <a:off x="2540000" y="4076095"/>
+            <a:ext cx="2793900" cy="701400"/>
+          </a:xfrm>
+          <a:prstGeom prst="rect">
+            <a:avLst/>
+          </a:prstGeom>
+          <a:solidFill>
+            <a:srgbClr val="FFFFFF"/>
+          </a:solidFill>
+          <a:ln cap="flat" cmpd="sng" w="38950">
+            <a:solidFill>
+              <a:srgbClr val="1C1C1C"/>
+            </a:solidFill>
+            <a:prstDash val="solid"/>
+            <a:round/>
+            <a:headEnd len="sm" w="sm" type="none"/>
+            <a:tailEnd len="sm" w="sm" type="none"/>
+          </a:ln>
+        </p:spPr>
+        <p:txBody>
+          <a:bodyPr anchorCtr="0" anchor="ctr" bIns="91425" lIns="91425" spcFirstLastPara="1" rIns="91425" wrap="square" tIns="91425">
+            <a:noAutofit/>
+          </a:bodyPr>
+          <a:lstStyle/>
+          <a:p>
+            <a:pPr indent="0" lvl="0" marL="0" rtl="0" algn="ctr">
+              <a:spcBef>
+                <a:spcPts val="0"/>
+              </a:spcBef>
+              <a:spcAft>
+                <a:spcPts val="0"/>
+              </a:spcAft>
+              <a:buNone/>
+            </a:pPr>
+            <a:r>
+              <a:t/>
+            </a:r>
+            <a:endParaRPr/>
+          </a:p>
+        </p:txBody>
+      </p:sp>
+      <p:sp>
+        <p:nvSpPr>
+          <p:cNvPr id="228" name="Google Shape;228;p13"/>
+          <p:cNvSpPr/>
+          <p:nvPr/>
+        </p:nvSpPr>
+        <p:spPr>
+          <a:xfrm>
+            <a:off x="5334000" y="4076095"/>
+            <a:ext cx="2793900" cy="701400"/>
+          </a:xfrm>
+          <a:prstGeom prst="rect">
+            <a:avLst/>
+          </a:prstGeom>
+          <a:solidFill>
+            <a:srgbClr val="FFFFFF"/>
+          </a:solidFill>
+          <a:ln cap="flat" cmpd="sng" w="38950">
+            <a:solidFill>
+              <a:srgbClr val="1C1C1C"/>
+            </a:solidFill>
+            <a:prstDash val="solid"/>
+            <a:round/>
+            <a:headEnd len="sm" w="sm" type="none"/>
+            <a:tailEnd len="sm" w="sm" type="none"/>
+          </a:ln>
+        </p:spPr>
+        <p:txBody>
+          <a:bodyPr anchorCtr="0" anchor="ctr" bIns="91425" lIns="91425" spcFirstLastPara="1" rIns="91425" wrap="square" tIns="91425">
+            <a:noAutofit/>
+          </a:bodyPr>
+          <a:lstStyle/>
+          <a:p>
+            <a:pPr indent="0" lvl="0" marL="0" rtl="0" algn="ctr">
+              <a:spcBef>
+                <a:spcPts val="0"/>
+              </a:spcBef>
+              <a:spcAft>
+                <a:spcPts val="0"/>
+              </a:spcAft>
+              <a:buNone/>
+            </a:pPr>
+            <a:r>
+              <a:t/>
+            </a:r>
+            <a:endParaRPr/>
+          </a:p>
+        </p:txBody>
+      </p:sp>
+      <p:sp>
+        <p:nvSpPr>
+          <p:cNvPr id="229" name="Google Shape;229;p13"/>
+          <p:cNvSpPr/>
+          <p:nvPr/>
+        </p:nvSpPr>
+        <p:spPr>
+          <a:xfrm>
+            <a:off x="508000" y="4777619"/>
+            <a:ext cx="2031900" cy="701400"/>
+          </a:xfrm>
+          <a:prstGeom prst="rect">
+            <a:avLst/>
+          </a:prstGeom>
+          <a:solidFill>
+            <a:srgbClr val="FFFFFF"/>
+          </a:solidFill>
+          <a:ln cap="flat" cmpd="sng" w="38950">
+            <a:solidFill>
+              <a:srgbClr val="1C1C1C"/>
+            </a:solidFill>
+            <a:prstDash val="solid"/>
+            <a:round/>
+            <a:headEnd len="sm" w="sm" type="none"/>
+            <a:tailEnd len="sm" w="sm" type="none"/>
+          </a:ln>
+        </p:spPr>
+        <p:txBody>
+          <a:bodyPr anchorCtr="0" anchor="ctr" bIns="91425" lIns="91425" spcFirstLastPara="1" rIns="91425" wrap="square" tIns="91425">
+            <a:noAutofit/>
+          </a:bodyPr>
+          <a:lstStyle/>
+          <a:p>
+            <a:pPr indent="0" lvl="0" marL="0" rtl="0" algn="ctr">
+              <a:spcBef>
+                <a:spcPts val="0"/>
+              </a:spcBef>
+              <a:spcAft>
+                <a:spcPts val="0"/>
+              </a:spcAft>
+              <a:buNone/>
+            </a:pPr>
+            <a:r>
+              <a:t/>
+            </a:r>
+            <a:endParaRPr/>
+          </a:p>
+        </p:txBody>
+      </p:sp>
+      <p:sp>
+        <p:nvSpPr>
+          <p:cNvPr id="230" name="Google Shape;230;p13"/>
+          <p:cNvSpPr/>
+          <p:nvPr/>
+        </p:nvSpPr>
+        <p:spPr>
+          <a:xfrm>
+            <a:off x="2540000" y="4777619"/>
+            <a:ext cx="2793900" cy="701400"/>
+          </a:xfrm>
+          <a:prstGeom prst="rect">
+            <a:avLst/>
+          </a:prstGeom>
+          <a:solidFill>
+            <a:srgbClr val="FFFFFF"/>
+          </a:solidFill>
+          <a:ln cap="flat" cmpd="sng" w="38950">
+            <a:solidFill>
+              <a:srgbClr val="1C1C1C"/>
+            </a:solidFill>
+            <a:prstDash val="solid"/>
+            <a:round/>
+            <a:headEnd len="sm" w="sm" type="none"/>
+            <a:tailEnd len="sm" w="sm" type="none"/>
+          </a:ln>
+        </p:spPr>
+        <p:txBody>
+          <a:bodyPr anchorCtr="0" anchor="ctr" bIns="91425" lIns="91425" spcFirstLastPara="1" rIns="91425" wrap="square" tIns="91425">
+            <a:noAutofit/>
+          </a:bodyPr>
+          <a:lstStyle/>
+          <a:p>
+            <a:pPr indent="0" lvl="0" marL="0" rtl="0" algn="ctr">
+              <a:spcBef>
+                <a:spcPts val="0"/>
+              </a:spcBef>
+              <a:spcAft>
+                <a:spcPts val="0"/>
+              </a:spcAft>
+              <a:buNone/>
+            </a:pPr>
+            <a:r>
+              <a:t/>
+            </a:r>
+            <a:endParaRPr/>
+          </a:p>
+        </p:txBody>
+      </p:sp>
+      <p:sp>
+        <p:nvSpPr>
+          <p:cNvPr id="231" name="Google Shape;231;p13"/>
+          <p:cNvSpPr/>
+          <p:nvPr/>
+        </p:nvSpPr>
+        <p:spPr>
+          <a:xfrm>
+            <a:off x="5334000" y="4777619"/>
+            <a:ext cx="2793900" cy="701400"/>
+          </a:xfrm>
+          <a:prstGeom prst="rect">
+            <a:avLst/>
+          </a:prstGeom>
+          <a:solidFill>
+            <a:srgbClr val="FFFFFF"/>
+          </a:solidFill>
+          <a:ln cap="flat" cmpd="sng" w="38950">
+            <a:solidFill>
+              <a:srgbClr val="1C1C1C"/>
+            </a:solidFill>
+            <a:prstDash val="solid"/>
+            <a:round/>
+            <a:headEnd len="sm" w="sm" type="none"/>
+            <a:tailEnd len="sm" w="sm" type="none"/>
+          </a:ln>
+        </p:spPr>
+        <p:txBody>
+          <a:bodyPr anchorCtr="0" anchor="ctr" bIns="91425" lIns="91425" spcFirstLastPara="1" rIns="91425" wrap="square" tIns="91425">
+            <a:noAutofit/>
+          </a:bodyPr>
+          <a:lstStyle/>
+          <a:p>
+            <a:pPr indent="0" lvl="0" marL="0" rtl="0" algn="ctr">
+              <a:spcBef>
+                <a:spcPts val="0"/>
+              </a:spcBef>
+              <a:spcAft>
+                <a:spcPts val="0"/>
+              </a:spcAft>
+              <a:buNone/>
+            </a:pPr>
+            <a:r>
+              <a:t/>
+            </a:r>
+            <a:endParaRPr/>
+          </a:p>
+        </p:txBody>
+      </p:sp>
+      <p:sp>
+        <p:nvSpPr>
+          <p:cNvPr id="232" name="Google Shape;232;p13"/>
+          <p:cNvSpPr/>
+          <p:nvPr/>
+        </p:nvSpPr>
+        <p:spPr>
+          <a:xfrm>
+            <a:off x="508000" y="5479143"/>
+            <a:ext cx="2031900" cy="701400"/>
+          </a:xfrm>
+          <a:prstGeom prst="rect">
+            <a:avLst/>
+          </a:prstGeom>
+          <a:solidFill>
+            <a:srgbClr val="4ADE80"/>
+          </a:solidFill>
+          <a:ln cap="flat" cmpd="sng" w="38950">
+            <a:solidFill>
+              <a:srgbClr val="1C1C1C"/>
+            </a:solidFill>
+            <a:prstDash val="solid"/>
+            <a:round/>
+            <a:headEnd len="sm" w="sm" type="none"/>
+            <a:tailEnd len="sm" w="sm" type="none"/>
+          </a:ln>
+        </p:spPr>
+        <p:txBody>
+          <a:bodyPr anchorCtr="0" anchor="ctr" bIns="91425" lIns="91425" spcFirstLastPara="1" rIns="91425" wrap="square" tIns="91425">
+            <a:noAutofit/>
+          </a:bodyPr>
+          <a:lstStyle/>
+          <a:p>
+            <a:pPr indent="0" lvl="0" marL="0" rtl="0" algn="ctr">
+              <a:spcBef>
+                <a:spcPts val="0"/>
+              </a:spcBef>
+              <a:spcAft>
+                <a:spcPts val="0"/>
+              </a:spcAft>
+              <a:buNone/>
+            </a:pPr>
+            <a:r>
+              <a:t/>
+            </a:r>
+            <a:endParaRPr/>
+          </a:p>
+        </p:txBody>
+      </p:sp>
+      <p:sp>
+        <p:nvSpPr>
+          <p:cNvPr id="233" name="Google Shape;233;p13"/>
+          <p:cNvSpPr/>
+          <p:nvPr/>
+        </p:nvSpPr>
+        <p:spPr>
+          <a:xfrm>
+            <a:off x="2540000" y="5479143"/>
+            <a:ext cx="2793900" cy="701400"/>
+          </a:xfrm>
+          <a:prstGeom prst="rect">
+            <a:avLst/>
+          </a:prstGeom>
+          <a:solidFill>
+            <a:srgbClr val="4ADE80"/>
+          </a:solidFill>
+          <a:ln cap="flat" cmpd="sng" w="38950">
+            <a:solidFill>
+              <a:srgbClr val="1C1C1C"/>
+            </a:solidFill>
+            <a:prstDash val="solid"/>
+            <a:round/>
+            <a:headEnd len="sm" w="sm" type="none"/>
+            <a:tailEnd len="sm" w="sm" type="none"/>
+          </a:ln>
+        </p:spPr>
+        <p:txBody>
+          <a:bodyPr anchorCtr="0" anchor="ctr" bIns="91425" lIns="91425" spcFirstLastPara="1" rIns="91425" wrap="square" tIns="91425">
+            <a:noAutofit/>
+          </a:bodyPr>
+          <a:lstStyle/>
+          <a:p>
+            <a:pPr indent="0" lvl="0" marL="0" rtl="0" algn="ctr">
+              <a:spcBef>
+                <a:spcPts val="0"/>
+              </a:spcBef>
+              <a:spcAft>
+                <a:spcPts val="0"/>
+              </a:spcAft>
+              <a:buNone/>
+            </a:pPr>
+            <a:r>
+              <a:t/>
+            </a:r>
+            <a:endParaRPr/>
+          </a:p>
+        </p:txBody>
+      </p:sp>
+      <p:sp>
+        <p:nvSpPr>
+          <p:cNvPr id="234" name="Google Shape;234;p13"/>
+          <p:cNvSpPr/>
+          <p:nvPr/>
+        </p:nvSpPr>
+        <p:spPr>
+          <a:xfrm>
+            <a:off x="5334000" y="5479143"/>
+            <a:ext cx="2793900" cy="701400"/>
+          </a:xfrm>
+          <a:prstGeom prst="rect">
+            <a:avLst/>
+          </a:prstGeom>
+          <a:solidFill>
+            <a:srgbClr val="4ADE80"/>
+          </a:solidFill>
+          <a:ln cap="flat" cmpd="sng" w="38950">
+            <a:solidFill>
+              <a:srgbClr val="1C1C1C"/>
+            </a:solidFill>
+            <a:prstDash val="solid"/>
+            <a:round/>
+            <a:headEnd len="sm" w="sm" type="none"/>
+            <a:tailEnd len="sm" w="sm" type="none"/>
+          </a:ln>
+        </p:spPr>
+        <p:txBody>
+          <a:bodyPr anchorCtr="0" anchor="ctr" bIns="91425" lIns="91425" spcFirstLastPara="1" rIns="91425" wrap="square" tIns="91425">
+            <a:noAutofit/>
+          </a:bodyPr>
+          <a:lstStyle/>
+          <a:p>
+            <a:pPr indent="0" lvl="0" marL="0" rtl="0" algn="ctr">
+              <a:spcBef>
+                <a:spcPts val="0"/>
+              </a:spcBef>
+              <a:spcAft>
+                <a:spcPts val="0"/>
+              </a:spcAft>
+              <a:buNone/>
+            </a:pPr>
+            <a:r>
+              <a:t/>
+            </a:r>
+            <a:endParaRPr/>
+          </a:p>
+        </p:txBody>
+      </p:sp>
+      <p:sp>
+        <p:nvSpPr>
+          <p:cNvPr id="235" name="Google Shape;235;p13"/>
+          <p:cNvSpPr/>
+          <p:nvPr/>
+        </p:nvSpPr>
+        <p:spPr>
+          <a:xfrm>
+            <a:off x="9042400" y="4741333"/>
+            <a:ext cx="2286000" cy="1693200"/>
+          </a:xfrm>
+          <a:prstGeom prst="roundRect">
+            <a:avLst>
+              <a:gd fmla="val 16667" name="adj"/>
+            </a:avLst>
+          </a:prstGeom>
+          <a:solidFill>
+            <a:srgbClr val="38BDF8"/>
+          </a:solidFill>
+          <a:ln cap="flat" cmpd="sng" w="38950">
+            <a:solidFill>
+              <a:srgbClr val="1C1C1C"/>
+            </a:solidFill>
+            <a:prstDash val="solid"/>
+            <a:round/>
+            <a:headEnd len="sm" w="sm" type="none"/>
+            <a:tailEnd len="sm" w="sm" type="none"/>
+          </a:ln>
+        </p:spPr>
+        <p:txBody>
+          <a:bodyPr anchorCtr="0" anchor="ctr" bIns="91425" lIns="91425" spcFirstLastPara="1" rIns="91425" wrap="square" tIns="91425">
+            <a:noAutofit/>
+          </a:bodyPr>
+          <a:lstStyle/>
+          <a:p>
+            <a:pPr indent="0" lvl="0" marL="0" rtl="0" algn="ctr">
+              <a:spcBef>
+                <a:spcPts val="0"/>
+              </a:spcBef>
+              <a:spcAft>
+                <a:spcPts val="0"/>
+              </a:spcAft>
+              <a:buNone/>
+            </a:pPr>
+            <a:r>
+              <a:t/>
+            </a:r>
+            <a:endParaRPr/>
+          </a:p>
+        </p:txBody>
+      </p:sp>
+      <p:sp>
+        <p:nvSpPr>
+          <p:cNvPr id="236" name="Google Shape;236;p13"/>
+          <p:cNvSpPr/>
+          <p:nvPr/>
+        </p:nvSpPr>
+        <p:spPr>
+          <a:xfrm>
+            <a:off x="8229600" y="5554133"/>
+            <a:ext cx="643500" cy="372600"/>
+          </a:xfrm>
+          <a:prstGeom prst="rightArrow">
+            <a:avLst>
+              <a:gd fmla="val 50000" name="adj1"/>
+              <a:gd fmla="val 50000" name="adj2"/>
+            </a:avLst>
+          </a:prstGeom>
+          <a:solidFill>
+            <a:srgbClr val="666666"/>
+          </a:solidFill>
+          <a:ln>
+            <a:noFill/>
+          </a:ln>
+        </p:spPr>
+        <p:txBody>
+          <a:bodyPr anchorCtr="0" anchor="ctr" bIns="91425" lIns="91425" spcFirstLastPara="1" rIns="91425" wrap="square" tIns="91425">
+            <a:noAutofit/>
+          </a:bodyPr>
+          <a:lstStyle/>
+          <a:p>
+            <a:pPr indent="0" lvl="0" marL="0" rtl="0" algn="ctr">
+              <a:spcBef>
+                <a:spcPts val="0"/>
+              </a:spcBef>
+              <a:spcAft>
+                <a:spcPts val="0"/>
+              </a:spcAft>
+              <a:buNone/>
+            </a:pPr>
+            <a:r>
+              <a:t/>
+            </a:r>
+            <a:endParaRPr/>
+          </a:p>
+        </p:txBody>
+      </p:sp>
       <p:pic>
         <p:nvPicPr>
-          <p:cNvPr id="135" name="Google Shape;135;p13"/>
+          <p:cNvPr id="237" name="Google Shape;237;p13" title="Loan comparison calculator photo"/>
           <p:cNvPicPr preferRelativeResize="0"/>
           <p:nvPr/>
         </p:nvPicPr>
-        <p:blipFill>
+        <p:blipFill rotWithShape="1">
           <a:blip r:embed="rId3">
             <a:alphaModFix/>
           </a:blip>
-          <a:stretch>
-            <a:fillRect/>
-          </a:stretch>
+          <a:srcRect b="0" l="0" r="0" t="0"/>
+          <a:stretch/>
         </p:blipFill>
         <p:spPr>
           <a:xfrm>
-            <a:off x="0" y="0"/>
-            <a:ext cx="12191998" cy="6857999"/>
+            <a:off x="8280400" y="1253067"/>
+            <a:ext cx="3759199" cy="2540000"/>
           </a:xfrm>
           <a:prstGeom prst="rect">
             <a:avLst/>
@@ -9772,7 +14856,56 @@
       </p:pic>
       <p:sp>
         <p:nvSpPr>
-          <p:cNvPr id="136" name="Google Shape;136;p13"/>
+          <p:cNvPr id="238" name="Google Shape;238;p13"/>
+          <p:cNvSpPr/>
+          <p:nvPr/>
+        </p:nvSpPr>
+        <p:spPr>
+          <a:xfrm>
+            <a:off x="8280400" y="1253067"/>
+            <a:ext cx="3759300" cy="2540100"/>
+          </a:xfrm>
+          <a:prstGeom prst="roundRect">
+            <a:avLst>
+              <a:gd fmla="val 16667" name="adj"/>
+            </a:avLst>
+          </a:prstGeom>
+          <a:noFill/>
+          <a:ln cap="flat" cmpd="sng" w="38950">
+            <a:solidFill>
+              <a:srgbClr val="1C1C1C"/>
+            </a:solidFill>
+            <a:prstDash val="solid"/>
+            <a:round/>
+            <a:headEnd len="sm" w="sm" type="none"/>
+            <a:tailEnd len="sm" w="sm" type="none"/>
+          </a:ln>
+        </p:spPr>
+        <p:txBody>
+          <a:bodyPr anchorCtr="0" anchor="ctr" bIns="91425" lIns="91425" spcFirstLastPara="1" rIns="91425" wrap="square" tIns="91425">
+            <a:noAutofit/>
+          </a:bodyPr>
+          <a:lstStyle/>
+          <a:p>
+            <a:pPr indent="0" lvl="0" marL="0" rtl="0" algn="ctr">
+              <a:spcBef>
+                <a:spcPts val="0"/>
+              </a:spcBef>
+              <a:spcAft>
+                <a:spcPts val="0"/>
+              </a:spcAft>
+              <a:buNone/>
+            </a:pPr>
+            <a:r>
+              <a:t/>
+            </a:r>
+            <a:endParaRPr/>
+          </a:p>
+        </p:txBody>
+      </p:sp>
+      <p:sp>
+        <p:nvSpPr>
+          <p:cNvPr id="239" name="Google Shape;239;p13"/>
           <p:cNvSpPr txBox="1"/>
           <p:nvPr/>
         </p:nvSpPr>
@@ -9825,7 +14958,7 @@
       </p:sp>
       <p:sp>
         <p:nvSpPr>
-          <p:cNvPr id="137" name="Google Shape;137;p13"/>
+          <p:cNvPr id="240" name="Google Shape;240;p13"/>
           <p:cNvSpPr txBox="1"/>
           <p:nvPr/>
         </p:nvSpPr>
@@ -9878,7 +15011,7 @@
       </p:sp>
       <p:sp>
         <p:nvSpPr>
-          <p:cNvPr id="138" name="Google Shape;138;p13"/>
+          <p:cNvPr id="241" name="Google Shape;241;p13"/>
           <p:cNvSpPr txBox="1"/>
           <p:nvPr/>
         </p:nvSpPr>
@@ -9931,7 +15064,7 @@
       </p:sp>
       <p:sp>
         <p:nvSpPr>
-          <p:cNvPr id="139" name="Google Shape;139;p13"/>
+          <p:cNvPr id="242" name="Google Shape;242;p13"/>
           <p:cNvSpPr txBox="1"/>
           <p:nvPr/>
         </p:nvSpPr>
@@ -9984,7 +15117,7 @@
       </p:sp>
       <p:sp>
         <p:nvSpPr>
-          <p:cNvPr id="140" name="Google Shape;140;p13"/>
+          <p:cNvPr id="243" name="Google Shape;243;p13"/>
           <p:cNvSpPr txBox="1"/>
           <p:nvPr/>
         </p:nvSpPr>
@@ -10037,7 +15170,7 @@
       </p:sp>
       <p:sp>
         <p:nvSpPr>
-          <p:cNvPr id="141" name="Google Shape;141;p13"/>
+          <p:cNvPr id="244" name="Google Shape;244;p13"/>
           <p:cNvSpPr txBox="1"/>
           <p:nvPr/>
         </p:nvSpPr>
@@ -10090,7 +15223,7 @@
       </p:sp>
       <p:sp>
         <p:nvSpPr>
-          <p:cNvPr id="142" name="Google Shape;142;p13"/>
+          <p:cNvPr id="245" name="Google Shape;245;p13"/>
           <p:cNvSpPr txBox="1"/>
           <p:nvPr/>
         </p:nvSpPr>
@@ -10143,7 +15276,7 @@
       </p:sp>
       <p:sp>
         <p:nvSpPr>
-          <p:cNvPr id="143" name="Google Shape;143;p13"/>
+          <p:cNvPr id="246" name="Google Shape;246;p13"/>
           <p:cNvSpPr txBox="1"/>
           <p:nvPr/>
         </p:nvSpPr>
@@ -10196,7 +15329,7 @@
       </p:sp>
       <p:sp>
         <p:nvSpPr>
-          <p:cNvPr id="144" name="Google Shape;144;p13"/>
+          <p:cNvPr id="247" name="Google Shape;247;p13"/>
           <p:cNvSpPr txBox="1"/>
           <p:nvPr/>
         </p:nvSpPr>
@@ -10249,7 +15382,7 @@
       </p:sp>
       <p:sp>
         <p:nvSpPr>
-          <p:cNvPr id="145" name="Google Shape;145;p13"/>
+          <p:cNvPr id="248" name="Google Shape;248;p13"/>
           <p:cNvSpPr txBox="1"/>
           <p:nvPr/>
         </p:nvSpPr>
@@ -10302,7 +15435,7 @@
       </p:sp>
       <p:sp>
         <p:nvSpPr>
-          <p:cNvPr id="146" name="Google Shape;146;p13"/>
+          <p:cNvPr id="249" name="Google Shape;249;p13"/>
           <p:cNvSpPr txBox="1"/>
           <p:nvPr/>
         </p:nvSpPr>
@@ -10355,7 +15488,7 @@
       </p:sp>
       <p:sp>
         <p:nvSpPr>
-          <p:cNvPr id="147" name="Google Shape;147;p13"/>
+          <p:cNvPr id="250" name="Google Shape;250;p13"/>
           <p:cNvSpPr txBox="1"/>
           <p:nvPr/>
         </p:nvSpPr>
@@ -10408,7 +15541,7 @@
       </p:sp>
       <p:sp>
         <p:nvSpPr>
-          <p:cNvPr id="148" name="Google Shape;148;p13"/>
+          <p:cNvPr id="251" name="Google Shape;251;p13"/>
           <p:cNvSpPr txBox="1"/>
           <p:nvPr/>
         </p:nvSpPr>
@@ -10461,7 +15594,7 @@
       </p:sp>
       <p:sp>
         <p:nvSpPr>
-          <p:cNvPr id="149" name="Google Shape;149;p13"/>
+          <p:cNvPr id="252" name="Google Shape;252;p13"/>
           <p:cNvSpPr txBox="1"/>
           <p:nvPr/>
         </p:nvSpPr>
@@ -10514,7 +15647,7 @@
       </p:sp>
       <p:sp>
         <p:nvSpPr>
-          <p:cNvPr id="150" name="Google Shape;150;p13"/>
+          <p:cNvPr id="253" name="Google Shape;253;p13"/>
           <p:cNvSpPr txBox="1"/>
           <p:nvPr/>
         </p:nvSpPr>
@@ -10567,7 +15700,7 @@
       </p:sp>
       <p:sp>
         <p:nvSpPr>
-          <p:cNvPr id="151" name="Google Shape;151;p13"/>
+          <p:cNvPr id="254" name="Google Shape;254;p13"/>
           <p:cNvSpPr txBox="1"/>
           <p:nvPr/>
         </p:nvSpPr>
@@ -10620,7 +15753,7 @@
       </p:sp>
       <p:sp>
         <p:nvSpPr>
-          <p:cNvPr id="152" name="Google Shape;152;p13"/>
+          <p:cNvPr id="255" name="Google Shape;255;p13"/>
           <p:cNvSpPr txBox="1"/>
           <p:nvPr/>
         </p:nvSpPr>
@@ -10673,7 +15806,7 @@
       </p:sp>
       <p:sp>
         <p:nvSpPr>
-          <p:cNvPr id="153" name="Google Shape;153;p13"/>
+          <p:cNvPr id="256" name="Google Shape;256;p13"/>
           <p:cNvSpPr txBox="1"/>
           <p:nvPr/>
         </p:nvSpPr>
@@ -10726,7 +15859,7 @@
       </p:sp>
       <p:sp>
         <p:nvSpPr>
-          <p:cNvPr id="154" name="Google Shape;154;p13"/>
+          <p:cNvPr id="257" name="Google Shape;257;p13"/>
           <p:cNvSpPr txBox="1"/>
           <p:nvPr/>
         </p:nvSpPr>
@@ -10779,7 +15912,7 @@
       </p:sp>
       <p:sp>
         <p:nvSpPr>
-          <p:cNvPr id="155" name="Google Shape;155;p13"/>
+          <p:cNvPr id="258" name="Google Shape;258;p13"/>
           <p:cNvSpPr txBox="1"/>
           <p:nvPr/>
         </p:nvSpPr>
@@ -10832,7 +15965,7 @@
       </p:sp>
       <p:sp>
         <p:nvSpPr>
-          <p:cNvPr id="156" name="Google Shape;156;p13"/>
+          <p:cNvPr id="259" name="Google Shape;259;p13"/>
           <p:cNvSpPr txBox="1"/>
           <p:nvPr/>
         </p:nvSpPr>
@@ -10885,7 +16018,7 @@
       </p:sp>
       <p:sp>
         <p:nvSpPr>
-          <p:cNvPr id="157" name="Google Shape;157;p13"/>
+          <p:cNvPr id="260" name="Google Shape;260;p13"/>
           <p:cNvSpPr txBox="1"/>
           <p:nvPr/>
         </p:nvSpPr>
@@ -10938,7 +16071,7 @@
       </p:sp>
       <p:sp>
         <p:nvSpPr>
-          <p:cNvPr id="158" name="Google Shape;158;p13"/>
+          <p:cNvPr id="261" name="Google Shape;261;p13"/>
           <p:cNvSpPr txBox="1"/>
           <p:nvPr/>
         </p:nvSpPr>
@@ -10991,7 +16124,7 @@
       </p:sp>
       <p:sp>
         <p:nvSpPr>
-          <p:cNvPr id="159" name="Google Shape;159;p13"/>
+          <p:cNvPr id="262" name="Google Shape;262;p13"/>
           <p:cNvSpPr txBox="1"/>
           <p:nvPr/>
         </p:nvSpPr>
@@ -11052,7 +16185,7 @@
       </p:sp>
       <p:sp>
         <p:nvSpPr>
-          <p:cNvPr id="160" name="Google Shape;160;p13"/>
+          <p:cNvPr id="263" name="Google Shape;263;p13"/>
           <p:cNvSpPr txBox="1"/>
           <p:nvPr/>
         </p:nvSpPr>
@@ -11144,13 +16277,13 @@
     <p:bg>
       <p:bgPr>
         <a:solidFill>
-          <a:srgbClr val="FFF9EE"/>
+          <a:srgbClr val="FFFDF7"/>
         </a:solidFill>
       </p:bgPr>
     </p:bg>
     <p:spTree>
       <p:nvGrpSpPr>
-        <p:cNvPr id="165" name="Shape 165"/>
+        <p:cNvPr id="268" name="Shape 268"/>
         <p:cNvGrpSpPr/>
         <p:nvPr/>
       </p:nvGrpSpPr>
@@ -11162,24 +16295,278 @@
           <a:chExt cx="0" cy="0"/>
         </a:xfrm>
       </p:grpSpPr>
+      <p:sp>
+        <p:nvSpPr>
+          <p:cNvPr id="269" name="Google Shape;269;p14"/>
+          <p:cNvSpPr/>
+          <p:nvPr/>
+        </p:nvSpPr>
+        <p:spPr>
+          <a:xfrm>
+            <a:off x="508000" y="304800"/>
+            <a:ext cx="7789200" cy="711300"/>
+          </a:xfrm>
+          <a:prstGeom prst="roundRect">
+            <a:avLst>
+              <a:gd fmla="val 16667" name="adj"/>
+            </a:avLst>
+          </a:prstGeom>
+          <a:solidFill>
+            <a:srgbClr val="FDE047"/>
+          </a:solidFill>
+          <a:ln cap="flat" cmpd="sng" w="38950">
+            <a:solidFill>
+              <a:srgbClr val="1C1C1C"/>
+            </a:solidFill>
+            <a:prstDash val="solid"/>
+            <a:round/>
+            <a:headEnd len="sm" w="sm" type="none"/>
+            <a:tailEnd len="sm" w="sm" type="none"/>
+          </a:ln>
+        </p:spPr>
+        <p:txBody>
+          <a:bodyPr anchorCtr="0" anchor="ctr" bIns="91425" lIns="91425" spcFirstLastPara="1" rIns="91425" wrap="square" tIns="91425">
+            <a:noAutofit/>
+          </a:bodyPr>
+          <a:lstStyle/>
+          <a:p>
+            <a:pPr indent="0" lvl="0" marL="0" rtl="0" algn="ctr">
+              <a:spcBef>
+                <a:spcPts val="0"/>
+              </a:spcBef>
+              <a:spcAft>
+                <a:spcPts val="0"/>
+              </a:spcAft>
+              <a:buNone/>
+            </a:pPr>
+            <a:r>
+              <a:t/>
+            </a:r>
+            <a:endParaRPr/>
+          </a:p>
+        </p:txBody>
+      </p:sp>
+      <p:sp>
+        <p:nvSpPr>
+          <p:cNvPr id="270" name="Google Shape;270;p14"/>
+          <p:cNvSpPr/>
+          <p:nvPr/>
+        </p:nvSpPr>
+        <p:spPr>
+          <a:xfrm>
+            <a:off x="9652000" y="304800"/>
+            <a:ext cx="2031900" cy="575700"/>
+          </a:xfrm>
+          <a:prstGeom prst="roundRect">
+            <a:avLst>
+              <a:gd fmla="val 16667" name="adj"/>
+            </a:avLst>
+          </a:prstGeom>
+          <a:solidFill>
+            <a:srgbClr val="F472B6"/>
+          </a:solidFill>
+          <a:ln cap="flat" cmpd="sng" w="38950">
+            <a:solidFill>
+              <a:srgbClr val="1C1C1C"/>
+            </a:solidFill>
+            <a:prstDash val="solid"/>
+            <a:round/>
+            <a:headEnd len="sm" w="sm" type="none"/>
+            <a:tailEnd len="sm" w="sm" type="none"/>
+          </a:ln>
+        </p:spPr>
+        <p:txBody>
+          <a:bodyPr anchorCtr="0" anchor="ctr" bIns="91425" lIns="91425" spcFirstLastPara="1" rIns="91425" wrap="square" tIns="91425">
+            <a:noAutofit/>
+          </a:bodyPr>
+          <a:lstStyle/>
+          <a:p>
+            <a:pPr indent="0" lvl="0" marL="0" rtl="0" algn="ctr">
+              <a:spcBef>
+                <a:spcPts val="0"/>
+              </a:spcBef>
+              <a:spcAft>
+                <a:spcPts val="0"/>
+              </a:spcAft>
+              <a:buNone/>
+            </a:pPr>
+            <a:r>
+              <a:t/>
+            </a:r>
+            <a:endParaRPr/>
+          </a:p>
+        </p:txBody>
+      </p:sp>
+      <p:sp>
+        <p:nvSpPr>
+          <p:cNvPr id="271" name="Google Shape;271;p14"/>
+          <p:cNvSpPr/>
+          <p:nvPr/>
+        </p:nvSpPr>
+        <p:spPr>
+          <a:xfrm>
+            <a:off x="592667" y="1236133"/>
+            <a:ext cx="6942600" cy="2929500"/>
+          </a:xfrm>
+          <a:prstGeom prst="roundRect">
+            <a:avLst>
+              <a:gd fmla="val 16667" name="adj"/>
+            </a:avLst>
+          </a:prstGeom>
+          <a:solidFill>
+            <a:srgbClr val="F0FFF6"/>
+          </a:solidFill>
+          <a:ln cap="flat" cmpd="sng" w="38950">
+            <a:solidFill>
+              <a:srgbClr val="1C1C1C"/>
+            </a:solidFill>
+            <a:prstDash val="solid"/>
+            <a:round/>
+            <a:headEnd len="sm" w="sm" type="none"/>
+            <a:tailEnd len="sm" w="sm" type="none"/>
+          </a:ln>
+        </p:spPr>
+        <p:txBody>
+          <a:bodyPr anchorCtr="0" anchor="ctr" bIns="91425" lIns="91425" spcFirstLastPara="1" rIns="91425" wrap="square" tIns="91425">
+            <a:noAutofit/>
+          </a:bodyPr>
+          <a:lstStyle/>
+          <a:p>
+            <a:pPr indent="0" lvl="0" marL="0" rtl="0" algn="ctr">
+              <a:spcBef>
+                <a:spcPts val="0"/>
+              </a:spcBef>
+              <a:spcAft>
+                <a:spcPts val="0"/>
+              </a:spcAft>
+              <a:buNone/>
+            </a:pPr>
+            <a:r>
+              <a:t/>
+            </a:r>
+            <a:endParaRPr/>
+          </a:p>
+        </p:txBody>
+      </p:sp>
+      <p:sp>
+        <p:nvSpPr>
+          <p:cNvPr id="272" name="Google Shape;272;p14"/>
+          <p:cNvSpPr/>
+          <p:nvPr/>
+        </p:nvSpPr>
+        <p:spPr>
+          <a:xfrm>
+            <a:off x="592667" y="4368800"/>
+            <a:ext cx="6942600" cy="1964400"/>
+          </a:xfrm>
+          <a:prstGeom prst="roundRect">
+            <a:avLst>
+              <a:gd fmla="val 16667" name="adj"/>
+            </a:avLst>
+          </a:prstGeom>
+          <a:solidFill>
+            <a:srgbClr val="FFF7ED"/>
+          </a:solidFill>
+          <a:ln cap="flat" cmpd="sng" w="38950">
+            <a:solidFill>
+              <a:srgbClr val="1C1C1C"/>
+            </a:solidFill>
+            <a:prstDash val="solid"/>
+            <a:round/>
+            <a:headEnd len="sm" w="sm" type="none"/>
+            <a:tailEnd len="sm" w="sm" type="none"/>
+          </a:ln>
+        </p:spPr>
+        <p:txBody>
+          <a:bodyPr anchorCtr="0" anchor="ctr" bIns="91425" lIns="91425" spcFirstLastPara="1" rIns="91425" wrap="square" tIns="91425">
+            <a:noAutofit/>
+          </a:bodyPr>
+          <a:lstStyle/>
+          <a:p>
+            <a:pPr indent="0" lvl="0" marL="0" rtl="0" algn="ctr">
+              <a:spcBef>
+                <a:spcPts val="0"/>
+              </a:spcBef>
+              <a:spcAft>
+                <a:spcPts val="0"/>
+              </a:spcAft>
+              <a:buNone/>
+            </a:pPr>
+            <a:r>
+              <a:t/>
+            </a:r>
+            <a:endParaRPr/>
+          </a:p>
+        </p:txBody>
+      </p:sp>
+      <p:sp>
+        <p:nvSpPr>
+          <p:cNvPr id="273" name="Google Shape;273;p14"/>
+          <p:cNvSpPr/>
+          <p:nvPr/>
+        </p:nvSpPr>
+        <p:spPr>
+          <a:xfrm>
+            <a:off x="8077200" y="4368800"/>
+            <a:ext cx="3623700" cy="1964400"/>
+          </a:xfrm>
+          <a:prstGeom prst="roundRect">
+            <a:avLst>
+              <a:gd fmla="val 16667" name="adj"/>
+            </a:avLst>
+          </a:prstGeom>
+          <a:solidFill>
+            <a:srgbClr val="38BDF8"/>
+          </a:solidFill>
+          <a:ln cap="flat" cmpd="sng" w="38950">
+            <a:solidFill>
+              <a:srgbClr val="1C1C1C"/>
+            </a:solidFill>
+            <a:prstDash val="solid"/>
+            <a:round/>
+            <a:headEnd len="sm" w="sm" type="none"/>
+            <a:tailEnd len="sm" w="sm" type="none"/>
+          </a:ln>
+        </p:spPr>
+        <p:txBody>
+          <a:bodyPr anchorCtr="0" anchor="ctr" bIns="91425" lIns="91425" spcFirstLastPara="1" rIns="91425" wrap="square" tIns="91425">
+            <a:noAutofit/>
+          </a:bodyPr>
+          <a:lstStyle/>
+          <a:p>
+            <a:pPr indent="0" lvl="0" marL="0" rtl="0" algn="ctr">
+              <a:spcBef>
+                <a:spcPts val="0"/>
+              </a:spcBef>
+              <a:spcAft>
+                <a:spcPts val="0"/>
+              </a:spcAft>
+              <a:buNone/>
+            </a:pPr>
+            <a:r>
+              <a:t/>
+            </a:r>
+            <a:endParaRPr/>
+          </a:p>
+        </p:txBody>
+      </p:sp>
       <p:pic>
         <p:nvPicPr>
-          <p:cNvPr id="166" name="Google Shape;166;p14"/>
+          <p:cNvPr id="274" name="Google Shape;274;p14" title="Notebook and pen photo"/>
           <p:cNvPicPr preferRelativeResize="0"/>
           <p:nvPr/>
         </p:nvPicPr>
-        <p:blipFill>
+        <p:blipFill rotWithShape="1">
           <a:blip r:embed="rId3">
             <a:alphaModFix/>
           </a:blip>
-          <a:stretch>
-            <a:fillRect/>
-          </a:stretch>
+          <a:srcRect b="0" l="0" r="0" t="0"/>
+          <a:stretch/>
         </p:blipFill>
         <p:spPr>
           <a:xfrm>
-            <a:off x="0" y="0"/>
-            <a:ext cx="12191998" cy="6857999"/>
+            <a:off x="8077200" y="1236133"/>
+            <a:ext cx="3623733" cy="2540000"/>
           </a:xfrm>
           <a:prstGeom prst="rect">
             <a:avLst/>
@@ -11192,7 +16579,56 @@
       </p:pic>
       <p:sp>
         <p:nvSpPr>
-          <p:cNvPr id="167" name="Google Shape;167;p14"/>
+          <p:cNvPr id="275" name="Google Shape;275;p14"/>
+          <p:cNvSpPr/>
+          <p:nvPr/>
+        </p:nvSpPr>
+        <p:spPr>
+          <a:xfrm>
+            <a:off x="8077200" y="1236133"/>
+            <a:ext cx="3623700" cy="2540100"/>
+          </a:xfrm>
+          <a:prstGeom prst="roundRect">
+            <a:avLst>
+              <a:gd fmla="val 16667" name="adj"/>
+            </a:avLst>
+          </a:prstGeom>
+          <a:noFill/>
+          <a:ln cap="flat" cmpd="sng" w="38950">
+            <a:solidFill>
+              <a:srgbClr val="1C1C1C"/>
+            </a:solidFill>
+            <a:prstDash val="solid"/>
+            <a:round/>
+            <a:headEnd len="sm" w="sm" type="none"/>
+            <a:tailEnd len="sm" w="sm" type="none"/>
+          </a:ln>
+        </p:spPr>
+        <p:txBody>
+          <a:bodyPr anchorCtr="0" anchor="ctr" bIns="91425" lIns="91425" spcFirstLastPara="1" rIns="91425" wrap="square" tIns="91425">
+            <a:noAutofit/>
+          </a:bodyPr>
+          <a:lstStyle/>
+          <a:p>
+            <a:pPr indent="0" lvl="0" marL="0" rtl="0" algn="ctr">
+              <a:spcBef>
+                <a:spcPts val="0"/>
+              </a:spcBef>
+              <a:spcAft>
+                <a:spcPts val="0"/>
+              </a:spcAft>
+              <a:buNone/>
+            </a:pPr>
+            <a:r>
+              <a:t/>
+            </a:r>
+            <a:endParaRPr/>
+          </a:p>
+        </p:txBody>
+      </p:sp>
+      <p:sp>
+        <p:nvSpPr>
+          <p:cNvPr id="276" name="Google Shape;276;p14"/>
           <p:cNvSpPr txBox="1"/>
           <p:nvPr/>
         </p:nvSpPr>
@@ -11245,7 +16681,7 @@
       </p:sp>
       <p:sp>
         <p:nvSpPr>
-          <p:cNvPr id="168" name="Google Shape;168;p14"/>
+          <p:cNvPr id="277" name="Google Shape;277;p14"/>
           <p:cNvSpPr txBox="1"/>
           <p:nvPr/>
         </p:nvSpPr>
@@ -11298,7 +16734,7 @@
       </p:sp>
       <p:sp>
         <p:nvSpPr>
-          <p:cNvPr id="169" name="Google Shape;169;p14"/>
+          <p:cNvPr id="278" name="Google Shape;278;p14"/>
           <p:cNvSpPr txBox="1"/>
           <p:nvPr/>
         </p:nvSpPr>
@@ -11351,7 +16787,7 @@
       </p:sp>
       <p:sp>
         <p:nvSpPr>
-          <p:cNvPr id="170" name="Google Shape;170;p14"/>
+          <p:cNvPr id="279" name="Google Shape;279;p14"/>
           <p:cNvSpPr txBox="1"/>
           <p:nvPr/>
         </p:nvSpPr>
@@ -11404,7 +16840,7 @@
       </p:sp>
       <p:sp>
         <p:nvSpPr>
-          <p:cNvPr id="171" name="Google Shape;171;p14"/>
+          <p:cNvPr id="280" name="Google Shape;280;p14"/>
           <p:cNvSpPr txBox="1"/>
           <p:nvPr/>
         </p:nvSpPr>
@@ -11457,7 +16893,7 @@
       </p:sp>
       <p:sp>
         <p:nvSpPr>
-          <p:cNvPr id="172" name="Google Shape;172;p14"/>
+          <p:cNvPr id="281" name="Google Shape;281;p14"/>
           <p:cNvSpPr txBox="1"/>
           <p:nvPr/>
         </p:nvSpPr>
@@ -11510,7 +16946,7 @@
       </p:sp>
       <p:sp>
         <p:nvSpPr>
-          <p:cNvPr id="173" name="Google Shape;173;p14"/>
+          <p:cNvPr id="282" name="Google Shape;282;p14"/>
           <p:cNvSpPr txBox="1"/>
           <p:nvPr/>
         </p:nvSpPr>
@@ -11563,7 +16999,7 @@
       </p:sp>
       <p:sp>
         <p:nvSpPr>
-          <p:cNvPr id="174" name="Google Shape;174;p14"/>
+          <p:cNvPr id="283" name="Google Shape;283;p14"/>
           <p:cNvSpPr txBox="1"/>
           <p:nvPr/>
         </p:nvSpPr>
@@ -11616,7 +17052,7 @@
       </p:sp>
       <p:sp>
         <p:nvSpPr>
-          <p:cNvPr id="175" name="Google Shape;175;p14"/>
+          <p:cNvPr id="284" name="Google Shape;284;p14"/>
           <p:cNvSpPr txBox="1"/>
           <p:nvPr/>
         </p:nvSpPr>
@@ -11669,7 +17105,7 @@
       </p:sp>
       <p:sp>
         <p:nvSpPr>
-          <p:cNvPr id="176" name="Google Shape;176;p14"/>
+          <p:cNvPr id="285" name="Google Shape;285;p14"/>
           <p:cNvSpPr txBox="1"/>
           <p:nvPr/>
         </p:nvSpPr>
@@ -11722,7 +17158,7 @@
       </p:sp>
       <p:sp>
         <p:nvSpPr>
-          <p:cNvPr id="177" name="Google Shape;177;p14"/>
+          <p:cNvPr id="286" name="Google Shape;286;p14"/>
           <p:cNvSpPr txBox="1"/>
           <p:nvPr/>
         </p:nvSpPr>
@@ -11775,7 +17211,7 @@
       </p:sp>
       <p:sp>
         <p:nvSpPr>
-          <p:cNvPr id="178" name="Google Shape;178;p14"/>
+          <p:cNvPr id="287" name="Google Shape;287;p14"/>
           <p:cNvSpPr txBox="1"/>
           <p:nvPr/>
         </p:nvSpPr>
@@ -11828,7 +17264,7 @@
       </p:sp>
       <p:sp>
         <p:nvSpPr>
-          <p:cNvPr id="179" name="Google Shape;179;p14"/>
+          <p:cNvPr id="288" name="Google Shape;288;p14"/>
           <p:cNvSpPr txBox="1"/>
           <p:nvPr/>
         </p:nvSpPr>
@@ -11908,7 +17344,7 @@
       </p:sp>
       <p:sp>
         <p:nvSpPr>
-          <p:cNvPr id="180" name="Google Shape;180;p14"/>
+          <p:cNvPr id="289" name="Google Shape;289;p14"/>
           <p:cNvSpPr txBox="1"/>
           <p:nvPr/>
         </p:nvSpPr>
